--- a/Planning docs/Slides/lesson-10-1-teacher-slides.pptx
+++ b/Planning docs/Slides/lesson-10-1-teacher-slides.pptx
@@ -21,9 +21,12 @@
     <p:sldId id="269" r:id="rId15"/>
     <p:sldId id="270" r:id="rId16"/>
     <p:sldId id="271" r:id="rId17"/>
+    <p:sldId id="272" r:id="rId18"/>
+    <p:sldId id="273" r:id="rId19"/>
+    <p:sldId id="274" r:id="rId20"/>
   </p:sldIdLst>
   <p:notesMasterIdLst>
-    <p:notesMasterId r:id="rId18"/>
+    <p:notesMasterId r:id="rId21"/>
   </p:notesMasterIdLst>
   <p:sldSz cx="9144000" cy="5143500"/>
   <p:notesSz cx="5143500" cy="9144000"/>
@@ -605,7 +608,7 @@
           <a:p>
             <a:r>
               <a:rPr lang="en-US" dirty="0"/>
-              <a:t>Each word appears in the chapters read this week, in the author’s own sentence.</a:t>
+              <a:t>Break the word into base + word part. Ask what the part adds to the meaning.</a:t>
             </a:r>
             <a:endParaRPr lang="en-US" dirty="0"/>
           </a:p>
@@ -693,7 +696,7 @@
           <a:p>
             <a:r>
               <a:rPr lang="en-US" dirty="0"/>
-              <a:t>Answers: She, it, They, him</a:t>
+              <a:t>Each word appears in the chapters read this week, in the author’s own sentence.</a:t>
             </a:r>
             <a:endParaRPr lang="en-US" dirty="0"/>
           </a:p>
@@ -781,7 +784,11 @@
           <a:p>
             <a:r>
               <a:rPr lang="en-US" dirty="0"/>
-              <a:t>Answers: She, it, They, him</a:t>
+              <a:t>Let students talk through the questions before revealing the pattern.
+A subject pronoun does the action: I, he, she, it, we, they. An object pronoun receives it: me, him, her, it, us, them. Say the sentence aloud — your ear will usually catch the wrong one.
+she is the subject doing the knowing; it is the object being known.
+He (King Phillip) is the subject doing the declaring; them (the rats) is the object receiving it. Swap them — Them declared he outlaws — and your ear rejects it at once.
+The word his in the first sentence is a different kind of pronoun. It shows whose revenge, so it is not in either group this week.</a:t>
             </a:r>
             <a:endParaRPr lang="en-US" dirty="0"/>
           </a:p>
@@ -869,7 +876,11 @@
           <a:p>
             <a:r>
               <a:rPr lang="en-US" dirty="0"/>
-              <a:t>y became i: hurried, cried, carried, emptied | y stayed y: played, stayed, obeyed, enjoyed</a:t>
+              <a:t>Let students talk through the questions before revealing the pattern.
+A subject pronoun does the action: I, he, she, it, we, they. An object pronoun receives it: me, him, her, it, us, them. Say the sentence aloud — your ear will usually catch the wrong one.
+she is the subject doing the knowing; it is the object being known.
+He (King Phillip) is the subject doing the declaring; them (the rats) is the object receiving it. Swap them — Them declared he outlaws — and your ear rejects it at once.
+The word his in the first sentence is a different kind of pronoun. It shows whose revenge, so it is not in either group this week.</a:t>
             </a:r>
             <a:endParaRPr lang="en-US" dirty="0"/>
           </a:p>
@@ -957,7 +968,7 @@
           <a:p>
             <a:r>
               <a:rPr lang="en-US" dirty="0"/>
-              <a:t>y became i: hurried, cried, carried, emptied | y stayed y: played, stayed, obeyed, enjoyed</a:t>
+              <a:t>Group 1: I, he, she, they | Group 2: me, him, her, them</a:t>
             </a:r>
             <a:endParaRPr lang="en-US" dirty="0"/>
           </a:p>
@@ -1045,7 +1056,7 @@
           <a:p>
             <a:r>
               <a:rPr lang="en-US" dirty="0"/>
-              <a:t>Read the chapters, then return to the pause questions.</a:t>
+              <a:t>Group 1: I, he, she, they | Group 2: me, him, her, them</a:t>
             </a:r>
             <a:endParaRPr lang="en-US" dirty="0"/>
           </a:p>
@@ -1133,7 +1144,7 @@
           <a:p>
             <a:r>
               <a:rPr lang="en-US" dirty="0"/>
-              <a:t>Writer’s Workshop stage for the week.</a:t>
+              <a:t>just -s: spoons, bowls, kettles | -es: dishes, boxes, wishes | y → -ies: stories, ponies</a:t>
             </a:r>
             <a:endParaRPr lang="en-US" dirty="0"/>
           </a:p>
@@ -1157,6 +1168,270 @@
             <a:fld id="{F7021451-1387-4CA6-816F-3879F97B5CBC}" type="slidenum">
               <a:rPr lang="en-US"/>
               <a:t>16</a:t>
+            </a:fld>
+            <a:endParaRPr lang="en-US"/>
+          </a:p>
+        </p:txBody>
+      </p:sp>
+    </p:spTree>
+    <p:extLst>
+      <p:ext uri="{BB962C8B-B14F-4D97-AF65-F5344CB8AC3E}">
+        <p14:creationId xmlns:p14="http://schemas.microsoft.com/office/powerpoint/2010/main" val="1024086991"/>
+      </p:ext>
+    </p:extLst>
+  </p:cSld>
+  <p:clrMapOvr>
+    <a:masterClrMapping/>
+  </p:clrMapOvr>
+</p:notes>
+</file>
+
+<file path=ppt/notesSlides/notesSlide17.xml><?xml version="1.0" encoding="utf-8"?>
+<p:notes xmlns:a="http://schemas.openxmlformats.org/drawingml/2006/main" xmlns:r="http://schemas.openxmlformats.org/officeDocument/2006/relationships" xmlns:p="http://schemas.openxmlformats.org/presentationml/2006/main">
+  <p:cSld>
+    <p:spTree>
+      <p:nvGrpSpPr>
+        <p:cNvPr id="1" name=""/>
+        <p:cNvGrpSpPr/>
+        <p:nvPr/>
+      </p:nvGrpSpPr>
+      <p:grpSpPr>
+        <a:xfrm>
+          <a:off x="0" y="0"/>
+          <a:ext cx="0" cy="0"/>
+          <a:chOff x="0" y="0"/>
+          <a:chExt cx="0" cy="0"/>
+        </a:xfrm>
+      </p:grpSpPr>
+      <p:sp>
+        <p:nvSpPr>
+          <p:cNvPr id="2" name="Slide Image Placeholder 1"/>
+          <p:cNvSpPr>
+            <a:spLocks noGrp="1" noRot="1" noChangeAspect="1"/>
+          </p:cNvSpPr>
+          <p:nvPr>
+            <p:ph type="sldImg"/>
+          </p:nvPr>
+        </p:nvSpPr>
+        <p:spPr/>
+      </p:sp>
+      <p:sp>
+        <p:nvSpPr>
+          <p:cNvPr id="3" name="Notes Placeholder 2"/>
+          <p:cNvSpPr>
+            <a:spLocks noGrp="1"/>
+          </p:cNvSpPr>
+          <p:nvPr>
+            <p:ph type="body" idx="1"/>
+          </p:nvPr>
+        </p:nvSpPr>
+        <p:spPr/>
+        <p:txBody>
+          <a:bodyPr/>
+          <a:lstStyle/>
+          <a:p>
+            <a:r>
+              <a:rPr lang="en-US" dirty="0"/>
+              <a:t>just -s: spoons, bowls, kettles | -es: dishes, boxes, wishes | y → -ies: stories, ponies</a:t>
+            </a:r>
+            <a:endParaRPr lang="en-US" dirty="0"/>
+          </a:p>
+        </p:txBody>
+      </p:sp>
+      <p:sp>
+        <p:nvSpPr>
+          <p:cNvPr id="4" name="Slide Number Placeholder 3"/>
+          <p:cNvSpPr>
+            <a:spLocks noGrp="1"/>
+          </p:cNvSpPr>
+          <p:nvPr>
+            <p:ph type="sldNum" sz="quarter" idx="10"/>
+          </p:nvPr>
+        </p:nvSpPr>
+        <p:spPr/>
+        <p:txBody>
+          <a:bodyPr/>
+          <a:lstStyle/>
+          <a:p>
+            <a:fld id="{F7021451-1387-4CA6-816F-3879F97B5CBC}" type="slidenum">
+              <a:rPr lang="en-US"/>
+              <a:t>17</a:t>
+            </a:fld>
+            <a:endParaRPr lang="en-US"/>
+          </a:p>
+        </p:txBody>
+      </p:sp>
+    </p:spTree>
+    <p:extLst>
+      <p:ext uri="{BB962C8B-B14F-4D97-AF65-F5344CB8AC3E}">
+        <p14:creationId xmlns:p14="http://schemas.microsoft.com/office/powerpoint/2010/main" val="1024086991"/>
+      </p:ext>
+    </p:extLst>
+  </p:cSld>
+  <p:clrMapOvr>
+    <a:masterClrMapping/>
+  </p:clrMapOvr>
+</p:notes>
+</file>
+
+<file path=ppt/notesSlides/notesSlide18.xml><?xml version="1.0" encoding="utf-8"?>
+<p:notes xmlns:a="http://schemas.openxmlformats.org/drawingml/2006/main" xmlns:r="http://schemas.openxmlformats.org/officeDocument/2006/relationships" xmlns:p="http://schemas.openxmlformats.org/presentationml/2006/main">
+  <p:cSld>
+    <p:spTree>
+      <p:nvGrpSpPr>
+        <p:cNvPr id="1" name=""/>
+        <p:cNvGrpSpPr/>
+        <p:nvPr/>
+      </p:nvGrpSpPr>
+      <p:grpSpPr>
+        <a:xfrm>
+          <a:off x="0" y="0"/>
+          <a:ext cx="0" cy="0"/>
+          <a:chOff x="0" y="0"/>
+          <a:chExt cx="0" cy="0"/>
+        </a:xfrm>
+      </p:grpSpPr>
+      <p:sp>
+        <p:nvSpPr>
+          <p:cNvPr id="2" name="Slide Image Placeholder 1"/>
+          <p:cNvSpPr>
+            <a:spLocks noGrp="1" noRot="1" noChangeAspect="1"/>
+          </p:cNvSpPr>
+          <p:nvPr>
+            <p:ph type="sldImg"/>
+          </p:nvPr>
+        </p:nvSpPr>
+        <p:spPr/>
+      </p:sp>
+      <p:sp>
+        <p:nvSpPr>
+          <p:cNvPr id="3" name="Notes Placeholder 2"/>
+          <p:cNvSpPr>
+            <a:spLocks noGrp="1"/>
+          </p:cNvSpPr>
+          <p:nvPr>
+            <p:ph type="body" idx="1"/>
+          </p:nvPr>
+        </p:nvSpPr>
+        <p:spPr/>
+        <p:txBody>
+          <a:bodyPr/>
+          <a:lstStyle/>
+          <a:p>
+            <a:r>
+              <a:rPr lang="en-US" dirty="0"/>
+              <a:t>Read the chapters, then return to the pause questions.</a:t>
+            </a:r>
+            <a:endParaRPr lang="en-US" dirty="0"/>
+          </a:p>
+        </p:txBody>
+      </p:sp>
+      <p:sp>
+        <p:nvSpPr>
+          <p:cNvPr id="4" name="Slide Number Placeholder 3"/>
+          <p:cNvSpPr>
+            <a:spLocks noGrp="1"/>
+          </p:cNvSpPr>
+          <p:nvPr>
+            <p:ph type="sldNum" sz="quarter" idx="10"/>
+          </p:nvPr>
+        </p:nvSpPr>
+        <p:spPr/>
+        <p:txBody>
+          <a:bodyPr/>
+          <a:lstStyle/>
+          <a:p>
+            <a:fld id="{F7021451-1387-4CA6-816F-3879F97B5CBC}" type="slidenum">
+              <a:rPr lang="en-US"/>
+              <a:t>18</a:t>
+            </a:fld>
+            <a:endParaRPr lang="en-US"/>
+          </a:p>
+        </p:txBody>
+      </p:sp>
+    </p:spTree>
+    <p:extLst>
+      <p:ext uri="{BB962C8B-B14F-4D97-AF65-F5344CB8AC3E}">
+        <p14:creationId xmlns:p14="http://schemas.microsoft.com/office/powerpoint/2010/main" val="1024086991"/>
+      </p:ext>
+    </p:extLst>
+  </p:cSld>
+  <p:clrMapOvr>
+    <a:masterClrMapping/>
+  </p:clrMapOvr>
+</p:notes>
+</file>
+
+<file path=ppt/notesSlides/notesSlide19.xml><?xml version="1.0" encoding="utf-8"?>
+<p:notes xmlns:a="http://schemas.openxmlformats.org/drawingml/2006/main" xmlns:r="http://schemas.openxmlformats.org/officeDocument/2006/relationships" xmlns:p="http://schemas.openxmlformats.org/presentationml/2006/main">
+  <p:cSld>
+    <p:spTree>
+      <p:nvGrpSpPr>
+        <p:cNvPr id="1" name=""/>
+        <p:cNvGrpSpPr/>
+        <p:nvPr/>
+      </p:nvGrpSpPr>
+      <p:grpSpPr>
+        <a:xfrm>
+          <a:off x="0" y="0"/>
+          <a:ext cx="0" cy="0"/>
+          <a:chOff x="0" y="0"/>
+          <a:chExt cx="0" cy="0"/>
+        </a:xfrm>
+      </p:grpSpPr>
+      <p:sp>
+        <p:nvSpPr>
+          <p:cNvPr id="2" name="Slide Image Placeholder 1"/>
+          <p:cNvSpPr>
+            <a:spLocks noGrp="1" noRot="1" noChangeAspect="1"/>
+          </p:cNvSpPr>
+          <p:nvPr>
+            <p:ph type="sldImg"/>
+          </p:nvPr>
+        </p:nvSpPr>
+        <p:spPr/>
+      </p:sp>
+      <p:sp>
+        <p:nvSpPr>
+          <p:cNvPr id="3" name="Notes Placeholder 2"/>
+          <p:cNvSpPr>
+            <a:spLocks noGrp="1"/>
+          </p:cNvSpPr>
+          <p:nvPr>
+            <p:ph type="body" idx="1"/>
+          </p:nvPr>
+        </p:nvSpPr>
+        <p:spPr/>
+        <p:txBody>
+          <a:bodyPr/>
+          <a:lstStyle/>
+          <a:p>
+            <a:r>
+              <a:rPr lang="en-US" dirty="0"/>
+              <a:t>Writer’s Workshop stage for the week.</a:t>
+            </a:r>
+            <a:endParaRPr lang="en-US" dirty="0"/>
+          </a:p>
+        </p:txBody>
+      </p:sp>
+      <p:sp>
+        <p:nvSpPr>
+          <p:cNvPr id="4" name="Slide Number Placeholder 3"/>
+          <p:cNvSpPr>
+            <a:spLocks noGrp="1"/>
+          </p:cNvSpPr>
+          <p:nvPr>
+            <p:ph type="sldNum" sz="quarter" idx="10"/>
+          </p:nvPr>
+        </p:nvSpPr>
+        <p:spPr/>
+        <p:txBody>
+          <a:bodyPr/>
+          <a:lstStyle/>
+          <a:p>
+            <a:fld id="{F7021451-1387-4CA6-816F-3879F97B5CBC}" type="slidenum">
+              <a:rPr lang="en-US"/>
+              <a:t>19</a:t>
             </a:fld>
             <a:endParaRPr lang="en-US"/>
           </a:p>
@@ -1573,7 +1848,7 @@
           <a:p>
             <a:r>
               <a:rPr lang="en-US" dirty="0"/>
-              <a:t>Reading lens: Good readers explain different characters' perspectives . Each character sees the same events through their own eyes, wants, and fears.</a:t>
+              <a:t>Reading lens: Good readers explain different characters' perspectives. Each character sees the same events through their own eyes, wants, and fears.</a:t>
             </a:r>
             <a:endParaRPr lang="en-US" dirty="0"/>
           </a:p>
@@ -1661,8 +1936,7 @@
           <a:p>
             <a:r>
               <a:rPr lang="en-US" dirty="0"/>
-              <a:t>Corrected:  1. Miggery Sow was a very small girl with very large ears who wanted to be a princess.
-Look for: Did you catch the proper noun (Miggery Sow), the pronoun (she), and the commas in the list?</a:t>
+              <a:t>Tap through each highlighted word in the lesson and name what it does right before moving to the fix-it.</a:t>
             </a:r>
             <a:endParaRPr lang="en-US" dirty="0"/>
           </a:p>
@@ -1750,8 +2024,8 @@
           <a:p>
             <a:r>
               <a:rPr lang="en-US" dirty="0"/>
-              <a:t>Corrected:  1. Miggery Sow was a very small girl with very large ears who wanted to be a princess.
-Look for: Did you catch the proper noun (Miggery Sow), the pronoun (she), and the commas in the list?</a:t>
+              <a:t>Corrected: She had been sold by her father for a tablecloth, a hen, and a red bowl. 
+Look for: </a:t>
             </a:r>
             <a:endParaRPr lang="en-US" dirty="0"/>
           </a:p>
@@ -1839,7 +2113,8 @@
           <a:p>
             <a:r>
               <a:rPr lang="en-US" dirty="0"/>
-              <a:t>Break the word into base + word part. Ask what the part adds to the meaning.</a:t>
+              <a:t>Corrected: She had been sold by her father for a tablecloth, a hen, and a red bowl. 
+Look for: </a:t>
             </a:r>
             <a:endParaRPr lang="en-US" dirty="0"/>
           </a:p>
@@ -2412,7 +2687,7 @@
             <a:avLst/>
           </a:prstGeom>
           <a:solidFill>
-            <a:srgbClr val="55C8E8"/>
+            <a:srgbClr val="8B6FC0"/>
           </a:solidFill>
           <a:ln/>
         </p:spPr>
@@ -2450,7 +2725,7 @@
                 <a:ea typeface="Calibri" pitchFamily="34" charset="-122"/>
                 <a:cs typeface="Calibri" pitchFamily="34" charset="-120"/>
               </a:rPr>
-              <a:t>🔤  Vocabulary</a:t>
+              <a:t>🌱  Morphology</a:t>
             </a:r>
             <a:endParaRPr lang="en-US" sz="2200" dirty="0"/>
           </a:p>
@@ -2483,13 +2758,13 @@
             <a:r>
               <a:rPr lang="en-US" sz="1100" b="1" spc="100" kern="0" dirty="0">
                 <a:solidFill>
-                  <a:srgbClr val="55C8E8"/>
-                </a:solidFill>
-                <a:latin typeface="Calibri" pitchFamily="34" charset="0"/>
-                <a:ea typeface="Calibri" pitchFamily="34" charset="-122"/>
-                <a:cs typeface="Calibri" pitchFamily="34" charset="-120"/>
-              </a:rPr>
-              <a:t>VOCABULARY</a:t>
+                  <a:srgbClr val="8B6FC0"/>
+                </a:solidFill>
+                <a:latin typeface="Calibri" pitchFamily="34" charset="0"/>
+                <a:ea typeface="Calibri" pitchFamily="34" charset="-122"/>
+                <a:cs typeface="Calibri" pitchFamily="34" charset="-120"/>
+              </a:rPr>
+              <a:t>PREFIX MIS- MEANS WRONG</a:t>
             </a:r>
             <a:endParaRPr lang="en-US" sz="1100" dirty="0"/>
           </a:p>
@@ -2504,15 +2779,15 @@
         <p:spPr>
           <a:xfrm>
             <a:off x="365760" y="1097280"/>
-            <a:ext cx="8412480" cy="658368"/>
+            <a:ext cx="8412480" cy="621792"/>
           </a:xfrm>
           <a:prstGeom prst="roundRect">
             <a:avLst>
-              <a:gd name="adj" fmla="val 13889"/>
+              <a:gd name="adj" fmla="val 14706"/>
             </a:avLst>
           </a:prstGeom>
           <a:solidFill>
-            <a:srgbClr val="E5F7FC"/>
+            <a:srgbClr val="F0E8FF"/>
           </a:solidFill>
           <a:ln/>
           <a:effectLst>
@@ -2532,8 +2807,8 @@
         </p:nvSpPr>
         <p:spPr>
           <a:xfrm>
-            <a:off x="594360" y="1225296"/>
-            <a:ext cx="7863840" cy="420624"/>
+            <a:off x="594360" y="1216152"/>
+            <a:ext cx="7863840" cy="384048"/>
           </a:xfrm>
           <a:prstGeom prst="rect">
             <a:avLst/>
@@ -2549,31 +2824,17 @@
               <a:buNone/>
             </a:pPr>
             <a:r>
-              <a:rPr lang="en-US" sz="1700" b="1" dirty="0">
-                <a:solidFill>
-                  <a:srgbClr val="0E1C42"/>
-                </a:solidFill>
-                <a:latin typeface="Calibri" pitchFamily="34" charset="0"/>
-                <a:ea typeface="Calibri" pitchFamily="34" charset="-122"/>
-                <a:cs typeface="Calibri" pitchFamily="34" charset="-120"/>
-              </a:rPr>
-              <a:t>revenge  </a:t>
-            </a:r>
-            <a:pPr indent="0" marL="0">
-              <a:buNone/>
-            </a:pPr>
-            <a:r>
-              <a:rPr lang="en-US" sz="1400" dirty="0">
-                <a:solidFill>
-                  <a:srgbClr val="1E293B"/>
-                </a:solidFill>
-                <a:latin typeface="Calibri" pitchFamily="34" charset="0"/>
-                <a:ea typeface="Calibri" pitchFamily="34" charset="-122"/>
-                <a:cs typeface="Calibri" pitchFamily="34" charset="-120"/>
-              </a:rPr>
-              <a:t>Hurting someone back for something they did to you.</a:t>
-            </a:r>
-            <a:endParaRPr lang="en-US" sz="1700" dirty="0"/>
+              <a:rPr lang="en-US" sz="1500" dirty="0">
+                <a:solidFill>
+                  <a:srgbClr val="1E293B"/>
+                </a:solidFill>
+                <a:latin typeface="Calibri" pitchFamily="34" charset="0"/>
+                <a:ea typeface="Calibri" pitchFamily="34" charset="-122"/>
+                <a:cs typeface="Calibri" pitchFamily="34" charset="-120"/>
+              </a:rPr>
+              <a:t>🌱  mis- + read = misread</a:t>
+            </a:r>
+            <a:endParaRPr lang="en-US" sz="1500" dirty="0"/>
           </a:p>
         </p:txBody>
       </p:sp>
@@ -2585,16 +2846,16 @@
         </p:nvSpPr>
         <p:spPr>
           <a:xfrm>
-            <a:off x="365760" y="1828800"/>
-            <a:ext cx="8412480" cy="658368"/>
+            <a:off x="365760" y="1792224"/>
+            <a:ext cx="8412480" cy="621792"/>
           </a:xfrm>
           <a:prstGeom prst="roundRect">
             <a:avLst>
-              <a:gd name="adj" fmla="val 13889"/>
+              <a:gd name="adj" fmla="val 14706"/>
             </a:avLst>
           </a:prstGeom>
           <a:solidFill>
-            <a:srgbClr val="FFFFFF"/>
+            <a:srgbClr val="F8F4FF"/>
           </a:solidFill>
           <a:ln/>
           <a:effectLst>
@@ -2614,8 +2875,8 @@
         </p:nvSpPr>
         <p:spPr>
           <a:xfrm>
-            <a:off x="594360" y="1956816"/>
-            <a:ext cx="7863840" cy="420624"/>
+            <a:off x="594360" y="1911096"/>
+            <a:ext cx="7863840" cy="384048"/>
           </a:xfrm>
           <a:prstGeom prst="rect">
             <a:avLst/>
@@ -2631,31 +2892,17 @@
               <a:buNone/>
             </a:pPr>
             <a:r>
-              <a:rPr lang="en-US" sz="1700" b="1" dirty="0">
-                <a:solidFill>
-                  <a:srgbClr val="0E1C42"/>
-                </a:solidFill>
-                <a:latin typeface="Calibri" pitchFamily="34" charset="0"/>
-                <a:ea typeface="Calibri" pitchFamily="34" charset="-122"/>
-                <a:cs typeface="Calibri" pitchFamily="34" charset="-120"/>
-              </a:rPr>
-              <a:t>ridiculous  </a:t>
-            </a:r>
-            <a:pPr indent="0" marL="0">
-              <a:buNone/>
-            </a:pPr>
-            <a:r>
-              <a:rPr lang="en-US" sz="1400" dirty="0">
-                <a:solidFill>
-                  <a:srgbClr val="1E293B"/>
-                </a:solidFill>
-                <a:latin typeface="Calibri" pitchFamily="34" charset="0"/>
-                <a:ea typeface="Calibri" pitchFamily="34" charset="-122"/>
-                <a:cs typeface="Calibri" pitchFamily="34" charset="-120"/>
-              </a:rPr>
-              <a:t>So silly or unreasonable that it is hard to take seriously.</a:t>
-            </a:r>
-            <a:endParaRPr lang="en-US" sz="1700" dirty="0"/>
+              <a:rPr lang="en-US" sz="1500" dirty="0">
+                <a:solidFill>
+                  <a:srgbClr val="1E293B"/>
+                </a:solidFill>
+                <a:latin typeface="Calibri" pitchFamily="34" charset="0"/>
+                <a:ea typeface="Calibri" pitchFamily="34" charset="-122"/>
+                <a:cs typeface="Calibri" pitchFamily="34" charset="-120"/>
+              </a:rPr>
+              <a:t>🌱  mis- + use = misuse</a:t>
+            </a:r>
+            <a:endParaRPr lang="en-US" sz="1500" dirty="0"/>
           </a:p>
         </p:txBody>
       </p:sp>
@@ -2667,16 +2914,16 @@
         </p:nvSpPr>
         <p:spPr>
           <a:xfrm>
-            <a:off x="365760" y="2560320"/>
-            <a:ext cx="8412480" cy="658368"/>
+            <a:off x="365760" y="2487168"/>
+            <a:ext cx="8412480" cy="621792"/>
           </a:xfrm>
           <a:prstGeom prst="roundRect">
             <a:avLst>
-              <a:gd name="adj" fmla="val 13889"/>
+              <a:gd name="adj" fmla="val 14706"/>
             </a:avLst>
           </a:prstGeom>
           <a:solidFill>
-            <a:srgbClr val="E5F7FC"/>
+            <a:srgbClr val="F0E8FF"/>
           </a:solidFill>
           <a:ln/>
           <a:effectLst>
@@ -2696,8 +2943,8 @@
         </p:nvSpPr>
         <p:spPr>
           <a:xfrm>
-            <a:off x="594360" y="2688336"/>
-            <a:ext cx="7863840" cy="420624"/>
+            <a:off x="594360" y="2606040"/>
+            <a:ext cx="7863840" cy="384048"/>
           </a:xfrm>
           <a:prstGeom prst="rect">
             <a:avLst/>
@@ -2713,31 +2960,17 @@
               <a:buNone/>
             </a:pPr>
             <a:r>
-              <a:rPr lang="en-US" sz="1700" b="1" dirty="0">
-                <a:solidFill>
-                  <a:srgbClr val="0E1C42"/>
-                </a:solidFill>
-                <a:latin typeface="Calibri" pitchFamily="34" charset="0"/>
-                <a:ea typeface="Calibri" pitchFamily="34" charset="-122"/>
-                <a:cs typeface="Calibri" pitchFamily="34" charset="-120"/>
-              </a:rPr>
-              <a:t>banquet  </a:t>
-            </a:r>
-            <a:pPr indent="0" marL="0">
-              <a:buNone/>
-            </a:pPr>
-            <a:r>
-              <a:rPr lang="en-US" sz="1400" dirty="0">
-                <a:solidFill>
-                  <a:srgbClr val="1E293B"/>
-                </a:solidFill>
-                <a:latin typeface="Calibri" pitchFamily="34" charset="0"/>
-                <a:ea typeface="Calibri" pitchFamily="34" charset="-122"/>
-                <a:cs typeface="Calibri" pitchFamily="34" charset="-120"/>
-              </a:rPr>
-              <a:t>A large, formal meal for many guests.</a:t>
-            </a:r>
-            <a:endParaRPr lang="en-US" sz="1700" dirty="0"/>
+              <a:rPr lang="en-US" sz="1500" dirty="0">
+                <a:solidFill>
+                  <a:srgbClr val="1E293B"/>
+                </a:solidFill>
+                <a:latin typeface="Calibri" pitchFamily="34" charset="0"/>
+                <a:ea typeface="Calibri" pitchFamily="34" charset="-122"/>
+                <a:cs typeface="Calibri" pitchFamily="34" charset="-120"/>
+              </a:rPr>
+              <a:t>🌱  mis- + take = mistake</a:t>
+            </a:r>
+            <a:endParaRPr lang="en-US" sz="1500" dirty="0"/>
           </a:p>
         </p:txBody>
       </p:sp>
@@ -2749,16 +2982,16 @@
         </p:nvSpPr>
         <p:spPr>
           <a:xfrm>
-            <a:off x="365760" y="3291840"/>
-            <a:ext cx="8412480" cy="658368"/>
+            <a:off x="365760" y="3182112"/>
+            <a:ext cx="8412480" cy="621792"/>
           </a:xfrm>
           <a:prstGeom prst="roundRect">
             <a:avLst>
-              <a:gd name="adj" fmla="val 13889"/>
+              <a:gd name="adj" fmla="val 14706"/>
             </a:avLst>
           </a:prstGeom>
           <a:solidFill>
-            <a:srgbClr val="FFFFFF"/>
+            <a:srgbClr val="F8F4FF"/>
           </a:solidFill>
           <a:ln/>
           <a:effectLst>
@@ -2778,8 +3011,8 @@
         </p:nvSpPr>
         <p:spPr>
           <a:xfrm>
-            <a:off x="594360" y="3419856"/>
-            <a:ext cx="7863840" cy="420624"/>
+            <a:off x="594360" y="3300984"/>
+            <a:ext cx="7863840" cy="384048"/>
           </a:xfrm>
           <a:prstGeom prst="rect">
             <a:avLst/>
@@ -2795,31 +3028,17 @@
               <a:buNone/>
             </a:pPr>
             <a:r>
-              <a:rPr lang="en-US" sz="1700" b="1" dirty="0">
-                <a:solidFill>
-                  <a:srgbClr val="0E1C42"/>
-                </a:solidFill>
-                <a:latin typeface="Calibri" pitchFamily="34" charset="0"/>
-                <a:ea typeface="Calibri" pitchFamily="34" charset="-122"/>
-                <a:cs typeface="Calibri" pitchFamily="34" charset="-120"/>
-              </a:rPr>
-              <a:t>soul  </a:t>
-            </a:r>
-            <a:pPr indent="0" marL="0">
-              <a:buNone/>
-            </a:pPr>
-            <a:r>
-              <a:rPr lang="en-US" sz="1400" dirty="0">
-                <a:solidFill>
-                  <a:srgbClr val="1E293B"/>
-                </a:solidFill>
-                <a:latin typeface="Calibri" pitchFamily="34" charset="0"/>
-                <a:ea typeface="Calibri" pitchFamily="34" charset="-122"/>
-                <a:cs typeface="Calibri" pitchFamily="34" charset="-120"/>
-              </a:rPr>
-              <a:t>The deepest part of a person — who they really are inside.</a:t>
-            </a:r>
-            <a:endParaRPr lang="en-US" sz="1700" dirty="0"/>
+              <a:rPr lang="en-US" sz="1500" dirty="0">
+                <a:solidFill>
+                  <a:srgbClr val="1E293B"/>
+                </a:solidFill>
+                <a:latin typeface="Calibri" pitchFamily="34" charset="0"/>
+                <a:ea typeface="Calibri" pitchFamily="34" charset="-122"/>
+                <a:cs typeface="Calibri" pitchFamily="34" charset="-120"/>
+              </a:rPr>
+              <a:t>🌱  mis- + match = mismatch</a:t>
+            </a:r>
+            <a:endParaRPr lang="en-US" sz="1500" dirty="0"/>
           </a:p>
         </p:txBody>
       </p:sp>
@@ -2837,7 +3056,7 @@
     <p:bg>
       <p:bgPr>
         <a:solidFill>
-          <a:srgbClr val="F8FAFC"/>
+          <a:srgbClr val="FFFFFF"/>
         </a:solidFill>
       </p:bgPr>
     </p:bg>
@@ -2870,7 +3089,7 @@
             <a:avLst/>
           </a:prstGeom>
           <a:solidFill>
-            <a:srgbClr val="C7922C"/>
+            <a:srgbClr val="55C8E8"/>
           </a:solidFill>
           <a:ln/>
         </p:spPr>
@@ -2908,7 +3127,7 @@
                 <a:ea typeface="Calibri" pitchFamily="34" charset="-122"/>
                 <a:cs typeface="Calibri" pitchFamily="34" charset="-120"/>
               </a:rPr>
-              <a:t>✏️  Grammar</a:t>
+              <a:t>🔤  Vocabulary</a:t>
             </a:r>
             <a:endParaRPr lang="en-US" sz="2200" dirty="0"/>
           </a:p>
@@ -2922,7 +3141,7 @@
         </p:nvSpPr>
         <p:spPr>
           <a:xfrm>
-            <a:off x="365760" y="777240"/>
+            <a:off x="365760" y="804672"/>
             <a:ext cx="8229600" cy="237744"/>
           </a:xfrm>
           <a:prstGeom prst="rect">
@@ -2941,13 +3160,13 @@
             <a:r>
               <a:rPr lang="en-US" sz="1100" b="1" spc="100" kern="0" dirty="0">
                 <a:solidFill>
-                  <a:srgbClr val="C7922C"/>
-                </a:solidFill>
-                <a:latin typeface="Calibri" pitchFamily="34" charset="0"/>
-                <a:ea typeface="Calibri" pitchFamily="34" charset="-122"/>
-                <a:cs typeface="Calibri" pitchFamily="34" charset="-120"/>
-              </a:rPr>
-              <a:t>SUBJECT AND OBJECT PRONOUNS</a:t>
+                  <a:srgbClr val="55C8E8"/>
+                </a:solidFill>
+                <a:latin typeface="Calibri" pitchFamily="34" charset="0"/>
+                <a:ea typeface="Calibri" pitchFamily="34" charset="-122"/>
+                <a:cs typeface="Calibri" pitchFamily="34" charset="-120"/>
+              </a:rPr>
+              <a:t>VOCABULARY</a:t>
             </a:r>
             <a:endParaRPr lang="en-US" sz="1100" dirty="0"/>
           </a:p>
@@ -2961,7 +3180,7 @@
         </p:nvSpPr>
         <p:spPr>
           <a:xfrm>
-            <a:off x="365760" y="1078992"/>
+            <a:off x="365760" y="1097280"/>
             <a:ext cx="8412480" cy="658368"/>
           </a:xfrm>
           <a:prstGeom prst="roundRect">
@@ -2970,7 +3189,7 @@
             </a:avLst>
           </a:prstGeom>
           <a:solidFill>
-            <a:srgbClr val="FEF6E8"/>
+            <a:srgbClr val="E5F7FC"/>
           </a:solidFill>
           <a:ln/>
           <a:effectLst>
@@ -2991,7 +3210,7 @@
         <p:spPr>
           <a:xfrm>
             <a:off x="594360" y="1225296"/>
-            <a:ext cx="7863840" cy="402336"/>
+            <a:ext cx="7863840" cy="420624"/>
           </a:xfrm>
           <a:prstGeom prst="rect">
             <a:avLst/>
@@ -3007,17 +3226,31 @@
               <a:buNone/>
             </a:pPr>
             <a:r>
-              <a:rPr lang="en-US" sz="1600" dirty="0">
-                <a:solidFill>
-                  <a:srgbClr val="1E293B"/>
-                </a:solidFill>
-                <a:latin typeface="Calibri" pitchFamily="34" charset="0"/>
-                <a:ea typeface="Calibri" pitchFamily="34" charset="-122"/>
-                <a:cs typeface="Calibri" pitchFamily="34" charset="-120"/>
-              </a:rPr>
-              <a:t>She pointed her finger right at Roscuro.</a:t>
-            </a:r>
-            <a:endParaRPr lang="en-US" sz="1600" dirty="0"/>
+              <a:rPr lang="en-US" sz="1700" b="1" dirty="0">
+                <a:solidFill>
+                  <a:srgbClr val="0E1C42"/>
+                </a:solidFill>
+                <a:latin typeface="Calibri" pitchFamily="34" charset="0"/>
+                <a:ea typeface="Calibri" pitchFamily="34" charset="-122"/>
+                <a:cs typeface="Calibri" pitchFamily="34" charset="-120"/>
+              </a:rPr>
+              <a:t>revenge  </a:t>
+            </a:r>
+            <a:pPr indent="0" marL="0">
+              <a:buNone/>
+            </a:pPr>
+            <a:r>
+              <a:rPr lang="en-US" sz="1400" dirty="0">
+                <a:solidFill>
+                  <a:srgbClr val="1E293B"/>
+                </a:solidFill>
+                <a:latin typeface="Calibri" pitchFamily="34" charset="0"/>
+                <a:ea typeface="Calibri" pitchFamily="34" charset="-122"/>
+                <a:cs typeface="Calibri" pitchFamily="34" charset="-120"/>
+              </a:rPr>
+              <a:t>Hurting someone back for something they did to you.</a:t>
+            </a:r>
+            <a:endParaRPr lang="en-US" sz="1700" dirty="0"/>
           </a:p>
         </p:txBody>
       </p:sp>
@@ -3029,7 +3262,7 @@
         </p:nvSpPr>
         <p:spPr>
           <a:xfrm>
-            <a:off x="365760" y="1810512"/>
+            <a:off x="365760" y="1828800"/>
             <a:ext cx="8412480" cy="658368"/>
           </a:xfrm>
           <a:prstGeom prst="roundRect">
@@ -3059,7 +3292,7 @@
         <p:spPr>
           <a:xfrm>
             <a:off x="594360" y="1956816"/>
-            <a:ext cx="7863840" cy="402336"/>
+            <a:ext cx="7863840" cy="420624"/>
           </a:xfrm>
           <a:prstGeom prst="rect">
             <a:avLst/>
@@ -3075,17 +3308,31 @@
               <a:buNone/>
             </a:pPr>
             <a:r>
-              <a:rPr lang="en-US" sz="1600" dirty="0">
-                <a:solidFill>
-                  <a:srgbClr val="1E293B"/>
-                </a:solidFill>
-                <a:latin typeface="Calibri" pitchFamily="34" charset="0"/>
-                <a:ea typeface="Calibri" pitchFamily="34" charset="-122"/>
-                <a:cs typeface="Calibri" pitchFamily="34" charset="-120"/>
-              </a:rPr>
-              <a:t>Gregory held it up high.</a:t>
-            </a:r>
-            <a:endParaRPr lang="en-US" sz="1600" dirty="0"/>
+              <a:rPr lang="en-US" sz="1700" b="1" dirty="0">
+                <a:solidFill>
+                  <a:srgbClr val="0E1C42"/>
+                </a:solidFill>
+                <a:latin typeface="Calibri" pitchFamily="34" charset="0"/>
+                <a:ea typeface="Calibri" pitchFamily="34" charset="-122"/>
+                <a:cs typeface="Calibri" pitchFamily="34" charset="-120"/>
+              </a:rPr>
+              <a:t>ridiculous  </a:t>
+            </a:r>
+            <a:pPr indent="0" marL="0">
+              <a:buNone/>
+            </a:pPr>
+            <a:r>
+              <a:rPr lang="en-US" sz="1400" dirty="0">
+                <a:solidFill>
+                  <a:srgbClr val="1E293B"/>
+                </a:solidFill>
+                <a:latin typeface="Calibri" pitchFamily="34" charset="0"/>
+                <a:ea typeface="Calibri" pitchFamily="34" charset="-122"/>
+                <a:cs typeface="Calibri" pitchFamily="34" charset="-120"/>
+              </a:rPr>
+              <a:t>So silly or unreasonable that it is hard to take seriously.</a:t>
+            </a:r>
+            <a:endParaRPr lang="en-US" sz="1700" dirty="0"/>
           </a:p>
         </p:txBody>
       </p:sp>
@@ -3097,7 +3344,7 @@
         </p:nvSpPr>
         <p:spPr>
           <a:xfrm>
-            <a:off x="365760" y="2542032"/>
+            <a:off x="365760" y="2560320"/>
             <a:ext cx="8412480" cy="658368"/>
           </a:xfrm>
           <a:prstGeom prst="roundRect">
@@ -3106,7 +3353,7 @@
             </a:avLst>
           </a:prstGeom>
           <a:solidFill>
-            <a:srgbClr val="FEF6E8"/>
+            <a:srgbClr val="E5F7FC"/>
           </a:solidFill>
           <a:ln/>
           <a:effectLst>
@@ -3127,7 +3374,7 @@
         <p:spPr>
           <a:xfrm>
             <a:off x="594360" y="2688336"/>
-            <a:ext cx="7863840" cy="402336"/>
+            <a:ext cx="7863840" cy="420624"/>
           </a:xfrm>
           <a:prstGeom prst="rect">
             <a:avLst/>
@@ -3143,17 +3390,31 @@
               <a:buNone/>
             </a:pPr>
             <a:r>
-              <a:rPr lang="en-US" sz="1600" dirty="0">
-                <a:solidFill>
-                  <a:srgbClr val="1E293B"/>
-                </a:solidFill>
-                <a:latin typeface="Calibri" pitchFamily="34" charset="0"/>
-                <a:ea typeface="Calibri" pitchFamily="34" charset="-122"/>
-                <a:cs typeface="Calibri" pitchFamily="34" charset="-120"/>
-              </a:rPr>
-              <a:t>They lived in the darkness below the castle.</a:t>
-            </a:r>
-            <a:endParaRPr lang="en-US" sz="1600" dirty="0"/>
+              <a:rPr lang="en-US" sz="1700" b="1" dirty="0">
+                <a:solidFill>
+                  <a:srgbClr val="0E1C42"/>
+                </a:solidFill>
+                <a:latin typeface="Calibri" pitchFamily="34" charset="0"/>
+                <a:ea typeface="Calibri" pitchFamily="34" charset="-122"/>
+                <a:cs typeface="Calibri" pitchFamily="34" charset="-120"/>
+              </a:rPr>
+              <a:t>banquet  </a:t>
+            </a:r>
+            <a:pPr indent="0" marL="0">
+              <a:buNone/>
+            </a:pPr>
+            <a:r>
+              <a:rPr lang="en-US" sz="1400" dirty="0">
+                <a:solidFill>
+                  <a:srgbClr val="1E293B"/>
+                </a:solidFill>
+                <a:latin typeface="Calibri" pitchFamily="34" charset="0"/>
+                <a:ea typeface="Calibri" pitchFamily="34" charset="-122"/>
+                <a:cs typeface="Calibri" pitchFamily="34" charset="-120"/>
+              </a:rPr>
+              <a:t>A large, formal meal for many guests.</a:t>
+            </a:r>
+            <a:endParaRPr lang="en-US" sz="1700" dirty="0"/>
           </a:p>
         </p:txBody>
       </p:sp>
@@ -3165,7 +3426,7 @@
         </p:nvSpPr>
         <p:spPr>
           <a:xfrm>
-            <a:off x="365760" y="3273552"/>
+            <a:off x="365760" y="3291840"/>
             <a:ext cx="8412480" cy="658368"/>
           </a:xfrm>
           <a:prstGeom prst="roundRect">
@@ -3195,7 +3456,7 @@
         <p:spPr>
           <a:xfrm>
             <a:off x="594360" y="3419856"/>
-            <a:ext cx="7863840" cy="402336"/>
+            <a:ext cx="7863840" cy="420624"/>
           </a:xfrm>
           <a:prstGeom prst="rect">
             <a:avLst/>
@@ -3211,56 +3472,31 @@
               <a:buNone/>
             </a:pPr>
             <a:r>
-              <a:rPr lang="en-US" sz="1600" dirty="0">
-                <a:solidFill>
-                  <a:srgbClr val="1E293B"/>
-                </a:solidFill>
-                <a:latin typeface="Calibri" pitchFamily="34" charset="0"/>
-                <a:ea typeface="Calibri" pitchFamily="34" charset="-122"/>
-                <a:cs typeface="Calibri" pitchFamily="34" charset="-120"/>
-              </a:rPr>
-              <a:t>The rats smelled him before he saw them.</a:t>
-            </a:r>
-            <a:endParaRPr lang="en-US" sz="1600" dirty="0"/>
-          </a:p>
-        </p:txBody>
-      </p:sp>
-      <p:sp>
-        <p:nvSpPr>
-          <p:cNvPr id="13" name="Text 11"/>
-          <p:cNvSpPr/>
-          <p:nvPr/>
-        </p:nvSpPr>
-        <p:spPr>
-          <a:xfrm>
-            <a:off x="365760" y="4050792"/>
-            <a:ext cx="8412480" cy="365760"/>
-          </a:xfrm>
-          <a:prstGeom prst="rect">
-            <a:avLst/>
-          </a:prstGeom>
-          <a:noFill/>
-          <a:ln/>
-        </p:spPr>
-        <p:txBody>
-          <a:bodyPr wrap="square" lIns="0" tIns="0" rIns="0" bIns="0" rtlCol="0" anchor="ctr"/>
-          <a:lstStyle/>
-          <a:p>
-            <a:pPr indent="0" marL="0">
-              <a:buNone/>
-            </a:pPr>
-            <a:r>
-              <a:rPr lang="en-US" sz="1500" i="1" dirty="0">
-                <a:solidFill>
-                  <a:srgbClr val="64748B"/>
-                </a:solidFill>
-                <a:latin typeface="Calibri" pitchFamily="34" charset="0"/>
-                <a:ea typeface="Calibri" pitchFamily="34" charset="-122"/>
-                <a:cs typeface="Calibri" pitchFamily="34" charset="-120"/>
-              </a:rPr>
-              <a:t>Your turn. Find the subject pronoun — the one doing the action. Tap a word to check — green means you got it.</a:t>
-            </a:r>
-            <a:endParaRPr lang="en-US" sz="1500" dirty="0"/>
+              <a:rPr lang="en-US" sz="1700" b="1" dirty="0">
+                <a:solidFill>
+                  <a:srgbClr val="0E1C42"/>
+                </a:solidFill>
+                <a:latin typeface="Calibri" pitchFamily="34" charset="0"/>
+                <a:ea typeface="Calibri" pitchFamily="34" charset="-122"/>
+                <a:cs typeface="Calibri" pitchFamily="34" charset="-120"/>
+              </a:rPr>
+              <a:t>soul  </a:t>
+            </a:r>
+            <a:pPr indent="0" marL="0">
+              <a:buNone/>
+            </a:pPr>
+            <a:r>
+              <a:rPr lang="en-US" sz="1400" dirty="0">
+                <a:solidFill>
+                  <a:srgbClr val="1E293B"/>
+                </a:solidFill>
+                <a:latin typeface="Calibri" pitchFamily="34" charset="0"/>
+                <a:ea typeface="Calibri" pitchFamily="34" charset="-122"/>
+                <a:cs typeface="Calibri" pitchFamily="34" charset="-120"/>
+              </a:rPr>
+              <a:t>The deepest part of a person — who they really are inside.</a:t>
+            </a:r>
+            <a:endParaRPr lang="en-US" sz="1700" dirty="0"/>
           </a:p>
         </p:txBody>
       </p:sp>
@@ -3349,7 +3585,7 @@
                 <a:ea typeface="Calibri" pitchFamily="34" charset="-122"/>
                 <a:cs typeface="Calibri" pitchFamily="34" charset="-120"/>
               </a:rPr>
-              <a:t>✏️  Grammar</a:t>
+              <a:t>✏️  Grammar — What do you notice?</a:t>
             </a:r>
             <a:endParaRPr lang="en-US" sz="2200" dirty="0"/>
           </a:p>
@@ -3363,7 +3599,7 @@
         </p:nvSpPr>
         <p:spPr>
           <a:xfrm>
-            <a:off x="365760" y="777240"/>
+            <a:off x="365760" y="749808"/>
             <a:ext cx="8229600" cy="237744"/>
           </a:xfrm>
           <a:prstGeom prst="rect">
@@ -3396,13 +3632,52 @@
       </p:sp>
       <p:sp>
         <p:nvSpPr>
-          <p:cNvPr id="5" name="Shape 3"/>
-          <p:cNvSpPr/>
-          <p:nvPr/>
-        </p:nvSpPr>
-        <p:spPr>
-          <a:xfrm>
-            <a:off x="365760" y="1078992"/>
+          <p:cNvPr id="5" name="Text 3"/>
+          <p:cNvSpPr/>
+          <p:nvPr/>
+        </p:nvSpPr>
+        <p:spPr>
+          <a:xfrm>
+            <a:off x="365760" y="987552"/>
+            <a:ext cx="8412480" cy="411480"/>
+          </a:xfrm>
+          <a:prstGeom prst="rect">
+            <a:avLst/>
+          </a:prstGeom>
+          <a:noFill/>
+          <a:ln/>
+        </p:spPr>
+        <p:txBody>
+          <a:bodyPr wrap="square" lIns="0" tIns="0" rIns="0" bIns="0" rtlCol="0" anchor="ctr"/>
+          <a:lstStyle/>
+          <a:p>
+            <a:pPr indent="0" marL="0">
+              <a:buNone/>
+            </a:pPr>
+            <a:r>
+              <a:rPr lang="en-US" sz="1500" i="1" dirty="0">
+                <a:solidFill>
+                  <a:srgbClr val="64748B"/>
+                </a:solidFill>
+                <a:latin typeface="Calibri" pitchFamily="34" charset="0"/>
+                <a:ea typeface="Calibri" pitchFamily="34" charset="-122"/>
+                <a:cs typeface="Calibri" pitchFamily="34" charset="-120"/>
+              </a:rPr>
+              <a:t>Look at the pronouns marked in each sentence — the little words standing in for names.</a:t>
+            </a:r>
+            <a:endParaRPr lang="en-US" sz="1500" dirty="0"/>
+          </a:p>
+        </p:txBody>
+      </p:sp>
+      <p:sp>
+        <p:nvSpPr>
+          <p:cNvPr id="6" name="Shape 4"/>
+          <p:cNvSpPr/>
+          <p:nvPr/>
+        </p:nvSpPr>
+        <p:spPr>
+          <a:xfrm>
+            <a:off x="365760" y="1463040"/>
             <a:ext cx="8412480" cy="658368"/>
           </a:xfrm>
           <a:prstGeom prst="roundRect">
@@ -3413,7 +3688,12 @@
           <a:solidFill>
             <a:srgbClr val="FEF6E8"/>
           </a:solidFill>
-          <a:ln/>
+          <a:ln w="19050">
+            <a:solidFill>
+              <a:srgbClr val="C7922C"/>
+            </a:solidFill>
+            <a:prstDash val="solid"/>
+          </a:ln>
           <a:effectLst>
             <a:outerShdw sx="100000" sy="100000" kx="0" ky="0" algn="bl" rotWithShape="0" blurRad="101600" dist="38100" dir="2700000">
               <a:srgbClr val="000000">
@@ -3425,14 +3705,14 @@
       </p:sp>
       <p:sp>
         <p:nvSpPr>
-          <p:cNvPr id="6" name="Text 4"/>
-          <p:cNvSpPr/>
-          <p:nvPr/>
-        </p:nvSpPr>
-        <p:spPr>
-          <a:xfrm>
-            <a:off x="594360" y="1225296"/>
-            <a:ext cx="7863840" cy="402336"/>
+          <p:cNvPr id="7" name="Text 5"/>
+          <p:cNvSpPr/>
+          <p:nvPr/>
+        </p:nvSpPr>
+        <p:spPr>
+          <a:xfrm>
+            <a:off x="594360" y="1591056"/>
+            <a:ext cx="7955280" cy="402336"/>
           </a:xfrm>
           <a:prstGeom prst="rect">
             <a:avLst/>
@@ -3447,44 +3727,562 @@
             <a:pPr indent="0" marL="0">
               <a:buNone/>
             </a:pPr>
-            <a:r>
-              <a:rPr lang="en-US" sz="1600" b="1" dirty="0">
-                <a:solidFill>
-                  <a:srgbClr val="34B76F"/>
-                </a:solidFill>
-                <a:latin typeface="Calibri" pitchFamily="34" charset="0"/>
-                <a:ea typeface="Calibri" pitchFamily="34" charset="-122"/>
-                <a:cs typeface="Calibri" pitchFamily="34" charset="-120"/>
-              </a:rPr>
-              <a:t>She</a:t>
-            </a:r>
-            <a:pPr indent="0" marL="0">
-              <a:buNone/>
-            </a:pPr>
-            <a:r>
-              <a:rPr lang="en-US" sz="1600" dirty="0">
-                <a:solidFill>
-                  <a:srgbClr val="1E293B"/>
-                </a:solidFill>
-                <a:latin typeface="Calibri" pitchFamily="34" charset="0"/>
-                <a:ea typeface="Calibri" pitchFamily="34" charset="-122"/>
-                <a:cs typeface="Calibri" pitchFamily="34" charset="-120"/>
-              </a:rPr>
-              <a:t> pointed her finger right at Roscuro.</a:t>
-            </a:r>
-            <a:endParaRPr lang="en-US" sz="1600" dirty="0"/>
-          </a:p>
-        </p:txBody>
-      </p:sp>
-      <p:sp>
-        <p:nvSpPr>
-          <p:cNvPr id="7" name="Shape 5"/>
-          <p:cNvSpPr/>
-          <p:nvPr/>
-        </p:nvSpPr>
-        <p:spPr>
-          <a:xfrm>
-            <a:off x="365760" y="1810512"/>
+            <a:endParaRPr lang="en-US" sz="1700" dirty="0"/>
+          </a:p>
+        </p:txBody>
+      </p:sp>
+      <p:sp>
+        <p:nvSpPr>
+          <p:cNvPr id="8" name="Text 6"/>
+          <p:cNvSpPr/>
+          <p:nvPr/>
+        </p:nvSpPr>
+        <p:spPr>
+          <a:xfrm>
+            <a:off x="594360" y="1591056"/>
+            <a:ext cx="7955280" cy="402336"/>
+          </a:xfrm>
+          <a:prstGeom prst="rect">
+            <a:avLst/>
+          </a:prstGeom>
+          <a:noFill/>
+          <a:ln/>
+        </p:spPr>
+        <p:txBody>
+          <a:bodyPr wrap="square" lIns="0" tIns="0" rIns="0" bIns="0" rtlCol="0" anchor="ctr"/>
+          <a:lstStyle/>
+          <a:p>
+            <a:pPr indent="0" marL="0">
+              <a:buNone/>
+            </a:pPr>
+            <a:r>
+              <a:rPr lang="en-US" sz="1700" dirty="0">
+                <a:solidFill>
+                  <a:srgbClr val="1E293B"/>
+                </a:solidFill>
+                <a:latin typeface="Calibri" pitchFamily="34" charset="0"/>
+                <a:ea typeface="Calibri" pitchFamily="34" charset="-122"/>
+                <a:cs typeface="Calibri" pitchFamily="34" charset="-120"/>
+              </a:rPr>
+              <a:t>And</a:t>
+            </a:r>
+            <a:pPr indent="0" marL="0">
+              <a:buNone/>
+            </a:pPr>
+            <a:r>
+              <a:rPr lang="en-US" sz="1700" dirty="0">
+                <a:solidFill>
+                  <a:srgbClr val="1E293B"/>
+                </a:solidFill>
+                <a:latin typeface="Calibri" pitchFamily="34" charset="0"/>
+                <a:ea typeface="Calibri" pitchFamily="34" charset="-122"/>
+                <a:cs typeface="Calibri" pitchFamily="34" charset="-120"/>
+              </a:rPr>
+              <a:t> </a:t>
+            </a:r>
+            <a:pPr indent="0" marL="0">
+              <a:buNone/>
+            </a:pPr>
+            <a:r>
+              <a:rPr lang="en-US" sz="1700" dirty="0">
+                <a:solidFill>
+                  <a:srgbClr val="1E293B"/>
+                </a:solidFill>
+                <a:latin typeface="Calibri" pitchFamily="34" charset="0"/>
+                <a:ea typeface="Calibri" pitchFamily="34" charset="-122"/>
+                <a:cs typeface="Calibri" pitchFamily="34" charset="-120"/>
+              </a:rPr>
+              <a:t>though</a:t>
+            </a:r>
+            <a:pPr indent="0" marL="0">
+              <a:buNone/>
+            </a:pPr>
+            <a:r>
+              <a:rPr lang="en-US" sz="1700" dirty="0">
+                <a:solidFill>
+                  <a:srgbClr val="1E293B"/>
+                </a:solidFill>
+                <a:latin typeface="Calibri" pitchFamily="34" charset="0"/>
+                <a:ea typeface="Calibri" pitchFamily="34" charset="-122"/>
+                <a:cs typeface="Calibri" pitchFamily="34" charset="-120"/>
+              </a:rPr>
+              <a:t> </a:t>
+            </a:r>
+            <a:pPr indent="0" marL="0">
+              <a:buNone/>
+            </a:pPr>
+            <a:r>
+              <a:rPr lang="en-US" sz="1700" b="1" u="sng" dirty="0">
+                <a:solidFill>
+                  <a:srgbClr val="C7922C"/>
+                </a:solidFill>
+                <a:latin typeface="Calibri" pitchFamily="34" charset="0"/>
+                <a:ea typeface="Calibri" pitchFamily="34" charset="-122"/>
+                <a:cs typeface="Calibri" pitchFamily="34" charset="-120"/>
+              </a:rPr>
+              <a:t>she</a:t>
+            </a:r>
+            <a:pPr indent="0" marL="0">
+              <a:buNone/>
+            </a:pPr>
+            <a:r>
+              <a:rPr lang="en-US" sz="1700" dirty="0">
+                <a:solidFill>
+                  <a:srgbClr val="1E293B"/>
+                </a:solidFill>
+                <a:latin typeface="Calibri" pitchFamily="34" charset="0"/>
+                <a:ea typeface="Calibri" pitchFamily="34" charset="-122"/>
+                <a:cs typeface="Calibri" pitchFamily="34" charset="-120"/>
+              </a:rPr>
+              <a:t> </a:t>
+            </a:r>
+            <a:pPr indent="0" marL="0">
+              <a:buNone/>
+            </a:pPr>
+            <a:r>
+              <a:rPr lang="en-US" sz="1700" dirty="0">
+                <a:solidFill>
+                  <a:srgbClr val="1E293B"/>
+                </a:solidFill>
+                <a:latin typeface="Calibri" pitchFamily="34" charset="0"/>
+                <a:ea typeface="Calibri" pitchFamily="34" charset="-122"/>
+                <a:cs typeface="Calibri" pitchFamily="34" charset="-120"/>
+              </a:rPr>
+              <a:t>did</a:t>
+            </a:r>
+            <a:pPr indent="0" marL="0">
+              <a:buNone/>
+            </a:pPr>
+            <a:r>
+              <a:rPr lang="en-US" sz="1700" dirty="0">
+                <a:solidFill>
+                  <a:srgbClr val="1E293B"/>
+                </a:solidFill>
+                <a:latin typeface="Calibri" pitchFamily="34" charset="0"/>
+                <a:ea typeface="Calibri" pitchFamily="34" charset="-122"/>
+                <a:cs typeface="Calibri" pitchFamily="34" charset="-120"/>
+              </a:rPr>
+              <a:t> </a:t>
+            </a:r>
+            <a:pPr indent="0" marL="0">
+              <a:buNone/>
+            </a:pPr>
+            <a:r>
+              <a:rPr lang="en-US" sz="1700" dirty="0">
+                <a:solidFill>
+                  <a:srgbClr val="1E293B"/>
+                </a:solidFill>
+                <a:latin typeface="Calibri" pitchFamily="34" charset="0"/>
+                <a:ea typeface="Calibri" pitchFamily="34" charset="-122"/>
+                <a:cs typeface="Calibri" pitchFamily="34" charset="-120"/>
+              </a:rPr>
+              <a:t>not</a:t>
+            </a:r>
+            <a:pPr indent="0" marL="0">
+              <a:buNone/>
+            </a:pPr>
+            <a:r>
+              <a:rPr lang="en-US" sz="1700" dirty="0">
+                <a:solidFill>
+                  <a:srgbClr val="1E293B"/>
+                </a:solidFill>
+                <a:latin typeface="Calibri" pitchFamily="34" charset="0"/>
+                <a:ea typeface="Calibri" pitchFamily="34" charset="-122"/>
+                <a:cs typeface="Calibri" pitchFamily="34" charset="-120"/>
+              </a:rPr>
+              <a:t> </a:t>
+            </a:r>
+            <a:pPr indent="0" marL="0">
+              <a:buNone/>
+            </a:pPr>
+            <a:r>
+              <a:rPr lang="en-US" sz="1700" dirty="0">
+                <a:solidFill>
+                  <a:srgbClr val="1E293B"/>
+                </a:solidFill>
+                <a:latin typeface="Calibri" pitchFamily="34" charset="0"/>
+                <a:ea typeface="Calibri" pitchFamily="34" charset="-122"/>
+                <a:cs typeface="Calibri" pitchFamily="34" charset="-120"/>
+              </a:rPr>
+              <a:t>yet</a:t>
+            </a:r>
+            <a:pPr indent="0" marL="0">
+              <a:buNone/>
+            </a:pPr>
+            <a:r>
+              <a:rPr lang="en-US" sz="1700" dirty="0">
+                <a:solidFill>
+                  <a:srgbClr val="1E293B"/>
+                </a:solidFill>
+                <a:latin typeface="Calibri" pitchFamily="34" charset="0"/>
+                <a:ea typeface="Calibri" pitchFamily="34" charset="-122"/>
+                <a:cs typeface="Calibri" pitchFamily="34" charset="-120"/>
+              </a:rPr>
+              <a:t> </a:t>
+            </a:r>
+            <a:pPr indent="0" marL="0">
+              <a:buNone/>
+            </a:pPr>
+            <a:r>
+              <a:rPr lang="en-US" sz="1700" dirty="0">
+                <a:solidFill>
+                  <a:srgbClr val="1E293B"/>
+                </a:solidFill>
+                <a:latin typeface="Calibri" pitchFamily="34" charset="0"/>
+                <a:ea typeface="Calibri" pitchFamily="34" charset="-122"/>
+                <a:cs typeface="Calibri" pitchFamily="34" charset="-120"/>
+              </a:rPr>
+              <a:t>know</a:t>
+            </a:r>
+            <a:pPr indent="0" marL="0">
+              <a:buNone/>
+            </a:pPr>
+            <a:r>
+              <a:rPr lang="en-US" sz="1700" dirty="0">
+                <a:solidFill>
+                  <a:srgbClr val="1E293B"/>
+                </a:solidFill>
+                <a:latin typeface="Calibri" pitchFamily="34" charset="0"/>
+                <a:ea typeface="Calibri" pitchFamily="34" charset="-122"/>
+                <a:cs typeface="Calibri" pitchFamily="34" charset="-120"/>
+              </a:rPr>
+              <a:t> </a:t>
+            </a:r>
+            <a:pPr indent="0" marL="0">
+              <a:buNone/>
+            </a:pPr>
+            <a:r>
+              <a:rPr lang="en-US" sz="1700" b="1" u="sng" dirty="0">
+                <a:solidFill>
+                  <a:srgbClr val="C7922C"/>
+                </a:solidFill>
+                <a:latin typeface="Calibri" pitchFamily="34" charset="0"/>
+                <a:ea typeface="Calibri" pitchFamily="34" charset="-122"/>
+                <a:cs typeface="Calibri" pitchFamily="34" charset="-120"/>
+              </a:rPr>
+              <a:t>it,</a:t>
+            </a:r>
+            <a:pPr indent="0" marL="0">
+              <a:buNone/>
+            </a:pPr>
+            <a:r>
+              <a:rPr lang="en-US" sz="1700" dirty="0">
+                <a:solidFill>
+                  <a:srgbClr val="1E293B"/>
+                </a:solidFill>
+                <a:latin typeface="Calibri" pitchFamily="34" charset="0"/>
+                <a:ea typeface="Calibri" pitchFamily="34" charset="-122"/>
+                <a:cs typeface="Calibri" pitchFamily="34" charset="-120"/>
+              </a:rPr>
+              <a:t> </a:t>
+            </a:r>
+            <a:pPr indent="0" marL="0">
+              <a:buNone/>
+            </a:pPr>
+            <a:r>
+              <a:rPr lang="en-US" sz="1700" b="1" u="sng" dirty="0">
+                <a:solidFill>
+                  <a:srgbClr val="C7922C"/>
+                </a:solidFill>
+                <a:latin typeface="Calibri" pitchFamily="34" charset="0"/>
+                <a:ea typeface="Calibri" pitchFamily="34" charset="-122"/>
+                <a:cs typeface="Calibri" pitchFamily="34" charset="-120"/>
+              </a:rPr>
+              <a:t>she</a:t>
+            </a:r>
+            <a:pPr indent="0" marL="0">
+              <a:buNone/>
+            </a:pPr>
+            <a:r>
+              <a:rPr lang="en-US" sz="1700" dirty="0">
+                <a:solidFill>
+                  <a:srgbClr val="1E293B"/>
+                </a:solidFill>
+                <a:latin typeface="Calibri" pitchFamily="34" charset="0"/>
+                <a:ea typeface="Calibri" pitchFamily="34" charset="-122"/>
+                <a:cs typeface="Calibri" pitchFamily="34" charset="-120"/>
+              </a:rPr>
+              <a:t> </a:t>
+            </a:r>
+            <a:pPr indent="0" marL="0">
+              <a:buNone/>
+            </a:pPr>
+            <a:r>
+              <a:rPr lang="en-US" sz="1700" dirty="0">
+                <a:solidFill>
+                  <a:srgbClr val="1E293B"/>
+                </a:solidFill>
+                <a:latin typeface="Calibri" pitchFamily="34" charset="0"/>
+                <a:ea typeface="Calibri" pitchFamily="34" charset="-122"/>
+                <a:cs typeface="Calibri" pitchFamily="34" charset="-120"/>
+              </a:rPr>
+              <a:t>would</a:t>
+            </a:r>
+            <a:pPr indent="0" marL="0">
+              <a:buNone/>
+            </a:pPr>
+            <a:r>
+              <a:rPr lang="en-US" sz="1700" dirty="0">
+                <a:solidFill>
+                  <a:srgbClr val="1E293B"/>
+                </a:solidFill>
+                <a:latin typeface="Calibri" pitchFamily="34" charset="0"/>
+                <a:ea typeface="Calibri" pitchFamily="34" charset="-122"/>
+                <a:cs typeface="Calibri" pitchFamily="34" charset="-120"/>
+              </a:rPr>
+              <a:t> </a:t>
+            </a:r>
+            <a:pPr indent="0" marL="0">
+              <a:buNone/>
+            </a:pPr>
+            <a:r>
+              <a:rPr lang="en-US" sz="1700" dirty="0">
+                <a:solidFill>
+                  <a:srgbClr val="1E293B"/>
+                </a:solidFill>
+                <a:latin typeface="Calibri" pitchFamily="34" charset="0"/>
+                <a:ea typeface="Calibri" pitchFamily="34" charset="-122"/>
+                <a:cs typeface="Calibri" pitchFamily="34" charset="-120"/>
+              </a:rPr>
+              <a:t>be</a:t>
+            </a:r>
+            <a:pPr indent="0" marL="0">
+              <a:buNone/>
+            </a:pPr>
+            <a:r>
+              <a:rPr lang="en-US" sz="1700" dirty="0">
+                <a:solidFill>
+                  <a:srgbClr val="1E293B"/>
+                </a:solidFill>
+                <a:latin typeface="Calibri" pitchFamily="34" charset="0"/>
+                <a:ea typeface="Calibri" pitchFamily="34" charset="-122"/>
+                <a:cs typeface="Calibri" pitchFamily="34" charset="-120"/>
+              </a:rPr>
+              <a:t> </a:t>
+            </a:r>
+            <a:pPr indent="0" marL="0">
+              <a:buNone/>
+            </a:pPr>
+            <a:r>
+              <a:rPr lang="en-US" sz="1700" dirty="0">
+                <a:solidFill>
+                  <a:srgbClr val="1E293B"/>
+                </a:solidFill>
+                <a:latin typeface="Calibri" pitchFamily="34" charset="0"/>
+                <a:ea typeface="Calibri" pitchFamily="34" charset="-122"/>
+                <a:cs typeface="Calibri" pitchFamily="34" charset="-120"/>
+              </a:rPr>
+              <a:t>instrumental</a:t>
+            </a:r>
+            <a:pPr indent="0" marL="0">
+              <a:buNone/>
+            </a:pPr>
+            <a:r>
+              <a:rPr lang="en-US" sz="1700" dirty="0">
+                <a:solidFill>
+                  <a:srgbClr val="1E293B"/>
+                </a:solidFill>
+                <a:latin typeface="Calibri" pitchFamily="34" charset="0"/>
+                <a:ea typeface="Calibri" pitchFamily="34" charset="-122"/>
+                <a:cs typeface="Calibri" pitchFamily="34" charset="-120"/>
+              </a:rPr>
+              <a:t> </a:t>
+            </a:r>
+            <a:pPr indent="0" marL="0">
+              <a:buNone/>
+            </a:pPr>
+            <a:r>
+              <a:rPr lang="en-US" sz="1700" dirty="0">
+                <a:solidFill>
+                  <a:srgbClr val="1E293B"/>
+                </a:solidFill>
+                <a:latin typeface="Calibri" pitchFamily="34" charset="0"/>
+                <a:ea typeface="Calibri" pitchFamily="34" charset="-122"/>
+                <a:cs typeface="Calibri" pitchFamily="34" charset="-120"/>
+              </a:rPr>
+              <a:t>in</a:t>
+            </a:r>
+            <a:pPr indent="0" marL="0">
+              <a:buNone/>
+            </a:pPr>
+            <a:r>
+              <a:rPr lang="en-US" sz="1700" dirty="0">
+                <a:solidFill>
+                  <a:srgbClr val="1E293B"/>
+                </a:solidFill>
+                <a:latin typeface="Calibri" pitchFamily="34" charset="0"/>
+                <a:ea typeface="Calibri" pitchFamily="34" charset="-122"/>
+                <a:cs typeface="Calibri" pitchFamily="34" charset="-120"/>
+              </a:rPr>
+              <a:t> </a:t>
+            </a:r>
+            <a:pPr indent="0" marL="0">
+              <a:buNone/>
+            </a:pPr>
+            <a:r>
+              <a:rPr lang="en-US" sz="1700" dirty="0">
+                <a:solidFill>
+                  <a:srgbClr val="1E293B"/>
+                </a:solidFill>
+                <a:latin typeface="Calibri" pitchFamily="34" charset="0"/>
+                <a:ea typeface="Calibri" pitchFamily="34" charset="-122"/>
+                <a:cs typeface="Calibri" pitchFamily="34" charset="-120"/>
+              </a:rPr>
+              <a:t>helping</a:t>
+            </a:r>
+            <a:pPr indent="0" marL="0">
+              <a:buNone/>
+            </a:pPr>
+            <a:r>
+              <a:rPr lang="en-US" sz="1700" dirty="0">
+                <a:solidFill>
+                  <a:srgbClr val="1E293B"/>
+                </a:solidFill>
+                <a:latin typeface="Calibri" pitchFamily="34" charset="0"/>
+                <a:ea typeface="Calibri" pitchFamily="34" charset="-122"/>
+                <a:cs typeface="Calibri" pitchFamily="34" charset="-120"/>
+              </a:rPr>
+              <a:t> </a:t>
+            </a:r>
+            <a:pPr indent="0" marL="0">
+              <a:buNone/>
+            </a:pPr>
+            <a:r>
+              <a:rPr lang="en-US" sz="1700" dirty="0">
+                <a:solidFill>
+                  <a:srgbClr val="1E293B"/>
+                </a:solidFill>
+                <a:latin typeface="Calibri" pitchFamily="34" charset="0"/>
+                <a:ea typeface="Calibri" pitchFamily="34" charset="-122"/>
+                <a:cs typeface="Calibri" pitchFamily="34" charset="-120"/>
+              </a:rPr>
+              <a:t>the</a:t>
+            </a:r>
+            <a:pPr indent="0" marL="0">
+              <a:buNone/>
+            </a:pPr>
+            <a:r>
+              <a:rPr lang="en-US" sz="1700" dirty="0">
+                <a:solidFill>
+                  <a:srgbClr val="1E293B"/>
+                </a:solidFill>
+                <a:latin typeface="Calibri" pitchFamily="34" charset="0"/>
+                <a:ea typeface="Calibri" pitchFamily="34" charset="-122"/>
+                <a:cs typeface="Calibri" pitchFamily="34" charset="-120"/>
+              </a:rPr>
+              <a:t> </a:t>
+            </a:r>
+            <a:pPr indent="0" marL="0">
+              <a:buNone/>
+            </a:pPr>
+            <a:r>
+              <a:rPr lang="en-US" sz="1700" dirty="0">
+                <a:solidFill>
+                  <a:srgbClr val="1E293B"/>
+                </a:solidFill>
+                <a:latin typeface="Calibri" pitchFamily="34" charset="0"/>
+                <a:ea typeface="Calibri" pitchFamily="34" charset="-122"/>
+                <a:cs typeface="Calibri" pitchFamily="34" charset="-120"/>
+              </a:rPr>
+              <a:t>rat</a:t>
+            </a:r>
+            <a:pPr indent="0" marL="0">
+              <a:buNone/>
+            </a:pPr>
+            <a:r>
+              <a:rPr lang="en-US" sz="1700" dirty="0">
+                <a:solidFill>
+                  <a:srgbClr val="1E293B"/>
+                </a:solidFill>
+                <a:latin typeface="Calibri" pitchFamily="34" charset="0"/>
+                <a:ea typeface="Calibri" pitchFamily="34" charset="-122"/>
+                <a:cs typeface="Calibri" pitchFamily="34" charset="-120"/>
+              </a:rPr>
+              <a:t> </a:t>
+            </a:r>
+            <a:pPr indent="0" marL="0">
+              <a:buNone/>
+            </a:pPr>
+            <a:r>
+              <a:rPr lang="en-US" sz="1700" dirty="0">
+                <a:solidFill>
+                  <a:srgbClr val="1E293B"/>
+                </a:solidFill>
+                <a:latin typeface="Calibri" pitchFamily="34" charset="0"/>
+                <a:ea typeface="Calibri" pitchFamily="34" charset="-122"/>
+                <a:cs typeface="Calibri" pitchFamily="34" charset="-120"/>
+              </a:rPr>
+              <a:t>work</a:t>
+            </a:r>
+            <a:pPr indent="0" marL="0">
+              <a:buNone/>
+            </a:pPr>
+            <a:r>
+              <a:rPr lang="en-US" sz="1700" dirty="0">
+                <a:solidFill>
+                  <a:srgbClr val="1E293B"/>
+                </a:solidFill>
+                <a:latin typeface="Calibri" pitchFamily="34" charset="0"/>
+                <a:ea typeface="Calibri" pitchFamily="34" charset="-122"/>
+                <a:cs typeface="Calibri" pitchFamily="34" charset="-120"/>
+              </a:rPr>
+              <a:t> </a:t>
+            </a:r>
+            <a:pPr indent="0" marL="0">
+              <a:buNone/>
+            </a:pPr>
+            <a:r>
+              <a:rPr lang="en-US" sz="1700" dirty="0">
+                <a:solidFill>
+                  <a:srgbClr val="1E293B"/>
+                </a:solidFill>
+                <a:latin typeface="Calibri" pitchFamily="34" charset="0"/>
+                <a:ea typeface="Calibri" pitchFamily="34" charset="-122"/>
+                <a:cs typeface="Calibri" pitchFamily="34" charset="-120"/>
+              </a:rPr>
+              <a:t>his</a:t>
+            </a:r>
+            <a:pPr indent="0" marL="0">
+              <a:buNone/>
+            </a:pPr>
+            <a:r>
+              <a:rPr lang="en-US" sz="1700" dirty="0">
+                <a:solidFill>
+                  <a:srgbClr val="1E293B"/>
+                </a:solidFill>
+                <a:latin typeface="Calibri" pitchFamily="34" charset="0"/>
+                <a:ea typeface="Calibri" pitchFamily="34" charset="-122"/>
+                <a:cs typeface="Calibri" pitchFamily="34" charset="-120"/>
+              </a:rPr>
+              <a:t> </a:t>
+            </a:r>
+            <a:pPr indent="0" marL="0">
+              <a:buNone/>
+            </a:pPr>
+            <a:r>
+              <a:rPr lang="en-US" sz="1700" dirty="0">
+                <a:solidFill>
+                  <a:srgbClr val="1E293B"/>
+                </a:solidFill>
+                <a:latin typeface="Calibri" pitchFamily="34" charset="0"/>
+                <a:ea typeface="Calibri" pitchFamily="34" charset="-122"/>
+                <a:cs typeface="Calibri" pitchFamily="34" charset="-120"/>
+              </a:rPr>
+              <a:t>revenge.</a:t>
+            </a:r>
+            <a:endParaRPr lang="en-US" sz="1700" dirty="0"/>
+          </a:p>
+        </p:txBody>
+      </p:sp>
+      <p:sp>
+        <p:nvSpPr>
+          <p:cNvPr id="9" name="Shape 7"/>
+          <p:cNvSpPr/>
+          <p:nvPr/>
+        </p:nvSpPr>
+        <p:spPr>
+          <a:xfrm>
+            <a:off x="365760" y="2212848"/>
             <a:ext cx="8412480" cy="658368"/>
           </a:xfrm>
           <a:prstGeom prst="roundRect">
@@ -3495,7 +4293,12 @@
           <a:solidFill>
             <a:srgbClr val="FFFFFF"/>
           </a:solidFill>
-          <a:ln/>
+          <a:ln w="19050">
+            <a:solidFill>
+              <a:srgbClr val="C7922C"/>
+            </a:solidFill>
+            <a:prstDash val="solid"/>
+          </a:ln>
           <a:effectLst>
             <a:outerShdw sx="100000" sy="100000" kx="0" ky="0" algn="bl" rotWithShape="0" blurRad="101600" dist="38100" dir="2700000">
               <a:srgbClr val="000000">
@@ -3507,14 +4310,14 @@
       </p:sp>
       <p:sp>
         <p:nvSpPr>
-          <p:cNvPr id="8" name="Text 6"/>
-          <p:cNvSpPr/>
-          <p:nvPr/>
-        </p:nvSpPr>
-        <p:spPr>
-          <a:xfrm>
-            <a:off x="594360" y="1956816"/>
-            <a:ext cx="7863840" cy="402336"/>
+          <p:cNvPr id="10" name="Text 8"/>
+          <p:cNvSpPr/>
+          <p:nvPr/>
+        </p:nvSpPr>
+        <p:spPr>
+          <a:xfrm>
+            <a:off x="594360" y="2340864"/>
+            <a:ext cx="7955280" cy="402336"/>
           </a:xfrm>
           <a:prstGeom prst="rect">
             <a:avLst/>
@@ -3529,88 +4332,20 @@
             <a:pPr indent="0" marL="0">
               <a:buNone/>
             </a:pPr>
-            <a:r>
-              <a:rPr lang="en-US" sz="1600" dirty="0">
-                <a:solidFill>
-                  <a:srgbClr val="1E293B"/>
-                </a:solidFill>
-                <a:latin typeface="Calibri" pitchFamily="34" charset="0"/>
-                <a:ea typeface="Calibri" pitchFamily="34" charset="-122"/>
-                <a:cs typeface="Calibri" pitchFamily="34" charset="-120"/>
-              </a:rPr>
-              <a:t>Gregory held </a:t>
-            </a:r>
-            <a:pPr indent="0" marL="0">
-              <a:buNone/>
-            </a:pPr>
-            <a:r>
-              <a:rPr lang="en-US" sz="1600" b="1" dirty="0">
-                <a:solidFill>
-                  <a:srgbClr val="34B76F"/>
-                </a:solidFill>
-                <a:latin typeface="Calibri" pitchFamily="34" charset="0"/>
-                <a:ea typeface="Calibri" pitchFamily="34" charset="-122"/>
-                <a:cs typeface="Calibri" pitchFamily="34" charset="-120"/>
-              </a:rPr>
-              <a:t>it</a:t>
-            </a:r>
-            <a:pPr indent="0" marL="0">
-              <a:buNone/>
-            </a:pPr>
-            <a:r>
-              <a:rPr lang="en-US" sz="1600" dirty="0">
-                <a:solidFill>
-                  <a:srgbClr val="1E293B"/>
-                </a:solidFill>
-                <a:latin typeface="Calibri" pitchFamily="34" charset="0"/>
-                <a:ea typeface="Calibri" pitchFamily="34" charset="-122"/>
-                <a:cs typeface="Calibri" pitchFamily="34" charset="-120"/>
-              </a:rPr>
-              <a:t> up high.</a:t>
-            </a:r>
-            <a:endParaRPr lang="en-US" sz="1600" dirty="0"/>
-          </a:p>
-        </p:txBody>
-      </p:sp>
-      <p:sp>
-        <p:nvSpPr>
-          <p:cNvPr id="9" name="Shape 7"/>
-          <p:cNvSpPr/>
-          <p:nvPr/>
-        </p:nvSpPr>
-        <p:spPr>
-          <a:xfrm>
-            <a:off x="365760" y="2542032"/>
-            <a:ext cx="8412480" cy="658368"/>
-          </a:xfrm>
-          <a:prstGeom prst="roundRect">
-            <a:avLst>
-              <a:gd name="adj" fmla="val 13889"/>
-            </a:avLst>
-          </a:prstGeom>
-          <a:solidFill>
-            <a:srgbClr val="FEF6E8"/>
-          </a:solidFill>
-          <a:ln/>
-          <a:effectLst>
-            <a:outerShdw sx="100000" sy="100000" kx="0" ky="0" algn="bl" rotWithShape="0" blurRad="101600" dist="38100" dir="2700000">
-              <a:srgbClr val="000000">
-                <a:alpha val="12000"/>
-              </a:srgbClr>
-            </a:outerShdw>
-          </a:effectLst>
-        </p:spPr>
-      </p:sp>
-      <p:sp>
-        <p:nvSpPr>
-          <p:cNvPr id="10" name="Text 8"/>
-          <p:cNvSpPr/>
-          <p:nvPr/>
-        </p:nvSpPr>
-        <p:spPr>
-          <a:xfrm>
-            <a:off x="594360" y="2688336"/>
-            <a:ext cx="7863840" cy="402336"/>
+            <a:endParaRPr lang="en-US" sz="1700" dirty="0"/>
+          </a:p>
+        </p:txBody>
+      </p:sp>
+      <p:sp>
+        <p:nvSpPr>
+          <p:cNvPr id="11" name="Text 9"/>
+          <p:cNvSpPr/>
+          <p:nvPr/>
+        </p:nvSpPr>
+        <p:spPr>
+          <a:xfrm>
+            <a:off x="594360" y="2340864"/>
+            <a:ext cx="7955280" cy="402336"/>
           </a:xfrm>
           <a:prstGeom prst="rect">
             <a:avLst/>
@@ -3626,62 +4361,103 @@
               <a:buNone/>
             </a:pPr>
             <a:r>
-              <a:rPr lang="en-US" sz="1600" b="1" dirty="0">
-                <a:solidFill>
-                  <a:srgbClr val="34B76F"/>
-                </a:solidFill>
-                <a:latin typeface="Calibri" pitchFamily="34" charset="0"/>
-                <a:ea typeface="Calibri" pitchFamily="34" charset="-122"/>
-                <a:cs typeface="Calibri" pitchFamily="34" charset="-120"/>
-              </a:rPr>
-              <a:t>They</a:t>
-            </a:r>
-            <a:pPr indent="0" marL="0">
-              <a:buNone/>
-            </a:pPr>
-            <a:r>
-              <a:rPr lang="en-US" sz="1600" dirty="0">
-                <a:solidFill>
-                  <a:srgbClr val="1E293B"/>
-                </a:solidFill>
-                <a:latin typeface="Calibri" pitchFamily="34" charset="0"/>
-                <a:ea typeface="Calibri" pitchFamily="34" charset="-122"/>
-                <a:cs typeface="Calibri" pitchFamily="34" charset="-120"/>
-              </a:rPr>
-              <a:t> lived in the darkness below the castle.</a:t>
-            </a:r>
-            <a:endParaRPr lang="en-US" sz="1600" dirty="0"/>
-          </a:p>
-        </p:txBody>
-      </p:sp>
-      <p:sp>
-        <p:nvSpPr>
-          <p:cNvPr id="11" name="Shape 9"/>
-          <p:cNvSpPr/>
-          <p:nvPr/>
-        </p:nvSpPr>
-        <p:spPr>
-          <a:xfrm>
-            <a:off x="365760" y="3273552"/>
-            <a:ext cx="8412480" cy="658368"/>
-          </a:xfrm>
-          <a:prstGeom prst="roundRect">
-            <a:avLst>
-              <a:gd name="adj" fmla="val 13889"/>
-            </a:avLst>
-          </a:prstGeom>
-          <a:solidFill>
-            <a:srgbClr val="FFFFFF"/>
-          </a:solidFill>
-          <a:ln/>
-          <a:effectLst>
-            <a:outerShdw sx="100000" sy="100000" kx="0" ky="0" algn="bl" rotWithShape="0" blurRad="101600" dist="38100" dir="2700000">
-              <a:srgbClr val="000000">
-                <a:alpha val="12000"/>
-              </a:srgbClr>
-            </a:outerShdw>
-          </a:effectLst>
-        </p:spPr>
+              <a:rPr lang="en-US" sz="1700" b="1" u="sng" dirty="0">
+                <a:solidFill>
+                  <a:srgbClr val="C7922C"/>
+                </a:solidFill>
+                <a:latin typeface="Calibri" pitchFamily="34" charset="0"/>
+                <a:ea typeface="Calibri" pitchFamily="34" charset="-122"/>
+                <a:cs typeface="Calibri" pitchFamily="34" charset="-120"/>
+              </a:rPr>
+              <a:t>He</a:t>
+            </a:r>
+            <a:pPr indent="0" marL="0">
+              <a:buNone/>
+            </a:pPr>
+            <a:r>
+              <a:rPr lang="en-US" sz="1700" dirty="0">
+                <a:solidFill>
+                  <a:srgbClr val="1E293B"/>
+                </a:solidFill>
+                <a:latin typeface="Calibri" pitchFamily="34" charset="0"/>
+                <a:ea typeface="Calibri" pitchFamily="34" charset="-122"/>
+                <a:cs typeface="Calibri" pitchFamily="34" charset="-120"/>
+              </a:rPr>
+              <a:t> </a:t>
+            </a:r>
+            <a:pPr indent="0" marL="0">
+              <a:buNone/>
+            </a:pPr>
+            <a:r>
+              <a:rPr lang="en-US" sz="1700" dirty="0">
+                <a:solidFill>
+                  <a:srgbClr val="1E293B"/>
+                </a:solidFill>
+                <a:latin typeface="Calibri" pitchFamily="34" charset="0"/>
+                <a:ea typeface="Calibri" pitchFamily="34" charset="-122"/>
+                <a:cs typeface="Calibri" pitchFamily="34" charset="-120"/>
+              </a:rPr>
+              <a:t>declared</a:t>
+            </a:r>
+            <a:pPr indent="0" marL="0">
+              <a:buNone/>
+            </a:pPr>
+            <a:r>
+              <a:rPr lang="en-US" sz="1700" dirty="0">
+                <a:solidFill>
+                  <a:srgbClr val="1E293B"/>
+                </a:solidFill>
+                <a:latin typeface="Calibri" pitchFamily="34" charset="0"/>
+                <a:ea typeface="Calibri" pitchFamily="34" charset="-122"/>
+                <a:cs typeface="Calibri" pitchFamily="34" charset="-120"/>
+              </a:rPr>
+              <a:t> </a:t>
+            </a:r>
+            <a:pPr indent="0" marL="0">
+              <a:buNone/>
+            </a:pPr>
+            <a:r>
+              <a:rPr lang="en-US" sz="1700" b="1" u="sng" dirty="0">
+                <a:solidFill>
+                  <a:srgbClr val="C7922C"/>
+                </a:solidFill>
+                <a:latin typeface="Calibri" pitchFamily="34" charset="0"/>
+                <a:ea typeface="Calibri" pitchFamily="34" charset="-122"/>
+                <a:cs typeface="Calibri" pitchFamily="34" charset="-120"/>
+              </a:rPr>
+              <a:t>them</a:t>
+            </a:r>
+            <a:pPr indent="0" marL="0">
+              <a:buNone/>
+            </a:pPr>
+            <a:r>
+              <a:rPr lang="en-US" sz="1700" dirty="0">
+                <a:solidFill>
+                  <a:srgbClr val="1E293B"/>
+                </a:solidFill>
+                <a:latin typeface="Calibri" pitchFamily="34" charset="0"/>
+                <a:ea typeface="Calibri" pitchFamily="34" charset="-122"/>
+                <a:cs typeface="Calibri" pitchFamily="34" charset="-120"/>
+              </a:rPr>
+              <a:t> </a:t>
+            </a:r>
+            <a:pPr indent="0" marL="0">
+              <a:buNone/>
+            </a:pPr>
+            <a:r>
+              <a:rPr lang="en-US" sz="1700" dirty="0">
+                <a:solidFill>
+                  <a:srgbClr val="1E293B"/>
+                </a:solidFill>
+                <a:latin typeface="Calibri" pitchFamily="34" charset="0"/>
+                <a:ea typeface="Calibri" pitchFamily="34" charset="-122"/>
+                <a:cs typeface="Calibri" pitchFamily="34" charset="-120"/>
+              </a:rPr>
+              <a:t>outlaws.</a:t>
+            </a:r>
+            <a:endParaRPr lang="en-US" sz="1700" dirty="0"/>
+          </a:p>
+        </p:txBody>
       </p:sp>
       <p:sp>
         <p:nvSpPr>
@@ -3691,8 +4467,8 @@
         </p:nvSpPr>
         <p:spPr>
           <a:xfrm>
-            <a:off x="594360" y="3419856"/>
-            <a:ext cx="7863840" cy="402336"/>
+            <a:off x="365760" y="3008376"/>
+            <a:ext cx="8229600" cy="237744"/>
           </a:xfrm>
           <a:prstGeom prst="rect">
             <a:avLst/>
@@ -3708,45 +4484,17 @@
               <a:buNone/>
             </a:pPr>
             <a:r>
-              <a:rPr lang="en-US" sz="1600" dirty="0">
-                <a:solidFill>
-                  <a:srgbClr val="1E293B"/>
-                </a:solidFill>
-                <a:latin typeface="Calibri" pitchFamily="34" charset="0"/>
-                <a:ea typeface="Calibri" pitchFamily="34" charset="-122"/>
-                <a:cs typeface="Calibri" pitchFamily="34" charset="-120"/>
-              </a:rPr>
-              <a:t>The rats smelled </a:t>
-            </a:r>
-            <a:pPr indent="0" marL="0">
-              <a:buNone/>
-            </a:pPr>
-            <a:r>
-              <a:rPr lang="en-US" sz="1600" b="1" dirty="0">
-                <a:solidFill>
-                  <a:srgbClr val="34B76F"/>
-                </a:solidFill>
-                <a:latin typeface="Calibri" pitchFamily="34" charset="0"/>
-                <a:ea typeface="Calibri" pitchFamily="34" charset="-122"/>
-                <a:cs typeface="Calibri" pitchFamily="34" charset="-120"/>
-              </a:rPr>
-              <a:t>him</a:t>
-            </a:r>
-            <a:pPr indent="0" marL="0">
-              <a:buNone/>
-            </a:pPr>
-            <a:r>
-              <a:rPr lang="en-US" sz="1600" dirty="0">
-                <a:solidFill>
-                  <a:srgbClr val="1E293B"/>
-                </a:solidFill>
-                <a:latin typeface="Calibri" pitchFamily="34" charset="0"/>
-                <a:ea typeface="Calibri" pitchFamily="34" charset="-122"/>
-                <a:cs typeface="Calibri" pitchFamily="34" charset="-120"/>
-              </a:rPr>
-              <a:t> before he saw them.</a:t>
-            </a:r>
-            <a:endParaRPr lang="en-US" sz="1600" dirty="0"/>
+              <a:rPr lang="en-US" sz="1100" b="1" spc="100" kern="0" dirty="0">
+                <a:solidFill>
+                  <a:srgbClr val="C7922C"/>
+                </a:solidFill>
+                <a:latin typeface="Calibri" pitchFamily="34" charset="0"/>
+                <a:ea typeface="Calibri" pitchFamily="34" charset="-122"/>
+                <a:cs typeface="Calibri" pitchFamily="34" charset="-120"/>
+              </a:rPr>
+              <a:t>THINK IT THROUGH</a:t>
+            </a:r>
+            <a:endParaRPr lang="en-US" sz="1100" dirty="0"/>
           </a:p>
         </p:txBody>
       </p:sp>
@@ -3758,34 +4506,68 @@
         </p:nvSpPr>
         <p:spPr>
           <a:xfrm>
-            <a:off x="365760" y="4050792"/>
-            <a:ext cx="8412480" cy="365760"/>
-          </a:xfrm>
-          <a:prstGeom prst="rect">
-            <a:avLst/>
-          </a:prstGeom>
-          <a:noFill/>
-          <a:ln/>
-        </p:spPr>
-        <p:txBody>
-          <a:bodyPr wrap="square" lIns="0" tIns="0" rIns="0" bIns="0" rtlCol="0" anchor="ctr"/>
-          <a:lstStyle/>
-          <a:p>
-            <a:pPr indent="0" marL="0">
-              <a:buNone/>
-            </a:pPr>
-            <a:r>
-              <a:rPr lang="en-US" sz="1500" b="1" dirty="0">
-                <a:solidFill>
-                  <a:srgbClr val="34B76F"/>
-                </a:solidFill>
-                <a:latin typeface="Calibri" pitchFamily="34" charset="0"/>
-                <a:ea typeface="Calibri" pitchFamily="34" charset="-122"/>
-                <a:cs typeface="Calibri" pitchFamily="34" charset="-120"/>
-              </a:rPr>
-              <a:t>✅  Answers revealed</a:t>
-            </a:r>
-            <a:endParaRPr lang="en-US" sz="1500" dirty="0"/>
+            <a:off x="365760" y="3255264"/>
+            <a:ext cx="8412480" cy="1563624"/>
+          </a:xfrm>
+          <a:prstGeom prst="rect">
+            <a:avLst/>
+          </a:prstGeom>
+          <a:noFill/>
+          <a:ln/>
+        </p:spPr>
+        <p:txBody>
+          <a:bodyPr wrap="square" lIns="0" tIns="0" rIns="0" bIns="0" rtlCol="0" anchor="t"/>
+          <a:lstStyle/>
+          <a:p>
+            <a:pPr indent="0" marL="0">
+              <a:buNone/>
+            </a:pPr>
+            <a:r>
+              <a:rPr lang="en-US" sz="1400" dirty="0">
+                <a:solidFill>
+                  <a:srgbClr val="1E293B"/>
+                </a:solidFill>
+                <a:latin typeface="Calibri" pitchFamily="34" charset="0"/>
+                <a:ea typeface="Calibri" pitchFamily="34" charset="-122"/>
+                <a:cs typeface="Calibri" pitchFamily="34" charset="-120"/>
+              </a:rPr>
+              <a:t>1.  In each sentence, which pronoun is doing something?</a:t>
+            </a:r>
+            <a:endParaRPr lang="en-US" sz="1400" dirty="0"/>
+          </a:p>
+          <a:p>
+            <a:pPr indent="0" marL="0">
+              <a:buNone/>
+            </a:pPr>
+            <a:r>
+              <a:rPr lang="en-US" sz="1400" dirty="0">
+                <a:solidFill>
+                  <a:srgbClr val="1E293B"/>
+                </a:solidFill>
+                <a:latin typeface="Calibri" pitchFamily="34" charset="0"/>
+                <a:ea typeface="Calibri" pitchFamily="34" charset="-122"/>
+                <a:cs typeface="Calibri" pitchFamily="34" charset="-120"/>
+              </a:rPr>
+              <a:t>2.  Which pronoun is having something done to it?</a:t>
+            </a:r>
+            <a:endParaRPr lang="en-US" sz="1400" dirty="0"/>
+          </a:p>
+          <a:p>
+            <a:pPr indent="0" marL="0">
+              <a:buNone/>
+            </a:pPr>
+            <a:r>
+              <a:rPr lang="en-US" sz="1400" dirty="0">
+                <a:solidFill>
+                  <a:srgbClr val="1E293B"/>
+                </a:solidFill>
+                <a:latin typeface="Calibri" pitchFamily="34" charset="0"/>
+                <a:ea typeface="Calibri" pitchFamily="34" charset="-122"/>
+                <a:cs typeface="Calibri" pitchFamily="34" charset="-120"/>
+              </a:rPr>
+              <a:t>3.  Swap the two pronouns around and read it aloud. What does your ear tell you?</a:t>
+            </a:r>
+            <a:endParaRPr lang="en-US" sz="1400" dirty="0"/>
           </a:p>
         </p:txBody>
       </p:sp>
@@ -3836,7 +4618,7 @@
             <a:avLst/>
           </a:prstGeom>
           <a:solidFill>
-            <a:srgbClr val="0E1C42"/>
+            <a:srgbClr val="C7922C"/>
           </a:solidFill>
           <a:ln/>
         </p:spPr>
@@ -3874,7 +4656,7 @@
                 <a:ea typeface="Calibri" pitchFamily="34" charset="-122"/>
                 <a:cs typeface="Calibri" pitchFamily="34" charset="-120"/>
               </a:rPr>
-              <a:t>🔠  Spelling</a:t>
+              <a:t>✏️  Grammar — What do you notice?</a:t>
             </a:r>
             <a:endParaRPr lang="en-US" sz="2200" dirty="0"/>
           </a:p>
@@ -3888,7 +4670,7 @@
         </p:nvSpPr>
         <p:spPr>
           <a:xfrm>
-            <a:off x="365760" y="777240"/>
+            <a:off x="365760" y="749808"/>
             <a:ext cx="8229600" cy="237744"/>
           </a:xfrm>
           <a:prstGeom prst="rect">
@@ -3907,13 +4689,13 @@
             <a:r>
               <a:rPr lang="en-US" sz="1100" b="1" spc="100" kern="0" dirty="0">
                 <a:solidFill>
-                  <a:srgbClr val="0E1C42"/>
-                </a:solidFill>
-                <a:latin typeface="Calibri" pitchFamily="34" charset="0"/>
-                <a:ea typeface="Calibri" pitchFamily="34" charset="-122"/>
-                <a:cs typeface="Calibri" pitchFamily="34" charset="-120"/>
-              </a:rPr>
-              <a:t>CHANGING Y TO I</a:t>
+                  <a:srgbClr val="C7922C"/>
+                </a:solidFill>
+                <a:latin typeface="Calibri" pitchFamily="34" charset="0"/>
+                <a:ea typeface="Calibri" pitchFamily="34" charset="-122"/>
+                <a:cs typeface="Calibri" pitchFamily="34" charset="-120"/>
+              </a:rPr>
+              <a:t>SUBJECT AND OBJECT PRONOUNS</a:t>
             </a:r>
             <a:endParaRPr lang="en-US" sz="1100" dirty="0"/>
           </a:p>
@@ -3927,8 +4709,8 @@
         </p:nvSpPr>
         <p:spPr>
           <a:xfrm>
-            <a:off x="365760" y="1078992"/>
-            <a:ext cx="8229600" cy="237744"/>
+            <a:off x="365760" y="987552"/>
+            <a:ext cx="8412480" cy="411480"/>
           </a:xfrm>
           <a:prstGeom prst="rect">
             <a:avLst/>
@@ -3944,7 +4726,7 @@
               <a:buNone/>
             </a:pPr>
             <a:r>
-              <a:rPr lang="en-US" sz="1100" b="1" spc="100" kern="0" dirty="0">
+              <a:rPr lang="en-US" sz="1500" i="1" dirty="0">
                 <a:solidFill>
                   <a:srgbClr val="64748B"/>
                 </a:solidFill>
@@ -3952,9 +4734,9 @@
                 <a:ea typeface="Calibri" pitchFamily="34" charset="-122"/>
                 <a:cs typeface="Calibri" pitchFamily="34" charset="-120"/>
               </a:rPr>
-              <a:t>WORD BANK</a:t>
-            </a:r>
-            <a:endParaRPr lang="en-US" sz="1100" dirty="0"/>
+              <a:t>Look at the pronouns marked in each sentence — the little words standing in for names.</a:t>
+            </a:r>
+            <a:endParaRPr lang="en-US" sz="1500" dirty="0"/>
           </a:p>
         </p:txBody>
       </p:sp>
@@ -3966,20 +4748,20 @@
         </p:nvSpPr>
         <p:spPr>
           <a:xfrm>
-            <a:off x="365760" y="1353312"/>
-            <a:ext cx="8412480" cy="1005840"/>
+            <a:off x="365760" y="1463040"/>
+            <a:ext cx="8412480" cy="658368"/>
           </a:xfrm>
           <a:prstGeom prst="roundRect">
             <a:avLst>
-              <a:gd name="adj" fmla="val 9091"/>
+              <a:gd name="adj" fmla="val 13889"/>
             </a:avLst>
           </a:prstGeom>
           <a:solidFill>
-            <a:srgbClr val="FFFFFF"/>
+            <a:srgbClr val="FEF6E8"/>
           </a:solidFill>
           <a:ln w="19050">
             <a:solidFill>
-              <a:srgbClr val="0E1C42"/>
+              <a:srgbClr val="C7922C"/>
             </a:solidFill>
             <a:prstDash val="solid"/>
           </a:ln>
@@ -4000,8 +4782,8 @@
         </p:nvSpPr>
         <p:spPr>
           <a:xfrm>
-            <a:off x="594360" y="1481328"/>
-            <a:ext cx="7955280" cy="749808"/>
+            <a:off x="594360" y="1591056"/>
+            <a:ext cx="7955280" cy="402336"/>
           </a:xfrm>
           <a:prstGeom prst="rect">
             <a:avLst/>
@@ -4016,16 +4798,548 @@
             <a:pPr indent="0" marL="0">
               <a:buNone/>
             </a:pPr>
+            <a:endParaRPr lang="en-US" sz="1700" dirty="0"/>
+          </a:p>
+        </p:txBody>
+      </p:sp>
+      <p:sp>
+        <p:nvSpPr>
+          <p:cNvPr id="8" name="Text 6"/>
+          <p:cNvSpPr/>
+          <p:nvPr/>
+        </p:nvSpPr>
+        <p:spPr>
+          <a:xfrm>
+            <a:off x="594360" y="1591056"/>
+            <a:ext cx="7955280" cy="402336"/>
+          </a:xfrm>
+          <a:prstGeom prst="rect">
+            <a:avLst/>
+          </a:prstGeom>
+          <a:noFill/>
+          <a:ln/>
+        </p:spPr>
+        <p:txBody>
+          <a:bodyPr wrap="square" lIns="0" tIns="0" rIns="0" bIns="0" rtlCol="0" anchor="ctr"/>
+          <a:lstStyle/>
+          <a:p>
+            <a:pPr indent="0" marL="0">
+              <a:buNone/>
+            </a:pPr>
             <a:r>
               <a:rPr lang="en-US" sz="1700" dirty="0">
                 <a:solidFill>
-                  <a:srgbClr val="0E1C42"/>
-                </a:solidFill>
-                <a:latin typeface="Calibri" pitchFamily="34" charset="0"/>
-                <a:ea typeface="Calibri" pitchFamily="34" charset="-122"/>
-                <a:cs typeface="Calibri" pitchFamily="34" charset="-120"/>
-              </a:rPr>
-              <a:t>hurried   ·   cried   ·   carried   ·   emptied   ·   played   ·   stayed   ·   obeyed   ·   enjoyed</a:t>
+                  <a:srgbClr val="1E293B"/>
+                </a:solidFill>
+                <a:latin typeface="Calibri" pitchFamily="34" charset="0"/>
+                <a:ea typeface="Calibri" pitchFamily="34" charset="-122"/>
+                <a:cs typeface="Calibri" pitchFamily="34" charset="-120"/>
+              </a:rPr>
+              <a:t>And</a:t>
+            </a:r>
+            <a:pPr indent="0" marL="0">
+              <a:buNone/>
+            </a:pPr>
+            <a:r>
+              <a:rPr lang="en-US" sz="1700" dirty="0">
+                <a:solidFill>
+                  <a:srgbClr val="1E293B"/>
+                </a:solidFill>
+                <a:latin typeface="Calibri" pitchFamily="34" charset="0"/>
+                <a:ea typeface="Calibri" pitchFamily="34" charset="-122"/>
+                <a:cs typeface="Calibri" pitchFamily="34" charset="-120"/>
+              </a:rPr>
+              <a:t> </a:t>
+            </a:r>
+            <a:pPr indent="0" marL="0">
+              <a:buNone/>
+            </a:pPr>
+            <a:r>
+              <a:rPr lang="en-US" sz="1700" dirty="0">
+                <a:solidFill>
+                  <a:srgbClr val="1E293B"/>
+                </a:solidFill>
+                <a:latin typeface="Calibri" pitchFamily="34" charset="0"/>
+                <a:ea typeface="Calibri" pitchFamily="34" charset="-122"/>
+                <a:cs typeface="Calibri" pitchFamily="34" charset="-120"/>
+              </a:rPr>
+              <a:t>though</a:t>
+            </a:r>
+            <a:pPr indent="0" marL="0">
+              <a:buNone/>
+            </a:pPr>
+            <a:r>
+              <a:rPr lang="en-US" sz="1700" dirty="0">
+                <a:solidFill>
+                  <a:srgbClr val="1E293B"/>
+                </a:solidFill>
+                <a:latin typeface="Calibri" pitchFamily="34" charset="0"/>
+                <a:ea typeface="Calibri" pitchFamily="34" charset="-122"/>
+                <a:cs typeface="Calibri" pitchFamily="34" charset="-120"/>
+              </a:rPr>
+              <a:t> </a:t>
+            </a:r>
+            <a:pPr indent="0" marL="0">
+              <a:buNone/>
+            </a:pPr>
+            <a:r>
+              <a:rPr lang="en-US" sz="1700" b="1" u="sng" dirty="0">
+                <a:solidFill>
+                  <a:srgbClr val="C7922C"/>
+                </a:solidFill>
+                <a:latin typeface="Calibri" pitchFamily="34" charset="0"/>
+                <a:ea typeface="Calibri" pitchFamily="34" charset="-122"/>
+                <a:cs typeface="Calibri" pitchFamily="34" charset="-120"/>
+              </a:rPr>
+              <a:t>she</a:t>
+            </a:r>
+            <a:pPr indent="0" marL="0">
+              <a:buNone/>
+            </a:pPr>
+            <a:r>
+              <a:rPr lang="en-US" sz="1700" dirty="0">
+                <a:solidFill>
+                  <a:srgbClr val="1E293B"/>
+                </a:solidFill>
+                <a:latin typeface="Calibri" pitchFamily="34" charset="0"/>
+                <a:ea typeface="Calibri" pitchFamily="34" charset="-122"/>
+                <a:cs typeface="Calibri" pitchFamily="34" charset="-120"/>
+              </a:rPr>
+              <a:t> </a:t>
+            </a:r>
+            <a:pPr indent="0" marL="0">
+              <a:buNone/>
+            </a:pPr>
+            <a:r>
+              <a:rPr lang="en-US" sz="1700" dirty="0">
+                <a:solidFill>
+                  <a:srgbClr val="1E293B"/>
+                </a:solidFill>
+                <a:latin typeface="Calibri" pitchFamily="34" charset="0"/>
+                <a:ea typeface="Calibri" pitchFamily="34" charset="-122"/>
+                <a:cs typeface="Calibri" pitchFamily="34" charset="-120"/>
+              </a:rPr>
+              <a:t>did</a:t>
+            </a:r>
+            <a:pPr indent="0" marL="0">
+              <a:buNone/>
+            </a:pPr>
+            <a:r>
+              <a:rPr lang="en-US" sz="1700" dirty="0">
+                <a:solidFill>
+                  <a:srgbClr val="1E293B"/>
+                </a:solidFill>
+                <a:latin typeface="Calibri" pitchFamily="34" charset="0"/>
+                <a:ea typeface="Calibri" pitchFamily="34" charset="-122"/>
+                <a:cs typeface="Calibri" pitchFamily="34" charset="-120"/>
+              </a:rPr>
+              <a:t> </a:t>
+            </a:r>
+            <a:pPr indent="0" marL="0">
+              <a:buNone/>
+            </a:pPr>
+            <a:r>
+              <a:rPr lang="en-US" sz="1700" dirty="0">
+                <a:solidFill>
+                  <a:srgbClr val="1E293B"/>
+                </a:solidFill>
+                <a:latin typeface="Calibri" pitchFamily="34" charset="0"/>
+                <a:ea typeface="Calibri" pitchFamily="34" charset="-122"/>
+                <a:cs typeface="Calibri" pitchFamily="34" charset="-120"/>
+              </a:rPr>
+              <a:t>not</a:t>
+            </a:r>
+            <a:pPr indent="0" marL="0">
+              <a:buNone/>
+            </a:pPr>
+            <a:r>
+              <a:rPr lang="en-US" sz="1700" dirty="0">
+                <a:solidFill>
+                  <a:srgbClr val="1E293B"/>
+                </a:solidFill>
+                <a:latin typeface="Calibri" pitchFamily="34" charset="0"/>
+                <a:ea typeface="Calibri" pitchFamily="34" charset="-122"/>
+                <a:cs typeface="Calibri" pitchFamily="34" charset="-120"/>
+              </a:rPr>
+              <a:t> </a:t>
+            </a:r>
+            <a:pPr indent="0" marL="0">
+              <a:buNone/>
+            </a:pPr>
+            <a:r>
+              <a:rPr lang="en-US" sz="1700" dirty="0">
+                <a:solidFill>
+                  <a:srgbClr val="1E293B"/>
+                </a:solidFill>
+                <a:latin typeface="Calibri" pitchFamily="34" charset="0"/>
+                <a:ea typeface="Calibri" pitchFamily="34" charset="-122"/>
+                <a:cs typeface="Calibri" pitchFamily="34" charset="-120"/>
+              </a:rPr>
+              <a:t>yet</a:t>
+            </a:r>
+            <a:pPr indent="0" marL="0">
+              <a:buNone/>
+            </a:pPr>
+            <a:r>
+              <a:rPr lang="en-US" sz="1700" dirty="0">
+                <a:solidFill>
+                  <a:srgbClr val="1E293B"/>
+                </a:solidFill>
+                <a:latin typeface="Calibri" pitchFamily="34" charset="0"/>
+                <a:ea typeface="Calibri" pitchFamily="34" charset="-122"/>
+                <a:cs typeface="Calibri" pitchFamily="34" charset="-120"/>
+              </a:rPr>
+              <a:t> </a:t>
+            </a:r>
+            <a:pPr indent="0" marL="0">
+              <a:buNone/>
+            </a:pPr>
+            <a:r>
+              <a:rPr lang="en-US" sz="1700" dirty="0">
+                <a:solidFill>
+                  <a:srgbClr val="1E293B"/>
+                </a:solidFill>
+                <a:latin typeface="Calibri" pitchFamily="34" charset="0"/>
+                <a:ea typeface="Calibri" pitchFamily="34" charset="-122"/>
+                <a:cs typeface="Calibri" pitchFamily="34" charset="-120"/>
+              </a:rPr>
+              <a:t>know</a:t>
+            </a:r>
+            <a:pPr indent="0" marL="0">
+              <a:buNone/>
+            </a:pPr>
+            <a:r>
+              <a:rPr lang="en-US" sz="1700" dirty="0">
+                <a:solidFill>
+                  <a:srgbClr val="1E293B"/>
+                </a:solidFill>
+                <a:latin typeface="Calibri" pitchFamily="34" charset="0"/>
+                <a:ea typeface="Calibri" pitchFamily="34" charset="-122"/>
+                <a:cs typeface="Calibri" pitchFamily="34" charset="-120"/>
+              </a:rPr>
+              <a:t> </a:t>
+            </a:r>
+            <a:pPr indent="0" marL="0">
+              <a:buNone/>
+            </a:pPr>
+            <a:r>
+              <a:rPr lang="en-US" sz="1700" b="1" u="sng" dirty="0">
+                <a:solidFill>
+                  <a:srgbClr val="C7922C"/>
+                </a:solidFill>
+                <a:latin typeface="Calibri" pitchFamily="34" charset="0"/>
+                <a:ea typeface="Calibri" pitchFamily="34" charset="-122"/>
+                <a:cs typeface="Calibri" pitchFamily="34" charset="-120"/>
+              </a:rPr>
+              <a:t>it,</a:t>
+            </a:r>
+            <a:pPr indent="0" marL="0">
+              <a:buNone/>
+            </a:pPr>
+            <a:r>
+              <a:rPr lang="en-US" sz="1700" dirty="0">
+                <a:solidFill>
+                  <a:srgbClr val="1E293B"/>
+                </a:solidFill>
+                <a:latin typeface="Calibri" pitchFamily="34" charset="0"/>
+                <a:ea typeface="Calibri" pitchFamily="34" charset="-122"/>
+                <a:cs typeface="Calibri" pitchFamily="34" charset="-120"/>
+              </a:rPr>
+              <a:t> </a:t>
+            </a:r>
+            <a:pPr indent="0" marL="0">
+              <a:buNone/>
+            </a:pPr>
+            <a:r>
+              <a:rPr lang="en-US" sz="1700" b="1" u="sng" dirty="0">
+                <a:solidFill>
+                  <a:srgbClr val="C7922C"/>
+                </a:solidFill>
+                <a:latin typeface="Calibri" pitchFamily="34" charset="0"/>
+                <a:ea typeface="Calibri" pitchFamily="34" charset="-122"/>
+                <a:cs typeface="Calibri" pitchFamily="34" charset="-120"/>
+              </a:rPr>
+              <a:t>she</a:t>
+            </a:r>
+            <a:pPr indent="0" marL="0">
+              <a:buNone/>
+            </a:pPr>
+            <a:r>
+              <a:rPr lang="en-US" sz="1700" dirty="0">
+                <a:solidFill>
+                  <a:srgbClr val="1E293B"/>
+                </a:solidFill>
+                <a:latin typeface="Calibri" pitchFamily="34" charset="0"/>
+                <a:ea typeface="Calibri" pitchFamily="34" charset="-122"/>
+                <a:cs typeface="Calibri" pitchFamily="34" charset="-120"/>
+              </a:rPr>
+              <a:t> </a:t>
+            </a:r>
+            <a:pPr indent="0" marL="0">
+              <a:buNone/>
+            </a:pPr>
+            <a:r>
+              <a:rPr lang="en-US" sz="1700" dirty="0">
+                <a:solidFill>
+                  <a:srgbClr val="1E293B"/>
+                </a:solidFill>
+                <a:latin typeface="Calibri" pitchFamily="34" charset="0"/>
+                <a:ea typeface="Calibri" pitchFamily="34" charset="-122"/>
+                <a:cs typeface="Calibri" pitchFamily="34" charset="-120"/>
+              </a:rPr>
+              <a:t>would</a:t>
+            </a:r>
+            <a:pPr indent="0" marL="0">
+              <a:buNone/>
+            </a:pPr>
+            <a:r>
+              <a:rPr lang="en-US" sz="1700" dirty="0">
+                <a:solidFill>
+                  <a:srgbClr val="1E293B"/>
+                </a:solidFill>
+                <a:latin typeface="Calibri" pitchFamily="34" charset="0"/>
+                <a:ea typeface="Calibri" pitchFamily="34" charset="-122"/>
+                <a:cs typeface="Calibri" pitchFamily="34" charset="-120"/>
+              </a:rPr>
+              <a:t> </a:t>
+            </a:r>
+            <a:pPr indent="0" marL="0">
+              <a:buNone/>
+            </a:pPr>
+            <a:r>
+              <a:rPr lang="en-US" sz="1700" dirty="0">
+                <a:solidFill>
+                  <a:srgbClr val="1E293B"/>
+                </a:solidFill>
+                <a:latin typeface="Calibri" pitchFamily="34" charset="0"/>
+                <a:ea typeface="Calibri" pitchFamily="34" charset="-122"/>
+                <a:cs typeface="Calibri" pitchFamily="34" charset="-120"/>
+              </a:rPr>
+              <a:t>be</a:t>
+            </a:r>
+            <a:pPr indent="0" marL="0">
+              <a:buNone/>
+            </a:pPr>
+            <a:r>
+              <a:rPr lang="en-US" sz="1700" dirty="0">
+                <a:solidFill>
+                  <a:srgbClr val="1E293B"/>
+                </a:solidFill>
+                <a:latin typeface="Calibri" pitchFamily="34" charset="0"/>
+                <a:ea typeface="Calibri" pitchFamily="34" charset="-122"/>
+                <a:cs typeface="Calibri" pitchFamily="34" charset="-120"/>
+              </a:rPr>
+              <a:t> </a:t>
+            </a:r>
+            <a:pPr indent="0" marL="0">
+              <a:buNone/>
+            </a:pPr>
+            <a:r>
+              <a:rPr lang="en-US" sz="1700" dirty="0">
+                <a:solidFill>
+                  <a:srgbClr val="1E293B"/>
+                </a:solidFill>
+                <a:latin typeface="Calibri" pitchFamily="34" charset="0"/>
+                <a:ea typeface="Calibri" pitchFamily="34" charset="-122"/>
+                <a:cs typeface="Calibri" pitchFamily="34" charset="-120"/>
+              </a:rPr>
+              <a:t>instrumental</a:t>
+            </a:r>
+            <a:pPr indent="0" marL="0">
+              <a:buNone/>
+            </a:pPr>
+            <a:r>
+              <a:rPr lang="en-US" sz="1700" dirty="0">
+                <a:solidFill>
+                  <a:srgbClr val="1E293B"/>
+                </a:solidFill>
+                <a:latin typeface="Calibri" pitchFamily="34" charset="0"/>
+                <a:ea typeface="Calibri" pitchFamily="34" charset="-122"/>
+                <a:cs typeface="Calibri" pitchFamily="34" charset="-120"/>
+              </a:rPr>
+              <a:t> </a:t>
+            </a:r>
+            <a:pPr indent="0" marL="0">
+              <a:buNone/>
+            </a:pPr>
+            <a:r>
+              <a:rPr lang="en-US" sz="1700" dirty="0">
+                <a:solidFill>
+                  <a:srgbClr val="1E293B"/>
+                </a:solidFill>
+                <a:latin typeface="Calibri" pitchFamily="34" charset="0"/>
+                <a:ea typeface="Calibri" pitchFamily="34" charset="-122"/>
+                <a:cs typeface="Calibri" pitchFamily="34" charset="-120"/>
+              </a:rPr>
+              <a:t>in</a:t>
+            </a:r>
+            <a:pPr indent="0" marL="0">
+              <a:buNone/>
+            </a:pPr>
+            <a:r>
+              <a:rPr lang="en-US" sz="1700" dirty="0">
+                <a:solidFill>
+                  <a:srgbClr val="1E293B"/>
+                </a:solidFill>
+                <a:latin typeface="Calibri" pitchFamily="34" charset="0"/>
+                <a:ea typeface="Calibri" pitchFamily="34" charset="-122"/>
+                <a:cs typeface="Calibri" pitchFamily="34" charset="-120"/>
+              </a:rPr>
+              <a:t> </a:t>
+            </a:r>
+            <a:pPr indent="0" marL="0">
+              <a:buNone/>
+            </a:pPr>
+            <a:r>
+              <a:rPr lang="en-US" sz="1700" dirty="0">
+                <a:solidFill>
+                  <a:srgbClr val="1E293B"/>
+                </a:solidFill>
+                <a:latin typeface="Calibri" pitchFamily="34" charset="0"/>
+                <a:ea typeface="Calibri" pitchFamily="34" charset="-122"/>
+                <a:cs typeface="Calibri" pitchFamily="34" charset="-120"/>
+              </a:rPr>
+              <a:t>helping</a:t>
+            </a:r>
+            <a:pPr indent="0" marL="0">
+              <a:buNone/>
+            </a:pPr>
+            <a:r>
+              <a:rPr lang="en-US" sz="1700" dirty="0">
+                <a:solidFill>
+                  <a:srgbClr val="1E293B"/>
+                </a:solidFill>
+                <a:latin typeface="Calibri" pitchFamily="34" charset="0"/>
+                <a:ea typeface="Calibri" pitchFamily="34" charset="-122"/>
+                <a:cs typeface="Calibri" pitchFamily="34" charset="-120"/>
+              </a:rPr>
+              <a:t> </a:t>
+            </a:r>
+            <a:pPr indent="0" marL="0">
+              <a:buNone/>
+            </a:pPr>
+            <a:r>
+              <a:rPr lang="en-US" sz="1700" dirty="0">
+                <a:solidFill>
+                  <a:srgbClr val="1E293B"/>
+                </a:solidFill>
+                <a:latin typeface="Calibri" pitchFamily="34" charset="0"/>
+                <a:ea typeface="Calibri" pitchFamily="34" charset="-122"/>
+                <a:cs typeface="Calibri" pitchFamily="34" charset="-120"/>
+              </a:rPr>
+              <a:t>the</a:t>
+            </a:r>
+            <a:pPr indent="0" marL="0">
+              <a:buNone/>
+            </a:pPr>
+            <a:r>
+              <a:rPr lang="en-US" sz="1700" dirty="0">
+                <a:solidFill>
+                  <a:srgbClr val="1E293B"/>
+                </a:solidFill>
+                <a:latin typeface="Calibri" pitchFamily="34" charset="0"/>
+                <a:ea typeface="Calibri" pitchFamily="34" charset="-122"/>
+                <a:cs typeface="Calibri" pitchFamily="34" charset="-120"/>
+              </a:rPr>
+              <a:t> </a:t>
+            </a:r>
+            <a:pPr indent="0" marL="0">
+              <a:buNone/>
+            </a:pPr>
+            <a:r>
+              <a:rPr lang="en-US" sz="1700" dirty="0">
+                <a:solidFill>
+                  <a:srgbClr val="1E293B"/>
+                </a:solidFill>
+                <a:latin typeface="Calibri" pitchFamily="34" charset="0"/>
+                <a:ea typeface="Calibri" pitchFamily="34" charset="-122"/>
+                <a:cs typeface="Calibri" pitchFamily="34" charset="-120"/>
+              </a:rPr>
+              <a:t>rat</a:t>
+            </a:r>
+            <a:pPr indent="0" marL="0">
+              <a:buNone/>
+            </a:pPr>
+            <a:r>
+              <a:rPr lang="en-US" sz="1700" dirty="0">
+                <a:solidFill>
+                  <a:srgbClr val="1E293B"/>
+                </a:solidFill>
+                <a:latin typeface="Calibri" pitchFamily="34" charset="0"/>
+                <a:ea typeface="Calibri" pitchFamily="34" charset="-122"/>
+                <a:cs typeface="Calibri" pitchFamily="34" charset="-120"/>
+              </a:rPr>
+              <a:t> </a:t>
+            </a:r>
+            <a:pPr indent="0" marL="0">
+              <a:buNone/>
+            </a:pPr>
+            <a:r>
+              <a:rPr lang="en-US" sz="1700" dirty="0">
+                <a:solidFill>
+                  <a:srgbClr val="1E293B"/>
+                </a:solidFill>
+                <a:latin typeface="Calibri" pitchFamily="34" charset="0"/>
+                <a:ea typeface="Calibri" pitchFamily="34" charset="-122"/>
+                <a:cs typeface="Calibri" pitchFamily="34" charset="-120"/>
+              </a:rPr>
+              <a:t>work</a:t>
+            </a:r>
+            <a:pPr indent="0" marL="0">
+              <a:buNone/>
+            </a:pPr>
+            <a:r>
+              <a:rPr lang="en-US" sz="1700" dirty="0">
+                <a:solidFill>
+                  <a:srgbClr val="1E293B"/>
+                </a:solidFill>
+                <a:latin typeface="Calibri" pitchFamily="34" charset="0"/>
+                <a:ea typeface="Calibri" pitchFamily="34" charset="-122"/>
+                <a:cs typeface="Calibri" pitchFamily="34" charset="-120"/>
+              </a:rPr>
+              <a:t> </a:t>
+            </a:r>
+            <a:pPr indent="0" marL="0">
+              <a:buNone/>
+            </a:pPr>
+            <a:r>
+              <a:rPr lang="en-US" sz="1700" dirty="0">
+                <a:solidFill>
+                  <a:srgbClr val="1E293B"/>
+                </a:solidFill>
+                <a:latin typeface="Calibri" pitchFamily="34" charset="0"/>
+                <a:ea typeface="Calibri" pitchFamily="34" charset="-122"/>
+                <a:cs typeface="Calibri" pitchFamily="34" charset="-120"/>
+              </a:rPr>
+              <a:t>his</a:t>
+            </a:r>
+            <a:pPr indent="0" marL="0">
+              <a:buNone/>
+            </a:pPr>
+            <a:r>
+              <a:rPr lang="en-US" sz="1700" dirty="0">
+                <a:solidFill>
+                  <a:srgbClr val="1E293B"/>
+                </a:solidFill>
+                <a:latin typeface="Calibri" pitchFamily="34" charset="0"/>
+                <a:ea typeface="Calibri" pitchFamily="34" charset="-122"/>
+                <a:cs typeface="Calibri" pitchFamily="34" charset="-120"/>
+              </a:rPr>
+              <a:t> </a:t>
+            </a:r>
+            <a:pPr indent="0" marL="0">
+              <a:buNone/>
+            </a:pPr>
+            <a:r>
+              <a:rPr lang="en-US" sz="1700" dirty="0">
+                <a:solidFill>
+                  <a:srgbClr val="1E293B"/>
+                </a:solidFill>
+                <a:latin typeface="Calibri" pitchFamily="34" charset="0"/>
+                <a:ea typeface="Calibri" pitchFamily="34" charset="-122"/>
+                <a:cs typeface="Calibri" pitchFamily="34" charset="-120"/>
+              </a:rPr>
+              <a:t>revenge.</a:t>
             </a:r>
             <a:endParaRPr lang="en-US" sz="1700" dirty="0"/>
           </a:p>
@@ -4033,14 +5347,48 @@
       </p:sp>
       <p:sp>
         <p:nvSpPr>
-          <p:cNvPr id="8" name="Text 6"/>
-          <p:cNvSpPr/>
-          <p:nvPr/>
-        </p:nvSpPr>
-        <p:spPr>
-          <a:xfrm>
-            <a:off x="365760" y="2514600"/>
-            <a:ext cx="8412480" cy="457200"/>
+          <p:cNvPr id="9" name="Shape 7"/>
+          <p:cNvSpPr/>
+          <p:nvPr/>
+        </p:nvSpPr>
+        <p:spPr>
+          <a:xfrm>
+            <a:off x="365760" y="2212848"/>
+            <a:ext cx="8412480" cy="658368"/>
+          </a:xfrm>
+          <a:prstGeom prst="roundRect">
+            <a:avLst>
+              <a:gd name="adj" fmla="val 13889"/>
+            </a:avLst>
+          </a:prstGeom>
+          <a:solidFill>
+            <a:srgbClr val="FFFFFF"/>
+          </a:solidFill>
+          <a:ln w="19050">
+            <a:solidFill>
+              <a:srgbClr val="C7922C"/>
+            </a:solidFill>
+            <a:prstDash val="solid"/>
+          </a:ln>
+          <a:effectLst>
+            <a:outerShdw sx="100000" sy="100000" kx="0" ky="0" algn="bl" rotWithShape="0" blurRad="101600" dist="38100" dir="2700000">
+              <a:srgbClr val="000000">
+                <a:alpha val="12000"/>
+              </a:srgbClr>
+            </a:outerShdw>
+          </a:effectLst>
+        </p:spPr>
+      </p:sp>
+      <p:sp>
+        <p:nvSpPr>
+          <p:cNvPr id="10" name="Text 8"/>
+          <p:cNvSpPr/>
+          <p:nvPr/>
+        </p:nvSpPr>
+        <p:spPr>
+          <a:xfrm>
+            <a:off x="594360" y="2340864"/>
+            <a:ext cx="7955280" cy="402336"/>
           </a:xfrm>
           <a:prstGeom prst="rect">
             <a:avLst/>
@@ -4055,18 +5403,290 @@
             <a:pPr indent="0" marL="0">
               <a:buNone/>
             </a:pPr>
-            <a:r>
-              <a:rPr lang="en-US" sz="1500" i="1" dirty="0">
-                <a:solidFill>
-                  <a:srgbClr val="64748B"/>
-                </a:solidFill>
-                <a:latin typeface="Calibri" pitchFamily="34" charset="0"/>
-                <a:ea typeface="Calibri" pitchFamily="34" charset="-122"/>
-                <a:cs typeface="Calibri" pitchFamily="34" charset="-120"/>
-              </a:rPr>
-              <a:t>Which column does each word belong in?  Columns: y became i  |  y stayed y</a:t>
-            </a:r>
-            <a:endParaRPr lang="en-US" sz="1500" dirty="0"/>
+            <a:endParaRPr lang="en-US" sz="1700" dirty="0"/>
+          </a:p>
+        </p:txBody>
+      </p:sp>
+      <p:sp>
+        <p:nvSpPr>
+          <p:cNvPr id="11" name="Text 9"/>
+          <p:cNvSpPr/>
+          <p:nvPr/>
+        </p:nvSpPr>
+        <p:spPr>
+          <a:xfrm>
+            <a:off x="594360" y="2340864"/>
+            <a:ext cx="7955280" cy="402336"/>
+          </a:xfrm>
+          <a:prstGeom prst="rect">
+            <a:avLst/>
+          </a:prstGeom>
+          <a:noFill/>
+          <a:ln/>
+        </p:spPr>
+        <p:txBody>
+          <a:bodyPr wrap="square" lIns="0" tIns="0" rIns="0" bIns="0" rtlCol="0" anchor="ctr"/>
+          <a:lstStyle/>
+          <a:p>
+            <a:pPr indent="0" marL="0">
+              <a:buNone/>
+            </a:pPr>
+            <a:r>
+              <a:rPr lang="en-US" sz="1700" b="1" u="sng" dirty="0">
+                <a:solidFill>
+                  <a:srgbClr val="C7922C"/>
+                </a:solidFill>
+                <a:latin typeface="Calibri" pitchFamily="34" charset="0"/>
+                <a:ea typeface="Calibri" pitchFamily="34" charset="-122"/>
+                <a:cs typeface="Calibri" pitchFamily="34" charset="-120"/>
+              </a:rPr>
+              <a:t>He</a:t>
+            </a:r>
+            <a:pPr indent="0" marL="0">
+              <a:buNone/>
+            </a:pPr>
+            <a:r>
+              <a:rPr lang="en-US" sz="1700" dirty="0">
+                <a:solidFill>
+                  <a:srgbClr val="1E293B"/>
+                </a:solidFill>
+                <a:latin typeface="Calibri" pitchFamily="34" charset="0"/>
+                <a:ea typeface="Calibri" pitchFamily="34" charset="-122"/>
+                <a:cs typeface="Calibri" pitchFamily="34" charset="-120"/>
+              </a:rPr>
+              <a:t> </a:t>
+            </a:r>
+            <a:pPr indent="0" marL="0">
+              <a:buNone/>
+            </a:pPr>
+            <a:r>
+              <a:rPr lang="en-US" sz="1700" dirty="0">
+                <a:solidFill>
+                  <a:srgbClr val="1E293B"/>
+                </a:solidFill>
+                <a:latin typeface="Calibri" pitchFamily="34" charset="0"/>
+                <a:ea typeface="Calibri" pitchFamily="34" charset="-122"/>
+                <a:cs typeface="Calibri" pitchFamily="34" charset="-120"/>
+              </a:rPr>
+              <a:t>declared</a:t>
+            </a:r>
+            <a:pPr indent="0" marL="0">
+              <a:buNone/>
+            </a:pPr>
+            <a:r>
+              <a:rPr lang="en-US" sz="1700" dirty="0">
+                <a:solidFill>
+                  <a:srgbClr val="1E293B"/>
+                </a:solidFill>
+                <a:latin typeface="Calibri" pitchFamily="34" charset="0"/>
+                <a:ea typeface="Calibri" pitchFamily="34" charset="-122"/>
+                <a:cs typeface="Calibri" pitchFamily="34" charset="-120"/>
+              </a:rPr>
+              <a:t> </a:t>
+            </a:r>
+            <a:pPr indent="0" marL="0">
+              <a:buNone/>
+            </a:pPr>
+            <a:r>
+              <a:rPr lang="en-US" sz="1700" b="1" u="sng" dirty="0">
+                <a:solidFill>
+                  <a:srgbClr val="C7922C"/>
+                </a:solidFill>
+                <a:latin typeface="Calibri" pitchFamily="34" charset="0"/>
+                <a:ea typeface="Calibri" pitchFamily="34" charset="-122"/>
+                <a:cs typeface="Calibri" pitchFamily="34" charset="-120"/>
+              </a:rPr>
+              <a:t>them</a:t>
+            </a:r>
+            <a:pPr indent="0" marL="0">
+              <a:buNone/>
+            </a:pPr>
+            <a:r>
+              <a:rPr lang="en-US" sz="1700" dirty="0">
+                <a:solidFill>
+                  <a:srgbClr val="1E293B"/>
+                </a:solidFill>
+                <a:latin typeface="Calibri" pitchFamily="34" charset="0"/>
+                <a:ea typeface="Calibri" pitchFamily="34" charset="-122"/>
+                <a:cs typeface="Calibri" pitchFamily="34" charset="-120"/>
+              </a:rPr>
+              <a:t> </a:t>
+            </a:r>
+            <a:pPr indent="0" marL="0">
+              <a:buNone/>
+            </a:pPr>
+            <a:r>
+              <a:rPr lang="en-US" sz="1700" dirty="0">
+                <a:solidFill>
+                  <a:srgbClr val="1E293B"/>
+                </a:solidFill>
+                <a:latin typeface="Calibri" pitchFamily="34" charset="0"/>
+                <a:ea typeface="Calibri" pitchFamily="34" charset="-122"/>
+                <a:cs typeface="Calibri" pitchFamily="34" charset="-120"/>
+              </a:rPr>
+              <a:t>outlaws.</a:t>
+            </a:r>
+            <a:endParaRPr lang="en-US" sz="1700" dirty="0"/>
+          </a:p>
+        </p:txBody>
+      </p:sp>
+      <p:sp>
+        <p:nvSpPr>
+          <p:cNvPr id="12" name="Shape 10"/>
+          <p:cNvSpPr/>
+          <p:nvPr/>
+        </p:nvSpPr>
+        <p:spPr>
+          <a:xfrm>
+            <a:off x="365760" y="3008376"/>
+            <a:ext cx="8412480" cy="1837944"/>
+          </a:xfrm>
+          <a:prstGeom prst="roundRect">
+            <a:avLst>
+              <a:gd name="adj" fmla="val 4975"/>
+            </a:avLst>
+          </a:prstGeom>
+          <a:solidFill>
+            <a:srgbClr val="E8F8EF"/>
+          </a:solidFill>
+          <a:ln/>
+          <a:effectLst>
+            <a:outerShdw sx="100000" sy="100000" kx="0" ky="0" algn="bl" rotWithShape="0" blurRad="101600" dist="38100" dir="2700000">
+              <a:srgbClr val="000000">
+                <a:alpha val="12000"/>
+              </a:srgbClr>
+            </a:outerShdw>
+          </a:effectLst>
+        </p:spPr>
+      </p:sp>
+      <p:sp>
+        <p:nvSpPr>
+          <p:cNvPr id="13" name="Text 11"/>
+          <p:cNvSpPr/>
+          <p:nvPr/>
+        </p:nvSpPr>
+        <p:spPr>
+          <a:xfrm>
+            <a:off x="566928" y="3072384"/>
+            <a:ext cx="8229600" cy="237744"/>
+          </a:xfrm>
+          <a:prstGeom prst="rect">
+            <a:avLst/>
+          </a:prstGeom>
+          <a:noFill/>
+          <a:ln/>
+        </p:spPr>
+        <p:txBody>
+          <a:bodyPr wrap="square" lIns="0" tIns="0" rIns="0" bIns="0" rtlCol="0" anchor="ctr"/>
+          <a:lstStyle/>
+          <a:p>
+            <a:pPr indent="0" marL="0">
+              <a:buNone/>
+            </a:pPr>
+            <a:r>
+              <a:rPr lang="en-US" sz="1100" b="1" spc="100" kern="0" dirty="0">
+                <a:solidFill>
+                  <a:srgbClr val="34B76F"/>
+                </a:solidFill>
+                <a:latin typeface="Calibri" pitchFamily="34" charset="0"/>
+                <a:ea typeface="Calibri" pitchFamily="34" charset="-122"/>
+                <a:cs typeface="Calibri" pitchFamily="34" charset="-120"/>
+              </a:rPr>
+              <a:t>✅  THE PATTERN</a:t>
+            </a:r>
+            <a:endParaRPr lang="en-US" sz="1100" dirty="0"/>
+          </a:p>
+        </p:txBody>
+      </p:sp>
+      <p:sp>
+        <p:nvSpPr>
+          <p:cNvPr id="14" name="Text 12"/>
+          <p:cNvSpPr/>
+          <p:nvPr/>
+        </p:nvSpPr>
+        <p:spPr>
+          <a:xfrm>
+            <a:off x="566928" y="3328416"/>
+            <a:ext cx="8010144" cy="1380744"/>
+          </a:xfrm>
+          <a:prstGeom prst="rect">
+            <a:avLst/>
+          </a:prstGeom>
+          <a:noFill/>
+          <a:ln/>
+        </p:spPr>
+        <p:txBody>
+          <a:bodyPr wrap="square" lIns="0" tIns="0" rIns="0" bIns="0" rtlCol="0" anchor="t">
+            <a:normAutofit/>
+          </a:bodyPr>
+          <a:lstStyle/>
+          <a:p>
+            <a:pPr indent="0" marL="0">
+              <a:buNone/>
+            </a:pPr>
+            <a:r>
+              <a:rPr lang="en-US" sz="1300" dirty="0">
+                <a:solidFill>
+                  <a:srgbClr val="1E293B"/>
+                </a:solidFill>
+                <a:latin typeface="Calibri" pitchFamily="34" charset="0"/>
+                <a:ea typeface="Calibri" pitchFamily="34" charset="-122"/>
+                <a:cs typeface="Calibri" pitchFamily="34" charset="-120"/>
+              </a:rPr>
+              <a:t>A subject pronoun does the action: I, he, she, it, we, they. An object pronoun receives it: me, him, her, it, us, them. Say the sentence aloud — your ear will usually catch the wrong one.</a:t>
+            </a:r>
+            <a:endParaRPr lang="en-US" sz="1300" dirty="0"/>
+          </a:p>
+          <a:p>
+            <a:pPr indent="0" marL="0">
+              <a:buNone/>
+            </a:pPr>
+            <a:r>
+              <a:rPr lang="en-US" sz="1300" dirty="0">
+                <a:solidFill>
+                  <a:srgbClr val="1E293B"/>
+                </a:solidFill>
+                <a:latin typeface="Calibri" pitchFamily="34" charset="0"/>
+                <a:ea typeface="Calibri" pitchFamily="34" charset="-122"/>
+                <a:cs typeface="Calibri" pitchFamily="34" charset="-120"/>
+              </a:rPr>
+              <a:t>she is the subject doing the knowing; it is the object being known.</a:t>
+            </a:r>
+            <a:endParaRPr lang="en-US" sz="1300" dirty="0"/>
+          </a:p>
+          <a:p>
+            <a:pPr indent="0" marL="0">
+              <a:buNone/>
+            </a:pPr>
+            <a:r>
+              <a:rPr lang="en-US" sz="1300" dirty="0">
+                <a:solidFill>
+                  <a:srgbClr val="1E293B"/>
+                </a:solidFill>
+                <a:latin typeface="Calibri" pitchFamily="34" charset="0"/>
+                <a:ea typeface="Calibri" pitchFamily="34" charset="-122"/>
+                <a:cs typeface="Calibri" pitchFamily="34" charset="-120"/>
+              </a:rPr>
+              <a:t>He (King Phillip) is the subject doing the declaring; them (the rats) is the object receiving it. Swap them — Them declared he outlaws — and your ear rejects it at once.</a:t>
+            </a:r>
+            <a:endParaRPr lang="en-US" sz="1300" dirty="0"/>
+          </a:p>
+          <a:p>
+            <a:pPr indent="0" marL="0">
+              <a:buNone/>
+            </a:pPr>
+            <a:r>
+              <a:rPr lang="en-US" sz="1300" dirty="0">
+                <a:solidFill>
+                  <a:srgbClr val="1E293B"/>
+                </a:solidFill>
+                <a:latin typeface="Calibri" pitchFamily="34" charset="0"/>
+                <a:ea typeface="Calibri" pitchFamily="34" charset="-122"/>
+                <a:cs typeface="Calibri" pitchFamily="34" charset="-120"/>
+              </a:rPr>
+              <a:t>The word his in the first sentence is a different kind of pronoun. It shows whose revenge, so it is not in either group this week.</a:t>
+            </a:r>
+            <a:endParaRPr lang="en-US" sz="1300" dirty="0"/>
           </a:p>
         </p:txBody>
       </p:sp>
@@ -4117,7 +5737,7 @@
             <a:avLst/>
           </a:prstGeom>
           <a:solidFill>
-            <a:srgbClr val="0E1C42"/>
+            <a:srgbClr val="C7922C"/>
           </a:solidFill>
           <a:ln/>
         </p:spPr>
@@ -4155,7 +5775,7 @@
                 <a:ea typeface="Calibri" pitchFamily="34" charset="-122"/>
                 <a:cs typeface="Calibri" pitchFamily="34" charset="-120"/>
               </a:rPr>
-              <a:t>🔠  Spelling</a:t>
+              <a:t>✏️  Grammar — Your turn</a:t>
             </a:r>
             <a:endParaRPr lang="en-US" sz="2200" dirty="0"/>
           </a:p>
@@ -4169,7 +5789,7 @@
         </p:nvSpPr>
         <p:spPr>
           <a:xfrm>
-            <a:off x="365760" y="777240"/>
+            <a:off x="365760" y="749808"/>
             <a:ext cx="8229600" cy="237744"/>
           </a:xfrm>
           <a:prstGeom prst="rect">
@@ -4188,13 +5808,13 @@
             <a:r>
               <a:rPr lang="en-US" sz="1100" b="1" spc="100" kern="0" dirty="0">
                 <a:solidFill>
-                  <a:srgbClr val="0E1C42"/>
-                </a:solidFill>
-                <a:latin typeface="Calibri" pitchFamily="34" charset="0"/>
-                <a:ea typeface="Calibri" pitchFamily="34" charset="-122"/>
-                <a:cs typeface="Calibri" pitchFamily="34" charset="-120"/>
-              </a:rPr>
-              <a:t>CHANGING Y TO I</a:t>
+                  <a:srgbClr val="C7922C"/>
+                </a:solidFill>
+                <a:latin typeface="Calibri" pitchFamily="34" charset="0"/>
+                <a:ea typeface="Calibri" pitchFamily="34" charset="-122"/>
+                <a:cs typeface="Calibri" pitchFamily="34" charset="-120"/>
+              </a:rPr>
+              <a:t>SUBJECT AND OBJECT PRONOUNS</a:t>
             </a:r>
             <a:endParaRPr lang="en-US" sz="1100" dirty="0"/>
           </a:p>
@@ -4208,79 +5828,23 @@
         </p:nvSpPr>
         <p:spPr>
           <a:xfrm>
-            <a:off x="411480" y="1078992"/>
-            <a:ext cx="4114800" cy="457200"/>
+            <a:off x="365760" y="1051560"/>
+            <a:ext cx="8412480" cy="914400"/>
           </a:xfrm>
           <a:prstGeom prst="roundRect">
             <a:avLst>
-              <a:gd name="adj" fmla="val 16000"/>
-            </a:avLst>
-          </a:prstGeom>
-          <a:solidFill>
-            <a:srgbClr val="0E1C42"/>
-          </a:solidFill>
-          <a:ln/>
-        </p:spPr>
-      </p:sp>
-      <p:sp>
-        <p:nvSpPr>
-          <p:cNvPr id="6" name="Text 4"/>
-          <p:cNvSpPr/>
-          <p:nvPr/>
-        </p:nvSpPr>
-        <p:spPr>
-          <a:xfrm>
-            <a:off x="457200" y="1133856"/>
-            <a:ext cx="4023360" cy="347472"/>
-          </a:xfrm>
-          <a:prstGeom prst="rect">
-            <a:avLst/>
-          </a:prstGeom>
-          <a:noFill/>
-          <a:ln/>
-        </p:spPr>
-        <p:txBody>
-          <a:bodyPr wrap="square" lIns="0" tIns="0" rIns="0" bIns="0" rtlCol="0" anchor="ctr"/>
-          <a:lstStyle/>
-          <a:p>
-            <a:pPr algn="ctr" indent="0" marL="0">
-              <a:buNone/>
-            </a:pPr>
-            <a:r>
-              <a:rPr lang="en-US" sz="1300" b="1" dirty="0">
-                <a:solidFill>
-                  <a:srgbClr val="FFFFFF"/>
-                </a:solidFill>
-                <a:latin typeface="Calibri" pitchFamily="34" charset="0"/>
-                <a:ea typeface="Calibri" pitchFamily="34" charset="-122"/>
-                <a:cs typeface="Calibri" pitchFamily="34" charset="-120"/>
-              </a:rPr>
-              <a:t>y became i</a:t>
-            </a:r>
-            <a:endParaRPr lang="en-US" sz="1300" dirty="0"/>
-          </a:p>
-        </p:txBody>
-      </p:sp>
-      <p:sp>
-        <p:nvSpPr>
-          <p:cNvPr id="7" name="Shape 5"/>
-          <p:cNvSpPr/>
-          <p:nvPr/>
-        </p:nvSpPr>
-        <p:spPr>
-          <a:xfrm>
-            <a:off x="411480" y="1591056"/>
-            <a:ext cx="4114800" cy="2103120"/>
-          </a:xfrm>
-          <a:prstGeom prst="roundRect">
-            <a:avLst>
-              <a:gd name="adj" fmla="val 4348"/>
+              <a:gd name="adj" fmla="val 10000"/>
             </a:avLst>
           </a:prstGeom>
           <a:solidFill>
             <a:srgbClr val="FFFFFF"/>
           </a:solidFill>
-          <a:ln/>
+          <a:ln w="19050">
+            <a:solidFill>
+              <a:srgbClr val="C7922C"/>
+            </a:solidFill>
+            <a:prstDash val="solid"/>
+          </a:ln>
           <a:effectLst>
             <a:outerShdw sx="100000" sy="100000" kx="0" ky="0" algn="bl" rotWithShape="0" blurRad="101600" dist="38100" dir="2700000">
               <a:srgbClr val="000000">
@@ -4292,14 +5856,14 @@
       </p:sp>
       <p:sp>
         <p:nvSpPr>
-          <p:cNvPr id="8" name="Text 6"/>
-          <p:cNvSpPr/>
-          <p:nvPr/>
-        </p:nvSpPr>
-        <p:spPr>
-          <a:xfrm>
-            <a:off x="502920" y="1700784"/>
-            <a:ext cx="3931920" cy="1883664"/>
+          <p:cNvPr id="6" name="Text 4"/>
+          <p:cNvSpPr/>
+          <p:nvPr/>
+        </p:nvSpPr>
+        <p:spPr>
+          <a:xfrm>
+            <a:off x="594360" y="1179576"/>
+            <a:ext cx="7955280" cy="658368"/>
           </a:xfrm>
           <a:prstGeom prst="rect">
             <a:avLst/>
@@ -4311,107 +5875,34 @@
           <a:bodyPr wrap="square" lIns="0" tIns="0" rIns="0" bIns="0" rtlCol="0" anchor="ctr"/>
           <a:lstStyle/>
           <a:p>
-            <a:pPr algn="ctr" indent="0" marL="0">
-              <a:buNone/>
-            </a:pPr>
-            <a:r>
-              <a:rPr lang="en-US" sz="1400" dirty="0">
-                <a:solidFill>
-                  <a:srgbClr val="1E293B"/>
-                </a:solidFill>
-                <a:latin typeface="Calibri" pitchFamily="34" charset="0"/>
-                <a:ea typeface="Calibri" pitchFamily="34" charset="-122"/>
-                <a:cs typeface="Calibri" pitchFamily="34" charset="-120"/>
-              </a:rPr>
-              <a:t>hurried</a:t>
-            </a:r>
-            <a:endParaRPr lang="en-US" sz="1400" dirty="0"/>
-          </a:p>
-          <a:p>
-            <a:pPr algn="ctr" indent="0" marL="0">
-              <a:buNone/>
-            </a:pPr>
-            <a:r>
-              <a:rPr lang="en-US" sz="1400" dirty="0">
-                <a:solidFill>
-                  <a:srgbClr val="1E293B"/>
-                </a:solidFill>
-                <a:latin typeface="Calibri" pitchFamily="34" charset="0"/>
-                <a:ea typeface="Calibri" pitchFamily="34" charset="-122"/>
-                <a:cs typeface="Calibri" pitchFamily="34" charset="-120"/>
-              </a:rPr>
-              <a:t>cried</a:t>
-            </a:r>
-            <a:endParaRPr lang="en-US" sz="1400" dirty="0"/>
-          </a:p>
-          <a:p>
-            <a:pPr algn="ctr" indent="0" marL="0">
-              <a:buNone/>
-            </a:pPr>
-            <a:r>
-              <a:rPr lang="en-US" sz="1400" dirty="0">
-                <a:solidFill>
-                  <a:srgbClr val="1E293B"/>
-                </a:solidFill>
-                <a:latin typeface="Calibri" pitchFamily="34" charset="0"/>
-                <a:ea typeface="Calibri" pitchFamily="34" charset="-122"/>
-                <a:cs typeface="Calibri" pitchFamily="34" charset="-120"/>
-              </a:rPr>
-              <a:t>carried</a:t>
-            </a:r>
-            <a:endParaRPr lang="en-US" sz="1400" dirty="0"/>
-          </a:p>
-          <a:p>
-            <a:pPr algn="ctr" indent="0" marL="0">
-              <a:buNone/>
-            </a:pPr>
-            <a:r>
-              <a:rPr lang="en-US" sz="1400" dirty="0">
-                <a:solidFill>
-                  <a:srgbClr val="1E293B"/>
-                </a:solidFill>
-                <a:latin typeface="Calibri" pitchFamily="34" charset="0"/>
-                <a:ea typeface="Calibri" pitchFamily="34" charset="-122"/>
-                <a:cs typeface="Calibri" pitchFamily="34" charset="-120"/>
-              </a:rPr>
-              <a:t>emptied</a:t>
-            </a:r>
-            <a:endParaRPr lang="en-US" sz="1400" dirty="0"/>
-          </a:p>
-        </p:txBody>
-      </p:sp>
-      <p:sp>
-        <p:nvSpPr>
-          <p:cNvPr id="9" name="Shape 7"/>
-          <p:cNvSpPr/>
-          <p:nvPr/>
-        </p:nvSpPr>
-        <p:spPr>
-          <a:xfrm>
-            <a:off x="4617720" y="1078992"/>
-            <a:ext cx="4114800" cy="457200"/>
-          </a:xfrm>
-          <a:prstGeom prst="roundRect">
-            <a:avLst>
-              <a:gd name="adj" fmla="val 16000"/>
-            </a:avLst>
-          </a:prstGeom>
-          <a:solidFill>
-            <a:srgbClr val="0E1C42"/>
-          </a:solidFill>
-          <a:ln/>
-        </p:spPr>
-      </p:sp>
-      <p:sp>
-        <p:nvSpPr>
-          <p:cNvPr id="10" name="Text 8"/>
-          <p:cNvSpPr/>
-          <p:nvPr/>
-        </p:nvSpPr>
-        <p:spPr>
-          <a:xfrm>
-            <a:off x="4663440" y="1133856"/>
-            <a:ext cx="4023360" cy="347472"/>
+            <a:pPr indent="0" marL="0">
+              <a:buNone/>
+            </a:pPr>
+            <a:r>
+              <a:rPr lang="en-US" sz="1700" dirty="0">
+                <a:solidFill>
+                  <a:srgbClr val="0E1C42"/>
+                </a:solidFill>
+                <a:latin typeface="Calibri" pitchFamily="34" charset="0"/>
+                <a:ea typeface="Calibri" pitchFamily="34" charset="-122"/>
+                <a:cs typeface="Calibri" pitchFamily="34" charset="-120"/>
+              </a:rPr>
+              <a:t>I    ·    they    ·    her    ·    he    ·    me    ·    them    ·    she    ·    him</a:t>
+            </a:r>
+            <a:endParaRPr lang="en-US" sz="1700" dirty="0"/>
+          </a:p>
+        </p:txBody>
+      </p:sp>
+      <p:sp>
+        <p:nvSpPr>
+          <p:cNvPr id="7" name="Text 5"/>
+          <p:cNvSpPr/>
+          <p:nvPr/>
+        </p:nvSpPr>
+        <p:spPr>
+          <a:xfrm>
+            <a:off x="365760" y="2148840"/>
+            <a:ext cx="8412480" cy="731520"/>
           </a:xfrm>
           <a:prstGeom prst="rect">
             <a:avLst/>
@@ -4423,140 +5914,21 @@
           <a:bodyPr wrap="square" lIns="0" tIns="0" rIns="0" bIns="0" rtlCol="0" anchor="ctr"/>
           <a:lstStyle/>
           <a:p>
-            <a:pPr algn="ctr" indent="0" marL="0">
-              <a:buNone/>
-            </a:pPr>
-            <a:r>
-              <a:rPr lang="en-US" sz="1300" b="1" dirty="0">
-                <a:solidFill>
-                  <a:srgbClr val="FFFFFF"/>
-                </a:solidFill>
-                <a:latin typeface="Calibri" pitchFamily="34" charset="0"/>
-                <a:ea typeface="Calibri" pitchFamily="34" charset="-122"/>
-                <a:cs typeface="Calibri" pitchFamily="34" charset="-120"/>
-              </a:rPr>
-              <a:t>y stayed y</a:t>
-            </a:r>
-            <a:endParaRPr lang="en-US" sz="1300" dirty="0"/>
-          </a:p>
-        </p:txBody>
-      </p:sp>
-      <p:sp>
-        <p:nvSpPr>
-          <p:cNvPr id="11" name="Shape 9"/>
-          <p:cNvSpPr/>
-          <p:nvPr/>
-        </p:nvSpPr>
-        <p:spPr>
-          <a:xfrm>
-            <a:off x="4617720" y="1591056"/>
-            <a:ext cx="4114800" cy="2103120"/>
-          </a:xfrm>
-          <a:prstGeom prst="roundRect">
-            <a:avLst>
-              <a:gd name="adj" fmla="val 4348"/>
-            </a:avLst>
-          </a:prstGeom>
-          <a:solidFill>
-            <a:srgbClr val="FFFFFF"/>
-          </a:solidFill>
-          <a:ln/>
-          <a:effectLst>
-            <a:outerShdw sx="100000" sy="100000" kx="0" ky="0" algn="bl" rotWithShape="0" blurRad="101600" dist="38100" dir="2700000">
-              <a:srgbClr val="000000">
-                <a:alpha val="12000"/>
-              </a:srgbClr>
-            </a:outerShdw>
-          </a:effectLst>
-        </p:spPr>
-      </p:sp>
-      <p:sp>
-        <p:nvSpPr>
-          <p:cNvPr id="12" name="Text 10"/>
-          <p:cNvSpPr/>
-          <p:nvPr/>
-        </p:nvSpPr>
-        <p:spPr>
-          <a:xfrm>
-            <a:off x="4709160" y="1700784"/>
-            <a:ext cx="3931920" cy="1883664"/>
-          </a:xfrm>
-          <a:prstGeom prst="rect">
-            <a:avLst/>
-          </a:prstGeom>
-          <a:noFill/>
-          <a:ln/>
-        </p:spPr>
-        <p:txBody>
-          <a:bodyPr wrap="square" lIns="0" tIns="0" rIns="0" bIns="0" rtlCol="0" anchor="ctr"/>
-          <a:lstStyle/>
-          <a:p>
-            <a:pPr algn="ctr" indent="0" marL="0">
-              <a:buNone/>
-            </a:pPr>
-            <a:r>
-              <a:rPr lang="en-US" sz="1400" dirty="0">
-                <a:solidFill>
-                  <a:srgbClr val="1E293B"/>
-                </a:solidFill>
-                <a:latin typeface="Calibri" pitchFamily="34" charset="0"/>
-                <a:ea typeface="Calibri" pitchFamily="34" charset="-122"/>
-                <a:cs typeface="Calibri" pitchFamily="34" charset="-120"/>
-              </a:rPr>
-              <a:t>played</a:t>
-            </a:r>
-            <a:endParaRPr lang="en-US" sz="1400" dirty="0"/>
-          </a:p>
-          <a:p>
-            <a:pPr algn="ctr" indent="0" marL="0">
-              <a:buNone/>
-            </a:pPr>
-            <a:r>
-              <a:rPr lang="en-US" sz="1400" dirty="0">
-                <a:solidFill>
-                  <a:srgbClr val="1E293B"/>
-                </a:solidFill>
-                <a:latin typeface="Calibri" pitchFamily="34" charset="0"/>
-                <a:ea typeface="Calibri" pitchFamily="34" charset="-122"/>
-                <a:cs typeface="Calibri" pitchFamily="34" charset="-120"/>
-              </a:rPr>
-              <a:t>stayed</a:t>
-            </a:r>
-            <a:endParaRPr lang="en-US" sz="1400" dirty="0"/>
-          </a:p>
-          <a:p>
-            <a:pPr algn="ctr" indent="0" marL="0">
-              <a:buNone/>
-            </a:pPr>
-            <a:r>
-              <a:rPr lang="en-US" sz="1400" dirty="0">
-                <a:solidFill>
-                  <a:srgbClr val="1E293B"/>
-                </a:solidFill>
-                <a:latin typeface="Calibri" pitchFamily="34" charset="0"/>
-                <a:ea typeface="Calibri" pitchFamily="34" charset="-122"/>
-                <a:cs typeface="Calibri" pitchFamily="34" charset="-120"/>
-              </a:rPr>
-              <a:t>obeyed</a:t>
-            </a:r>
-            <a:endParaRPr lang="en-US" sz="1400" dirty="0"/>
-          </a:p>
-          <a:p>
-            <a:pPr algn="ctr" indent="0" marL="0">
-              <a:buNone/>
-            </a:pPr>
-            <a:r>
-              <a:rPr lang="en-US" sz="1400" dirty="0">
-                <a:solidFill>
-                  <a:srgbClr val="1E293B"/>
-                </a:solidFill>
-                <a:latin typeface="Calibri" pitchFamily="34" charset="0"/>
-                <a:ea typeface="Calibri" pitchFamily="34" charset="-122"/>
-                <a:cs typeface="Calibri" pitchFamily="34" charset="-120"/>
-              </a:rPr>
-              <a:t>enjoyed</a:t>
-            </a:r>
-            <a:endParaRPr lang="en-US" sz="1400" dirty="0"/>
+            <a:pPr indent="0" marL="0">
+              <a:buNone/>
+            </a:pPr>
+            <a:r>
+              <a:rPr lang="en-US" sz="1500" i="1" dirty="0">
+                <a:solidFill>
+                  <a:srgbClr val="64748B"/>
+                </a:solidFill>
+                <a:latin typeface="Calibri" pitchFamily="34" charset="0"/>
+                <a:ea typeface="Calibri" pitchFamily="34" charset="-122"/>
+                <a:cs typeface="Calibri" pitchFamily="34" charset="-120"/>
+              </a:rPr>
+              <a:t>Your turn. Sort these eight into the two columns. The columns are blank on purpose — sort first, then work out what the split is.</a:t>
+            </a:r>
+            <a:endParaRPr lang="en-US" sz="1500" dirty="0"/>
           </a:p>
         </p:txBody>
       </p:sp>
@@ -4571,6 +5943,1418 @@
 <file path=ppt/slides/slide15.xml><?xml version="1.0" encoding="utf-8"?>
 <p:sld xmlns:a="http://schemas.openxmlformats.org/drawingml/2006/main" xmlns:r="http://schemas.openxmlformats.org/officeDocument/2006/relationships" xmlns:p="http://schemas.openxmlformats.org/presentationml/2006/main">
   <p:cSld name="Slide 15">
+    <p:bg>
+      <p:bgPr>
+        <a:solidFill>
+          <a:srgbClr val="F8FAFC"/>
+        </a:solidFill>
+      </p:bgPr>
+    </p:bg>
+    <p:spTree>
+      <p:nvGrpSpPr>
+        <p:cNvPr id="1" name=""/>
+        <p:cNvGrpSpPr/>
+        <p:nvPr/>
+      </p:nvGrpSpPr>
+      <p:grpSpPr>
+        <a:xfrm>
+          <a:off x="0" y="0"/>
+          <a:ext cx="0" cy="0"/>
+          <a:chOff x="0" y="0"/>
+          <a:chExt cx="0" cy="0"/>
+        </a:xfrm>
+      </p:grpSpPr>
+      <p:sp>
+        <p:nvSpPr>
+          <p:cNvPr id="2" name="Shape 0"/>
+          <p:cNvSpPr/>
+          <p:nvPr/>
+        </p:nvSpPr>
+        <p:spPr>
+          <a:xfrm>
+            <a:off x="0" y="0"/>
+            <a:ext cx="9144000" cy="566928"/>
+          </a:xfrm>
+          <a:prstGeom prst="rect">
+            <a:avLst/>
+          </a:prstGeom>
+          <a:solidFill>
+            <a:srgbClr val="C7922C"/>
+          </a:solidFill>
+          <a:ln/>
+        </p:spPr>
+      </p:sp>
+      <p:sp>
+        <p:nvSpPr>
+          <p:cNvPr id="3" name="Text 1"/>
+          <p:cNvSpPr/>
+          <p:nvPr/>
+        </p:nvSpPr>
+        <p:spPr>
+          <a:xfrm>
+            <a:off x="365760" y="54864"/>
+            <a:ext cx="8412480" cy="457200"/>
+          </a:xfrm>
+          <a:prstGeom prst="rect">
+            <a:avLst/>
+          </a:prstGeom>
+          <a:noFill/>
+          <a:ln/>
+        </p:spPr>
+        <p:txBody>
+          <a:bodyPr wrap="square" lIns="0" tIns="0" rIns="0" bIns="0" rtlCol="0" anchor="ctr"/>
+          <a:lstStyle/>
+          <a:p>
+            <a:pPr indent="0" marL="0">
+              <a:buNone/>
+            </a:pPr>
+            <a:r>
+              <a:rPr lang="en-US" sz="2200" b="1" dirty="0">
+                <a:solidFill>
+                  <a:srgbClr val="FFFFFF"/>
+                </a:solidFill>
+                <a:latin typeface="Calibri" pitchFamily="34" charset="0"/>
+                <a:ea typeface="Calibri" pitchFamily="34" charset="-122"/>
+                <a:cs typeface="Calibri" pitchFamily="34" charset="-120"/>
+              </a:rPr>
+              <a:t>✏️  Grammar — Your turn</a:t>
+            </a:r>
+            <a:endParaRPr lang="en-US" sz="2200" dirty="0"/>
+          </a:p>
+        </p:txBody>
+      </p:sp>
+      <p:sp>
+        <p:nvSpPr>
+          <p:cNvPr id="4" name="Text 2"/>
+          <p:cNvSpPr/>
+          <p:nvPr/>
+        </p:nvSpPr>
+        <p:spPr>
+          <a:xfrm>
+            <a:off x="365760" y="749808"/>
+            <a:ext cx="8229600" cy="237744"/>
+          </a:xfrm>
+          <a:prstGeom prst="rect">
+            <a:avLst/>
+          </a:prstGeom>
+          <a:noFill/>
+          <a:ln/>
+        </p:spPr>
+        <p:txBody>
+          <a:bodyPr wrap="square" lIns="0" tIns="0" rIns="0" bIns="0" rtlCol="0" anchor="ctr"/>
+          <a:lstStyle/>
+          <a:p>
+            <a:pPr indent="0" marL="0">
+              <a:buNone/>
+            </a:pPr>
+            <a:r>
+              <a:rPr lang="en-US" sz="1100" b="1" spc="100" kern="0" dirty="0">
+                <a:solidFill>
+                  <a:srgbClr val="C7922C"/>
+                </a:solidFill>
+                <a:latin typeface="Calibri" pitchFamily="34" charset="0"/>
+                <a:ea typeface="Calibri" pitchFamily="34" charset="-122"/>
+                <a:cs typeface="Calibri" pitchFamily="34" charset="-120"/>
+              </a:rPr>
+              <a:t>SUBJECT AND OBJECT PRONOUNS</a:t>
+            </a:r>
+            <a:endParaRPr lang="en-US" sz="1100" dirty="0"/>
+          </a:p>
+        </p:txBody>
+      </p:sp>
+      <p:sp>
+        <p:nvSpPr>
+          <p:cNvPr id="5" name="Shape 3"/>
+          <p:cNvSpPr/>
+          <p:nvPr/>
+        </p:nvSpPr>
+        <p:spPr>
+          <a:xfrm>
+            <a:off x="411480" y="1051560"/>
+            <a:ext cx="4114800" cy="457200"/>
+          </a:xfrm>
+          <a:prstGeom prst="roundRect">
+            <a:avLst>
+              <a:gd name="adj" fmla="val 16000"/>
+            </a:avLst>
+          </a:prstGeom>
+          <a:solidFill>
+            <a:srgbClr val="C7922C"/>
+          </a:solidFill>
+          <a:ln/>
+        </p:spPr>
+      </p:sp>
+      <p:sp>
+        <p:nvSpPr>
+          <p:cNvPr id="6" name="Text 4"/>
+          <p:cNvSpPr/>
+          <p:nvPr/>
+        </p:nvSpPr>
+        <p:spPr>
+          <a:xfrm>
+            <a:off x="457200" y="1106424"/>
+            <a:ext cx="4023360" cy="347472"/>
+          </a:xfrm>
+          <a:prstGeom prst="rect">
+            <a:avLst/>
+          </a:prstGeom>
+          <a:noFill/>
+          <a:ln/>
+        </p:spPr>
+        <p:txBody>
+          <a:bodyPr wrap="square" lIns="0" tIns="0" rIns="0" bIns="0" rtlCol="0" anchor="ctr"/>
+          <a:lstStyle/>
+          <a:p>
+            <a:pPr algn="ctr" indent="0" marL="0">
+              <a:buNone/>
+            </a:pPr>
+            <a:r>
+              <a:rPr lang="en-US" sz="1400" b="1" dirty="0">
+                <a:solidFill>
+                  <a:srgbClr val="FFFFFF"/>
+                </a:solidFill>
+                <a:latin typeface="Calibri" pitchFamily="34" charset="0"/>
+                <a:ea typeface="Calibri" pitchFamily="34" charset="-122"/>
+                <a:cs typeface="Calibri" pitchFamily="34" charset="-120"/>
+              </a:rPr>
+              <a:t>Group 1</a:t>
+            </a:r>
+            <a:endParaRPr lang="en-US" sz="1400" dirty="0"/>
+          </a:p>
+        </p:txBody>
+      </p:sp>
+      <p:sp>
+        <p:nvSpPr>
+          <p:cNvPr id="7" name="Shape 5"/>
+          <p:cNvSpPr/>
+          <p:nvPr/>
+        </p:nvSpPr>
+        <p:spPr>
+          <a:xfrm>
+            <a:off x="411480" y="1572768"/>
+            <a:ext cx="4114800" cy="2011680"/>
+          </a:xfrm>
+          <a:prstGeom prst="roundRect">
+            <a:avLst>
+              <a:gd name="adj" fmla="val 4545"/>
+            </a:avLst>
+          </a:prstGeom>
+          <a:solidFill>
+            <a:srgbClr val="FFFFFF"/>
+          </a:solidFill>
+          <a:ln/>
+          <a:effectLst>
+            <a:outerShdw sx="100000" sy="100000" kx="0" ky="0" algn="bl" rotWithShape="0" blurRad="101600" dist="38100" dir="2700000">
+              <a:srgbClr val="000000">
+                <a:alpha val="12000"/>
+              </a:srgbClr>
+            </a:outerShdw>
+          </a:effectLst>
+        </p:spPr>
+      </p:sp>
+      <p:sp>
+        <p:nvSpPr>
+          <p:cNvPr id="8" name="Text 6"/>
+          <p:cNvSpPr/>
+          <p:nvPr/>
+        </p:nvSpPr>
+        <p:spPr>
+          <a:xfrm>
+            <a:off x="502920" y="1664208"/>
+            <a:ext cx="3931920" cy="1828800"/>
+          </a:xfrm>
+          <a:prstGeom prst="rect">
+            <a:avLst/>
+          </a:prstGeom>
+          <a:noFill/>
+          <a:ln/>
+        </p:spPr>
+        <p:txBody>
+          <a:bodyPr wrap="square" lIns="0" tIns="0" rIns="0" bIns="0" rtlCol="0" anchor="ctr"/>
+          <a:lstStyle/>
+          <a:p>
+            <a:pPr algn="ctr" indent="0" marL="0">
+              <a:buNone/>
+            </a:pPr>
+            <a:r>
+              <a:rPr lang="en-US" sz="1600" dirty="0">
+                <a:solidFill>
+                  <a:srgbClr val="1E293B"/>
+                </a:solidFill>
+                <a:latin typeface="Calibri" pitchFamily="34" charset="0"/>
+                <a:ea typeface="Calibri" pitchFamily="34" charset="-122"/>
+                <a:cs typeface="Calibri" pitchFamily="34" charset="-120"/>
+              </a:rPr>
+              <a:t>I</a:t>
+            </a:r>
+            <a:endParaRPr lang="en-US" sz="1600" dirty="0"/>
+          </a:p>
+          <a:p>
+            <a:pPr algn="ctr" indent="0" marL="0">
+              <a:buNone/>
+            </a:pPr>
+            <a:r>
+              <a:rPr lang="en-US" sz="1600" dirty="0">
+                <a:solidFill>
+                  <a:srgbClr val="1E293B"/>
+                </a:solidFill>
+                <a:latin typeface="Calibri" pitchFamily="34" charset="0"/>
+                <a:ea typeface="Calibri" pitchFamily="34" charset="-122"/>
+                <a:cs typeface="Calibri" pitchFamily="34" charset="-120"/>
+              </a:rPr>
+              <a:t>he</a:t>
+            </a:r>
+            <a:endParaRPr lang="en-US" sz="1600" dirty="0"/>
+          </a:p>
+          <a:p>
+            <a:pPr algn="ctr" indent="0" marL="0">
+              <a:buNone/>
+            </a:pPr>
+            <a:r>
+              <a:rPr lang="en-US" sz="1600" dirty="0">
+                <a:solidFill>
+                  <a:srgbClr val="1E293B"/>
+                </a:solidFill>
+                <a:latin typeface="Calibri" pitchFamily="34" charset="0"/>
+                <a:ea typeface="Calibri" pitchFamily="34" charset="-122"/>
+                <a:cs typeface="Calibri" pitchFamily="34" charset="-120"/>
+              </a:rPr>
+              <a:t>she</a:t>
+            </a:r>
+            <a:endParaRPr lang="en-US" sz="1600" dirty="0"/>
+          </a:p>
+          <a:p>
+            <a:pPr algn="ctr" indent="0" marL="0">
+              <a:buNone/>
+            </a:pPr>
+            <a:r>
+              <a:rPr lang="en-US" sz="1600" dirty="0">
+                <a:solidFill>
+                  <a:srgbClr val="1E293B"/>
+                </a:solidFill>
+                <a:latin typeface="Calibri" pitchFamily="34" charset="0"/>
+                <a:ea typeface="Calibri" pitchFamily="34" charset="-122"/>
+                <a:cs typeface="Calibri" pitchFamily="34" charset="-120"/>
+              </a:rPr>
+              <a:t>they</a:t>
+            </a:r>
+            <a:endParaRPr lang="en-US" sz="1600" dirty="0"/>
+          </a:p>
+        </p:txBody>
+      </p:sp>
+      <p:sp>
+        <p:nvSpPr>
+          <p:cNvPr id="9" name="Shape 7"/>
+          <p:cNvSpPr/>
+          <p:nvPr/>
+        </p:nvSpPr>
+        <p:spPr>
+          <a:xfrm>
+            <a:off x="4617720" y="1051560"/>
+            <a:ext cx="4114800" cy="457200"/>
+          </a:xfrm>
+          <a:prstGeom prst="roundRect">
+            <a:avLst>
+              <a:gd name="adj" fmla="val 16000"/>
+            </a:avLst>
+          </a:prstGeom>
+          <a:solidFill>
+            <a:srgbClr val="C7922C"/>
+          </a:solidFill>
+          <a:ln/>
+        </p:spPr>
+      </p:sp>
+      <p:sp>
+        <p:nvSpPr>
+          <p:cNvPr id="10" name="Text 8"/>
+          <p:cNvSpPr/>
+          <p:nvPr/>
+        </p:nvSpPr>
+        <p:spPr>
+          <a:xfrm>
+            <a:off x="4663440" y="1106424"/>
+            <a:ext cx="4023360" cy="347472"/>
+          </a:xfrm>
+          <a:prstGeom prst="rect">
+            <a:avLst/>
+          </a:prstGeom>
+          <a:noFill/>
+          <a:ln/>
+        </p:spPr>
+        <p:txBody>
+          <a:bodyPr wrap="square" lIns="0" tIns="0" rIns="0" bIns="0" rtlCol="0" anchor="ctr"/>
+          <a:lstStyle/>
+          <a:p>
+            <a:pPr algn="ctr" indent="0" marL="0">
+              <a:buNone/>
+            </a:pPr>
+            <a:r>
+              <a:rPr lang="en-US" sz="1400" b="1" dirty="0">
+                <a:solidFill>
+                  <a:srgbClr val="FFFFFF"/>
+                </a:solidFill>
+                <a:latin typeface="Calibri" pitchFamily="34" charset="0"/>
+                <a:ea typeface="Calibri" pitchFamily="34" charset="-122"/>
+                <a:cs typeface="Calibri" pitchFamily="34" charset="-120"/>
+              </a:rPr>
+              <a:t>Group 2</a:t>
+            </a:r>
+            <a:endParaRPr lang="en-US" sz="1400" dirty="0"/>
+          </a:p>
+        </p:txBody>
+      </p:sp>
+      <p:sp>
+        <p:nvSpPr>
+          <p:cNvPr id="11" name="Shape 9"/>
+          <p:cNvSpPr/>
+          <p:nvPr/>
+        </p:nvSpPr>
+        <p:spPr>
+          <a:xfrm>
+            <a:off x="4617720" y="1572768"/>
+            <a:ext cx="4114800" cy="2011680"/>
+          </a:xfrm>
+          <a:prstGeom prst="roundRect">
+            <a:avLst>
+              <a:gd name="adj" fmla="val 4545"/>
+            </a:avLst>
+          </a:prstGeom>
+          <a:solidFill>
+            <a:srgbClr val="FFFFFF"/>
+          </a:solidFill>
+          <a:ln/>
+          <a:effectLst>
+            <a:outerShdw sx="100000" sy="100000" kx="0" ky="0" algn="bl" rotWithShape="0" blurRad="101600" dist="38100" dir="2700000">
+              <a:srgbClr val="000000">
+                <a:alpha val="12000"/>
+              </a:srgbClr>
+            </a:outerShdw>
+          </a:effectLst>
+        </p:spPr>
+      </p:sp>
+      <p:sp>
+        <p:nvSpPr>
+          <p:cNvPr id="12" name="Text 10"/>
+          <p:cNvSpPr/>
+          <p:nvPr/>
+        </p:nvSpPr>
+        <p:spPr>
+          <a:xfrm>
+            <a:off x="4709160" y="1664208"/>
+            <a:ext cx="3931920" cy="1828800"/>
+          </a:xfrm>
+          <a:prstGeom prst="rect">
+            <a:avLst/>
+          </a:prstGeom>
+          <a:noFill/>
+          <a:ln/>
+        </p:spPr>
+        <p:txBody>
+          <a:bodyPr wrap="square" lIns="0" tIns="0" rIns="0" bIns="0" rtlCol="0" anchor="ctr"/>
+          <a:lstStyle/>
+          <a:p>
+            <a:pPr algn="ctr" indent="0" marL="0">
+              <a:buNone/>
+            </a:pPr>
+            <a:r>
+              <a:rPr lang="en-US" sz="1600" dirty="0">
+                <a:solidFill>
+                  <a:srgbClr val="1E293B"/>
+                </a:solidFill>
+                <a:latin typeface="Calibri" pitchFamily="34" charset="0"/>
+                <a:ea typeface="Calibri" pitchFamily="34" charset="-122"/>
+                <a:cs typeface="Calibri" pitchFamily="34" charset="-120"/>
+              </a:rPr>
+              <a:t>me</a:t>
+            </a:r>
+            <a:endParaRPr lang="en-US" sz="1600" dirty="0"/>
+          </a:p>
+          <a:p>
+            <a:pPr algn="ctr" indent="0" marL="0">
+              <a:buNone/>
+            </a:pPr>
+            <a:r>
+              <a:rPr lang="en-US" sz="1600" dirty="0">
+                <a:solidFill>
+                  <a:srgbClr val="1E293B"/>
+                </a:solidFill>
+                <a:latin typeface="Calibri" pitchFamily="34" charset="0"/>
+                <a:ea typeface="Calibri" pitchFamily="34" charset="-122"/>
+                <a:cs typeface="Calibri" pitchFamily="34" charset="-120"/>
+              </a:rPr>
+              <a:t>him</a:t>
+            </a:r>
+            <a:endParaRPr lang="en-US" sz="1600" dirty="0"/>
+          </a:p>
+          <a:p>
+            <a:pPr algn="ctr" indent="0" marL="0">
+              <a:buNone/>
+            </a:pPr>
+            <a:r>
+              <a:rPr lang="en-US" sz="1600" dirty="0">
+                <a:solidFill>
+                  <a:srgbClr val="1E293B"/>
+                </a:solidFill>
+                <a:latin typeface="Calibri" pitchFamily="34" charset="0"/>
+                <a:ea typeface="Calibri" pitchFamily="34" charset="-122"/>
+                <a:cs typeface="Calibri" pitchFamily="34" charset="-120"/>
+              </a:rPr>
+              <a:t>her</a:t>
+            </a:r>
+            <a:endParaRPr lang="en-US" sz="1600" dirty="0"/>
+          </a:p>
+          <a:p>
+            <a:pPr algn="ctr" indent="0" marL="0">
+              <a:buNone/>
+            </a:pPr>
+            <a:r>
+              <a:rPr lang="en-US" sz="1600" dirty="0">
+                <a:solidFill>
+                  <a:srgbClr val="1E293B"/>
+                </a:solidFill>
+                <a:latin typeface="Calibri" pitchFamily="34" charset="0"/>
+                <a:ea typeface="Calibri" pitchFamily="34" charset="-122"/>
+                <a:cs typeface="Calibri" pitchFamily="34" charset="-120"/>
+              </a:rPr>
+              <a:t>them</a:t>
+            </a:r>
+            <a:endParaRPr lang="en-US" sz="1600" dirty="0"/>
+          </a:p>
+        </p:txBody>
+      </p:sp>
+      <p:sp>
+        <p:nvSpPr>
+          <p:cNvPr id="13" name="Text 11"/>
+          <p:cNvSpPr/>
+          <p:nvPr/>
+        </p:nvSpPr>
+        <p:spPr>
+          <a:xfrm>
+            <a:off x="365760" y="3703320"/>
+            <a:ext cx="8412480" cy="411480"/>
+          </a:xfrm>
+          <a:prstGeom prst="rect">
+            <a:avLst/>
+          </a:prstGeom>
+          <a:noFill/>
+          <a:ln/>
+        </p:spPr>
+        <p:txBody>
+          <a:bodyPr wrap="square" lIns="0" tIns="0" rIns="0" bIns="0" rtlCol="0" anchor="ctr"/>
+          <a:lstStyle/>
+          <a:p>
+            <a:pPr indent="0" marL="0">
+              <a:buNone/>
+            </a:pPr>
+            <a:r>
+              <a:rPr lang="en-US" sz="1500" b="1" dirty="0">
+                <a:solidFill>
+                  <a:srgbClr val="34B76F"/>
+                </a:solidFill>
+                <a:latin typeface="Calibri" pitchFamily="34" charset="0"/>
+                <a:ea typeface="Calibri" pitchFamily="34" charset="-122"/>
+                <a:cs typeface="Calibri" pitchFamily="34" charset="-120"/>
+              </a:rPr>
+              <a:t>Now name the split: what does every word in each group have in common?</a:t>
+            </a:r>
+            <a:endParaRPr lang="en-US" sz="1500" dirty="0"/>
+          </a:p>
+        </p:txBody>
+      </p:sp>
+    </p:spTree>
+  </p:cSld>
+  <p:clrMapOvr>
+    <a:masterClrMapping/>
+  </p:clrMapOvr>
+</p:sld>
+</file>
+
+<file path=ppt/slides/slide16.xml><?xml version="1.0" encoding="utf-8"?>
+<p:sld xmlns:a="http://schemas.openxmlformats.org/drawingml/2006/main" xmlns:r="http://schemas.openxmlformats.org/officeDocument/2006/relationships" xmlns:p="http://schemas.openxmlformats.org/presentationml/2006/main">
+  <p:cSld name="Slide 16">
+    <p:bg>
+      <p:bgPr>
+        <a:solidFill>
+          <a:srgbClr val="F8FAFC"/>
+        </a:solidFill>
+      </p:bgPr>
+    </p:bg>
+    <p:spTree>
+      <p:nvGrpSpPr>
+        <p:cNvPr id="1" name=""/>
+        <p:cNvGrpSpPr/>
+        <p:nvPr/>
+      </p:nvGrpSpPr>
+      <p:grpSpPr>
+        <a:xfrm>
+          <a:off x="0" y="0"/>
+          <a:ext cx="0" cy="0"/>
+          <a:chOff x="0" y="0"/>
+          <a:chExt cx="0" cy="0"/>
+        </a:xfrm>
+      </p:grpSpPr>
+      <p:sp>
+        <p:nvSpPr>
+          <p:cNvPr id="2" name="Shape 0"/>
+          <p:cNvSpPr/>
+          <p:nvPr/>
+        </p:nvSpPr>
+        <p:spPr>
+          <a:xfrm>
+            <a:off x="0" y="0"/>
+            <a:ext cx="9144000" cy="566928"/>
+          </a:xfrm>
+          <a:prstGeom prst="rect">
+            <a:avLst/>
+          </a:prstGeom>
+          <a:solidFill>
+            <a:srgbClr val="0E1C42"/>
+          </a:solidFill>
+          <a:ln/>
+        </p:spPr>
+      </p:sp>
+      <p:sp>
+        <p:nvSpPr>
+          <p:cNvPr id="3" name="Text 1"/>
+          <p:cNvSpPr/>
+          <p:nvPr/>
+        </p:nvSpPr>
+        <p:spPr>
+          <a:xfrm>
+            <a:off x="365760" y="54864"/>
+            <a:ext cx="8412480" cy="457200"/>
+          </a:xfrm>
+          <a:prstGeom prst="rect">
+            <a:avLst/>
+          </a:prstGeom>
+          <a:noFill/>
+          <a:ln/>
+        </p:spPr>
+        <p:txBody>
+          <a:bodyPr wrap="square" lIns="0" tIns="0" rIns="0" bIns="0" rtlCol="0" anchor="ctr"/>
+          <a:lstStyle/>
+          <a:p>
+            <a:pPr indent="0" marL="0">
+              <a:buNone/>
+            </a:pPr>
+            <a:r>
+              <a:rPr lang="en-US" sz="2200" b="1" dirty="0">
+                <a:solidFill>
+                  <a:srgbClr val="FFFFFF"/>
+                </a:solidFill>
+                <a:latin typeface="Calibri" pitchFamily="34" charset="0"/>
+                <a:ea typeface="Calibri" pitchFamily="34" charset="-122"/>
+                <a:cs typeface="Calibri" pitchFamily="34" charset="-120"/>
+              </a:rPr>
+              <a:t>🔠  Spelling</a:t>
+            </a:r>
+            <a:endParaRPr lang="en-US" sz="2200" dirty="0"/>
+          </a:p>
+        </p:txBody>
+      </p:sp>
+      <p:sp>
+        <p:nvSpPr>
+          <p:cNvPr id="4" name="Text 2"/>
+          <p:cNvSpPr/>
+          <p:nvPr/>
+        </p:nvSpPr>
+        <p:spPr>
+          <a:xfrm>
+            <a:off x="365760" y="777240"/>
+            <a:ext cx="8229600" cy="237744"/>
+          </a:xfrm>
+          <a:prstGeom prst="rect">
+            <a:avLst/>
+          </a:prstGeom>
+          <a:noFill/>
+          <a:ln/>
+        </p:spPr>
+        <p:txBody>
+          <a:bodyPr wrap="square" lIns="0" tIns="0" rIns="0" bIns="0" rtlCol="0" anchor="ctr"/>
+          <a:lstStyle/>
+          <a:p>
+            <a:pPr indent="0" marL="0">
+              <a:buNone/>
+            </a:pPr>
+            <a:r>
+              <a:rPr lang="en-US" sz="1100" b="1" spc="100" kern="0" dirty="0">
+                <a:solidFill>
+                  <a:srgbClr val="0E1C42"/>
+                </a:solidFill>
+                <a:latin typeface="Calibri" pitchFamily="34" charset="0"/>
+                <a:ea typeface="Calibri" pitchFamily="34" charset="-122"/>
+                <a:cs typeface="Calibri" pitchFamily="34" charset="-120"/>
+              </a:rPr>
+              <a:t>PLURALS: -S, -ES, AND -IES</a:t>
+            </a:r>
+            <a:endParaRPr lang="en-US" sz="1100" dirty="0"/>
+          </a:p>
+        </p:txBody>
+      </p:sp>
+      <p:sp>
+        <p:nvSpPr>
+          <p:cNvPr id="5" name="Text 3"/>
+          <p:cNvSpPr/>
+          <p:nvPr/>
+        </p:nvSpPr>
+        <p:spPr>
+          <a:xfrm>
+            <a:off x="365760" y="1078992"/>
+            <a:ext cx="8229600" cy="237744"/>
+          </a:xfrm>
+          <a:prstGeom prst="rect">
+            <a:avLst/>
+          </a:prstGeom>
+          <a:noFill/>
+          <a:ln/>
+        </p:spPr>
+        <p:txBody>
+          <a:bodyPr wrap="square" lIns="0" tIns="0" rIns="0" bIns="0" rtlCol="0" anchor="ctr"/>
+          <a:lstStyle/>
+          <a:p>
+            <a:pPr indent="0" marL="0">
+              <a:buNone/>
+            </a:pPr>
+            <a:r>
+              <a:rPr lang="en-US" sz="1100" b="1" spc="100" kern="0" dirty="0">
+                <a:solidFill>
+                  <a:srgbClr val="64748B"/>
+                </a:solidFill>
+                <a:latin typeface="Calibri" pitchFamily="34" charset="0"/>
+                <a:ea typeface="Calibri" pitchFamily="34" charset="-122"/>
+                <a:cs typeface="Calibri" pitchFamily="34" charset="-120"/>
+              </a:rPr>
+              <a:t>WORD BANK</a:t>
+            </a:r>
+            <a:endParaRPr lang="en-US" sz="1100" dirty="0"/>
+          </a:p>
+        </p:txBody>
+      </p:sp>
+      <p:sp>
+        <p:nvSpPr>
+          <p:cNvPr id="6" name="Shape 4"/>
+          <p:cNvSpPr/>
+          <p:nvPr/>
+        </p:nvSpPr>
+        <p:spPr>
+          <a:xfrm>
+            <a:off x="365760" y="1353312"/>
+            <a:ext cx="8412480" cy="1005840"/>
+          </a:xfrm>
+          <a:prstGeom prst="roundRect">
+            <a:avLst>
+              <a:gd name="adj" fmla="val 9091"/>
+            </a:avLst>
+          </a:prstGeom>
+          <a:solidFill>
+            <a:srgbClr val="FFFFFF"/>
+          </a:solidFill>
+          <a:ln w="19050">
+            <a:solidFill>
+              <a:srgbClr val="0E1C42"/>
+            </a:solidFill>
+            <a:prstDash val="solid"/>
+          </a:ln>
+          <a:effectLst>
+            <a:outerShdw sx="100000" sy="100000" kx="0" ky="0" algn="bl" rotWithShape="0" blurRad="101600" dist="38100" dir="2700000">
+              <a:srgbClr val="000000">
+                <a:alpha val="12000"/>
+              </a:srgbClr>
+            </a:outerShdw>
+          </a:effectLst>
+        </p:spPr>
+      </p:sp>
+      <p:sp>
+        <p:nvSpPr>
+          <p:cNvPr id="7" name="Text 5"/>
+          <p:cNvSpPr/>
+          <p:nvPr/>
+        </p:nvSpPr>
+        <p:spPr>
+          <a:xfrm>
+            <a:off x="594360" y="1481328"/>
+            <a:ext cx="7955280" cy="749808"/>
+          </a:xfrm>
+          <a:prstGeom prst="rect">
+            <a:avLst/>
+          </a:prstGeom>
+          <a:noFill/>
+          <a:ln/>
+        </p:spPr>
+        <p:txBody>
+          <a:bodyPr wrap="square" lIns="0" tIns="0" rIns="0" bIns="0" rtlCol="0" anchor="ctr"/>
+          <a:lstStyle/>
+          <a:p>
+            <a:pPr indent="0" marL="0">
+              <a:buNone/>
+            </a:pPr>
+            <a:r>
+              <a:rPr lang="en-US" sz="1700" dirty="0">
+                <a:solidFill>
+                  <a:srgbClr val="0E1C42"/>
+                </a:solidFill>
+                <a:latin typeface="Calibri" pitchFamily="34" charset="0"/>
+                <a:ea typeface="Calibri" pitchFamily="34" charset="-122"/>
+                <a:cs typeface="Calibri" pitchFamily="34" charset="-120"/>
+              </a:rPr>
+              <a:t>spoons   ·   bowls   ·   kettles   ·   dishes   ·   boxes   ·   wishes   ·   stories   ·   ponies</a:t>
+            </a:r>
+            <a:endParaRPr lang="en-US" sz="1700" dirty="0"/>
+          </a:p>
+        </p:txBody>
+      </p:sp>
+      <p:sp>
+        <p:nvSpPr>
+          <p:cNvPr id="8" name="Text 6"/>
+          <p:cNvSpPr/>
+          <p:nvPr/>
+        </p:nvSpPr>
+        <p:spPr>
+          <a:xfrm>
+            <a:off x="365760" y="2514600"/>
+            <a:ext cx="8412480" cy="457200"/>
+          </a:xfrm>
+          <a:prstGeom prst="rect">
+            <a:avLst/>
+          </a:prstGeom>
+          <a:noFill/>
+          <a:ln/>
+        </p:spPr>
+        <p:txBody>
+          <a:bodyPr wrap="square" lIns="0" tIns="0" rIns="0" bIns="0" rtlCol="0" anchor="ctr"/>
+          <a:lstStyle/>
+          <a:p>
+            <a:pPr indent="0" marL="0">
+              <a:buNone/>
+            </a:pPr>
+            <a:r>
+              <a:rPr lang="en-US" sz="1500" i="1" dirty="0">
+                <a:solidFill>
+                  <a:srgbClr val="64748B"/>
+                </a:solidFill>
+                <a:latin typeface="Calibri" pitchFamily="34" charset="0"/>
+                <a:ea typeface="Calibri" pitchFamily="34" charset="-122"/>
+                <a:cs typeface="Calibri" pitchFamily="34" charset="-120"/>
+              </a:rPr>
+              <a:t>Which column does each word belong in?  Columns: just -s  |  -es  |  y → -ies</a:t>
+            </a:r>
+            <a:endParaRPr lang="en-US" sz="1500" dirty="0"/>
+          </a:p>
+        </p:txBody>
+      </p:sp>
+    </p:spTree>
+  </p:cSld>
+  <p:clrMapOvr>
+    <a:masterClrMapping/>
+  </p:clrMapOvr>
+</p:sld>
+</file>
+
+<file path=ppt/slides/slide17.xml><?xml version="1.0" encoding="utf-8"?>
+<p:sld xmlns:a="http://schemas.openxmlformats.org/drawingml/2006/main" xmlns:r="http://schemas.openxmlformats.org/officeDocument/2006/relationships" xmlns:p="http://schemas.openxmlformats.org/presentationml/2006/main">
+  <p:cSld name="Slide 17">
+    <p:bg>
+      <p:bgPr>
+        <a:solidFill>
+          <a:srgbClr val="F8FAFC"/>
+        </a:solidFill>
+      </p:bgPr>
+    </p:bg>
+    <p:spTree>
+      <p:nvGrpSpPr>
+        <p:cNvPr id="1" name=""/>
+        <p:cNvGrpSpPr/>
+        <p:nvPr/>
+      </p:nvGrpSpPr>
+      <p:grpSpPr>
+        <a:xfrm>
+          <a:off x="0" y="0"/>
+          <a:ext cx="0" cy="0"/>
+          <a:chOff x="0" y="0"/>
+          <a:chExt cx="0" cy="0"/>
+        </a:xfrm>
+      </p:grpSpPr>
+      <p:sp>
+        <p:nvSpPr>
+          <p:cNvPr id="2" name="Shape 0"/>
+          <p:cNvSpPr/>
+          <p:nvPr/>
+        </p:nvSpPr>
+        <p:spPr>
+          <a:xfrm>
+            <a:off x="0" y="0"/>
+            <a:ext cx="9144000" cy="566928"/>
+          </a:xfrm>
+          <a:prstGeom prst="rect">
+            <a:avLst/>
+          </a:prstGeom>
+          <a:solidFill>
+            <a:srgbClr val="0E1C42"/>
+          </a:solidFill>
+          <a:ln/>
+        </p:spPr>
+      </p:sp>
+      <p:sp>
+        <p:nvSpPr>
+          <p:cNvPr id="3" name="Text 1"/>
+          <p:cNvSpPr/>
+          <p:nvPr/>
+        </p:nvSpPr>
+        <p:spPr>
+          <a:xfrm>
+            <a:off x="365760" y="54864"/>
+            <a:ext cx="8412480" cy="457200"/>
+          </a:xfrm>
+          <a:prstGeom prst="rect">
+            <a:avLst/>
+          </a:prstGeom>
+          <a:noFill/>
+          <a:ln/>
+        </p:spPr>
+        <p:txBody>
+          <a:bodyPr wrap="square" lIns="0" tIns="0" rIns="0" bIns="0" rtlCol="0" anchor="ctr"/>
+          <a:lstStyle/>
+          <a:p>
+            <a:pPr indent="0" marL="0">
+              <a:buNone/>
+            </a:pPr>
+            <a:r>
+              <a:rPr lang="en-US" sz="2200" b="1" dirty="0">
+                <a:solidFill>
+                  <a:srgbClr val="FFFFFF"/>
+                </a:solidFill>
+                <a:latin typeface="Calibri" pitchFamily="34" charset="0"/>
+                <a:ea typeface="Calibri" pitchFamily="34" charset="-122"/>
+                <a:cs typeface="Calibri" pitchFamily="34" charset="-120"/>
+              </a:rPr>
+              <a:t>🔠  Spelling</a:t>
+            </a:r>
+            <a:endParaRPr lang="en-US" sz="2200" dirty="0"/>
+          </a:p>
+        </p:txBody>
+      </p:sp>
+      <p:sp>
+        <p:nvSpPr>
+          <p:cNvPr id="4" name="Text 2"/>
+          <p:cNvSpPr/>
+          <p:nvPr/>
+        </p:nvSpPr>
+        <p:spPr>
+          <a:xfrm>
+            <a:off x="365760" y="777240"/>
+            <a:ext cx="8229600" cy="237744"/>
+          </a:xfrm>
+          <a:prstGeom prst="rect">
+            <a:avLst/>
+          </a:prstGeom>
+          <a:noFill/>
+          <a:ln/>
+        </p:spPr>
+        <p:txBody>
+          <a:bodyPr wrap="square" lIns="0" tIns="0" rIns="0" bIns="0" rtlCol="0" anchor="ctr"/>
+          <a:lstStyle/>
+          <a:p>
+            <a:pPr indent="0" marL="0">
+              <a:buNone/>
+            </a:pPr>
+            <a:r>
+              <a:rPr lang="en-US" sz="1100" b="1" spc="100" kern="0" dirty="0">
+                <a:solidFill>
+                  <a:srgbClr val="0E1C42"/>
+                </a:solidFill>
+                <a:latin typeface="Calibri" pitchFamily="34" charset="0"/>
+                <a:ea typeface="Calibri" pitchFamily="34" charset="-122"/>
+                <a:cs typeface="Calibri" pitchFamily="34" charset="-120"/>
+              </a:rPr>
+              <a:t>PLURALS: -S, -ES, AND -IES</a:t>
+            </a:r>
+            <a:endParaRPr lang="en-US" sz="1100" dirty="0"/>
+          </a:p>
+        </p:txBody>
+      </p:sp>
+      <p:sp>
+        <p:nvSpPr>
+          <p:cNvPr id="5" name="Shape 3"/>
+          <p:cNvSpPr/>
+          <p:nvPr/>
+        </p:nvSpPr>
+        <p:spPr>
+          <a:xfrm>
+            <a:off x="411480" y="1078992"/>
+            <a:ext cx="2712720" cy="457200"/>
+          </a:xfrm>
+          <a:prstGeom prst="roundRect">
+            <a:avLst>
+              <a:gd name="adj" fmla="val 16000"/>
+            </a:avLst>
+          </a:prstGeom>
+          <a:solidFill>
+            <a:srgbClr val="0E1C42"/>
+          </a:solidFill>
+          <a:ln/>
+        </p:spPr>
+      </p:sp>
+      <p:sp>
+        <p:nvSpPr>
+          <p:cNvPr id="6" name="Text 4"/>
+          <p:cNvSpPr/>
+          <p:nvPr/>
+        </p:nvSpPr>
+        <p:spPr>
+          <a:xfrm>
+            <a:off x="457200" y="1133856"/>
+            <a:ext cx="2621280" cy="347472"/>
+          </a:xfrm>
+          <a:prstGeom prst="rect">
+            <a:avLst/>
+          </a:prstGeom>
+          <a:noFill/>
+          <a:ln/>
+        </p:spPr>
+        <p:txBody>
+          <a:bodyPr wrap="square" lIns="0" tIns="0" rIns="0" bIns="0" rtlCol="0" anchor="ctr"/>
+          <a:lstStyle/>
+          <a:p>
+            <a:pPr algn="ctr" indent="0" marL="0">
+              <a:buNone/>
+            </a:pPr>
+            <a:r>
+              <a:rPr lang="en-US" sz="1300" b="1" dirty="0">
+                <a:solidFill>
+                  <a:srgbClr val="FFFFFF"/>
+                </a:solidFill>
+                <a:latin typeface="Calibri" pitchFamily="34" charset="0"/>
+                <a:ea typeface="Calibri" pitchFamily="34" charset="-122"/>
+                <a:cs typeface="Calibri" pitchFamily="34" charset="-120"/>
+              </a:rPr>
+              <a:t>just -s</a:t>
+            </a:r>
+            <a:endParaRPr lang="en-US" sz="1300" dirty="0"/>
+          </a:p>
+        </p:txBody>
+      </p:sp>
+      <p:sp>
+        <p:nvSpPr>
+          <p:cNvPr id="7" name="Shape 5"/>
+          <p:cNvSpPr/>
+          <p:nvPr/>
+        </p:nvSpPr>
+        <p:spPr>
+          <a:xfrm>
+            <a:off x="411480" y="1591056"/>
+            <a:ext cx="2712720" cy="2103120"/>
+          </a:xfrm>
+          <a:prstGeom prst="roundRect">
+            <a:avLst>
+              <a:gd name="adj" fmla="val 4348"/>
+            </a:avLst>
+          </a:prstGeom>
+          <a:solidFill>
+            <a:srgbClr val="FFFFFF"/>
+          </a:solidFill>
+          <a:ln/>
+          <a:effectLst>
+            <a:outerShdw sx="100000" sy="100000" kx="0" ky="0" algn="bl" rotWithShape="0" blurRad="101600" dist="38100" dir="2700000">
+              <a:srgbClr val="000000">
+                <a:alpha val="12000"/>
+              </a:srgbClr>
+            </a:outerShdw>
+          </a:effectLst>
+        </p:spPr>
+      </p:sp>
+      <p:sp>
+        <p:nvSpPr>
+          <p:cNvPr id="8" name="Text 6"/>
+          <p:cNvSpPr/>
+          <p:nvPr/>
+        </p:nvSpPr>
+        <p:spPr>
+          <a:xfrm>
+            <a:off x="502920" y="1700784"/>
+            <a:ext cx="2529840" cy="1883664"/>
+          </a:xfrm>
+          <a:prstGeom prst="rect">
+            <a:avLst/>
+          </a:prstGeom>
+          <a:noFill/>
+          <a:ln/>
+        </p:spPr>
+        <p:txBody>
+          <a:bodyPr wrap="square" lIns="0" tIns="0" rIns="0" bIns="0" rtlCol="0" anchor="ctr"/>
+          <a:lstStyle/>
+          <a:p>
+            <a:pPr algn="ctr" indent="0" marL="0">
+              <a:buNone/>
+            </a:pPr>
+            <a:r>
+              <a:rPr lang="en-US" sz="1400" dirty="0">
+                <a:solidFill>
+                  <a:srgbClr val="1E293B"/>
+                </a:solidFill>
+                <a:latin typeface="Calibri" pitchFamily="34" charset="0"/>
+                <a:ea typeface="Calibri" pitchFamily="34" charset="-122"/>
+                <a:cs typeface="Calibri" pitchFamily="34" charset="-120"/>
+              </a:rPr>
+              <a:t>spoons</a:t>
+            </a:r>
+            <a:endParaRPr lang="en-US" sz="1400" dirty="0"/>
+          </a:p>
+          <a:p>
+            <a:pPr algn="ctr" indent="0" marL="0">
+              <a:buNone/>
+            </a:pPr>
+            <a:r>
+              <a:rPr lang="en-US" sz="1400" dirty="0">
+                <a:solidFill>
+                  <a:srgbClr val="1E293B"/>
+                </a:solidFill>
+                <a:latin typeface="Calibri" pitchFamily="34" charset="0"/>
+                <a:ea typeface="Calibri" pitchFamily="34" charset="-122"/>
+                <a:cs typeface="Calibri" pitchFamily="34" charset="-120"/>
+              </a:rPr>
+              <a:t>bowls</a:t>
+            </a:r>
+            <a:endParaRPr lang="en-US" sz="1400" dirty="0"/>
+          </a:p>
+          <a:p>
+            <a:pPr algn="ctr" indent="0" marL="0">
+              <a:buNone/>
+            </a:pPr>
+            <a:r>
+              <a:rPr lang="en-US" sz="1400" dirty="0">
+                <a:solidFill>
+                  <a:srgbClr val="1E293B"/>
+                </a:solidFill>
+                <a:latin typeface="Calibri" pitchFamily="34" charset="0"/>
+                <a:ea typeface="Calibri" pitchFamily="34" charset="-122"/>
+                <a:cs typeface="Calibri" pitchFamily="34" charset="-120"/>
+              </a:rPr>
+              <a:t>kettles</a:t>
+            </a:r>
+            <a:endParaRPr lang="en-US" sz="1400" dirty="0"/>
+          </a:p>
+        </p:txBody>
+      </p:sp>
+      <p:sp>
+        <p:nvSpPr>
+          <p:cNvPr id="9" name="Shape 7"/>
+          <p:cNvSpPr/>
+          <p:nvPr/>
+        </p:nvSpPr>
+        <p:spPr>
+          <a:xfrm>
+            <a:off x="3215640" y="1078992"/>
+            <a:ext cx="2712720" cy="457200"/>
+          </a:xfrm>
+          <a:prstGeom prst="roundRect">
+            <a:avLst>
+              <a:gd name="adj" fmla="val 16000"/>
+            </a:avLst>
+          </a:prstGeom>
+          <a:solidFill>
+            <a:srgbClr val="0E1C42"/>
+          </a:solidFill>
+          <a:ln/>
+        </p:spPr>
+      </p:sp>
+      <p:sp>
+        <p:nvSpPr>
+          <p:cNvPr id="10" name="Text 8"/>
+          <p:cNvSpPr/>
+          <p:nvPr/>
+        </p:nvSpPr>
+        <p:spPr>
+          <a:xfrm>
+            <a:off x="3261360" y="1133856"/>
+            <a:ext cx="2621280" cy="347472"/>
+          </a:xfrm>
+          <a:prstGeom prst="rect">
+            <a:avLst/>
+          </a:prstGeom>
+          <a:noFill/>
+          <a:ln/>
+        </p:spPr>
+        <p:txBody>
+          <a:bodyPr wrap="square" lIns="0" tIns="0" rIns="0" bIns="0" rtlCol="0" anchor="ctr"/>
+          <a:lstStyle/>
+          <a:p>
+            <a:pPr algn="ctr" indent="0" marL="0">
+              <a:buNone/>
+            </a:pPr>
+            <a:r>
+              <a:rPr lang="en-US" sz="1300" b="1" dirty="0">
+                <a:solidFill>
+                  <a:srgbClr val="FFFFFF"/>
+                </a:solidFill>
+                <a:latin typeface="Calibri" pitchFamily="34" charset="0"/>
+                <a:ea typeface="Calibri" pitchFamily="34" charset="-122"/>
+                <a:cs typeface="Calibri" pitchFamily="34" charset="-120"/>
+              </a:rPr>
+              <a:t>-es</a:t>
+            </a:r>
+            <a:endParaRPr lang="en-US" sz="1300" dirty="0"/>
+          </a:p>
+        </p:txBody>
+      </p:sp>
+      <p:sp>
+        <p:nvSpPr>
+          <p:cNvPr id="11" name="Shape 9"/>
+          <p:cNvSpPr/>
+          <p:nvPr/>
+        </p:nvSpPr>
+        <p:spPr>
+          <a:xfrm>
+            <a:off x="3215640" y="1591056"/>
+            <a:ext cx="2712720" cy="2103120"/>
+          </a:xfrm>
+          <a:prstGeom prst="roundRect">
+            <a:avLst>
+              <a:gd name="adj" fmla="val 4348"/>
+            </a:avLst>
+          </a:prstGeom>
+          <a:solidFill>
+            <a:srgbClr val="FFFFFF"/>
+          </a:solidFill>
+          <a:ln/>
+          <a:effectLst>
+            <a:outerShdw sx="100000" sy="100000" kx="0" ky="0" algn="bl" rotWithShape="0" blurRad="101600" dist="38100" dir="2700000">
+              <a:srgbClr val="000000">
+                <a:alpha val="12000"/>
+              </a:srgbClr>
+            </a:outerShdw>
+          </a:effectLst>
+        </p:spPr>
+      </p:sp>
+      <p:sp>
+        <p:nvSpPr>
+          <p:cNvPr id="12" name="Text 10"/>
+          <p:cNvSpPr/>
+          <p:nvPr/>
+        </p:nvSpPr>
+        <p:spPr>
+          <a:xfrm>
+            <a:off x="3307080" y="1700784"/>
+            <a:ext cx="2529840" cy="1883664"/>
+          </a:xfrm>
+          <a:prstGeom prst="rect">
+            <a:avLst/>
+          </a:prstGeom>
+          <a:noFill/>
+          <a:ln/>
+        </p:spPr>
+        <p:txBody>
+          <a:bodyPr wrap="square" lIns="0" tIns="0" rIns="0" bIns="0" rtlCol="0" anchor="ctr"/>
+          <a:lstStyle/>
+          <a:p>
+            <a:pPr algn="ctr" indent="0" marL="0">
+              <a:buNone/>
+            </a:pPr>
+            <a:r>
+              <a:rPr lang="en-US" sz="1400" dirty="0">
+                <a:solidFill>
+                  <a:srgbClr val="1E293B"/>
+                </a:solidFill>
+                <a:latin typeface="Calibri" pitchFamily="34" charset="0"/>
+                <a:ea typeface="Calibri" pitchFamily="34" charset="-122"/>
+                <a:cs typeface="Calibri" pitchFamily="34" charset="-120"/>
+              </a:rPr>
+              <a:t>dishes</a:t>
+            </a:r>
+            <a:endParaRPr lang="en-US" sz="1400" dirty="0"/>
+          </a:p>
+          <a:p>
+            <a:pPr algn="ctr" indent="0" marL="0">
+              <a:buNone/>
+            </a:pPr>
+            <a:r>
+              <a:rPr lang="en-US" sz="1400" dirty="0">
+                <a:solidFill>
+                  <a:srgbClr val="1E293B"/>
+                </a:solidFill>
+                <a:latin typeface="Calibri" pitchFamily="34" charset="0"/>
+                <a:ea typeface="Calibri" pitchFamily="34" charset="-122"/>
+                <a:cs typeface="Calibri" pitchFamily="34" charset="-120"/>
+              </a:rPr>
+              <a:t>boxes</a:t>
+            </a:r>
+            <a:endParaRPr lang="en-US" sz="1400" dirty="0"/>
+          </a:p>
+          <a:p>
+            <a:pPr algn="ctr" indent="0" marL="0">
+              <a:buNone/>
+            </a:pPr>
+            <a:r>
+              <a:rPr lang="en-US" sz="1400" dirty="0">
+                <a:solidFill>
+                  <a:srgbClr val="1E293B"/>
+                </a:solidFill>
+                <a:latin typeface="Calibri" pitchFamily="34" charset="0"/>
+                <a:ea typeface="Calibri" pitchFamily="34" charset="-122"/>
+                <a:cs typeface="Calibri" pitchFamily="34" charset="-120"/>
+              </a:rPr>
+              <a:t>wishes</a:t>
+            </a:r>
+            <a:endParaRPr lang="en-US" sz="1400" dirty="0"/>
+          </a:p>
+        </p:txBody>
+      </p:sp>
+      <p:sp>
+        <p:nvSpPr>
+          <p:cNvPr id="13" name="Shape 11"/>
+          <p:cNvSpPr/>
+          <p:nvPr/>
+        </p:nvSpPr>
+        <p:spPr>
+          <a:xfrm>
+            <a:off x="6019800" y="1078992"/>
+            <a:ext cx="2712720" cy="457200"/>
+          </a:xfrm>
+          <a:prstGeom prst="roundRect">
+            <a:avLst>
+              <a:gd name="adj" fmla="val 16000"/>
+            </a:avLst>
+          </a:prstGeom>
+          <a:solidFill>
+            <a:srgbClr val="0E1C42"/>
+          </a:solidFill>
+          <a:ln/>
+        </p:spPr>
+      </p:sp>
+      <p:sp>
+        <p:nvSpPr>
+          <p:cNvPr id="14" name="Text 12"/>
+          <p:cNvSpPr/>
+          <p:nvPr/>
+        </p:nvSpPr>
+        <p:spPr>
+          <a:xfrm>
+            <a:off x="6065520" y="1133856"/>
+            <a:ext cx="2621280" cy="347472"/>
+          </a:xfrm>
+          <a:prstGeom prst="rect">
+            <a:avLst/>
+          </a:prstGeom>
+          <a:noFill/>
+          <a:ln/>
+        </p:spPr>
+        <p:txBody>
+          <a:bodyPr wrap="square" lIns="0" tIns="0" rIns="0" bIns="0" rtlCol="0" anchor="ctr"/>
+          <a:lstStyle/>
+          <a:p>
+            <a:pPr algn="ctr" indent="0" marL="0">
+              <a:buNone/>
+            </a:pPr>
+            <a:r>
+              <a:rPr lang="en-US" sz="1300" b="1" dirty="0">
+                <a:solidFill>
+                  <a:srgbClr val="FFFFFF"/>
+                </a:solidFill>
+                <a:latin typeface="Calibri" pitchFamily="34" charset="0"/>
+                <a:ea typeface="Calibri" pitchFamily="34" charset="-122"/>
+                <a:cs typeface="Calibri" pitchFamily="34" charset="-120"/>
+              </a:rPr>
+              <a:t>y → -ies</a:t>
+            </a:r>
+            <a:endParaRPr lang="en-US" sz="1300" dirty="0"/>
+          </a:p>
+        </p:txBody>
+      </p:sp>
+      <p:sp>
+        <p:nvSpPr>
+          <p:cNvPr id="15" name="Shape 13"/>
+          <p:cNvSpPr/>
+          <p:nvPr/>
+        </p:nvSpPr>
+        <p:spPr>
+          <a:xfrm>
+            <a:off x="6019800" y="1591056"/>
+            <a:ext cx="2712720" cy="2103120"/>
+          </a:xfrm>
+          <a:prstGeom prst="roundRect">
+            <a:avLst>
+              <a:gd name="adj" fmla="val 4348"/>
+            </a:avLst>
+          </a:prstGeom>
+          <a:solidFill>
+            <a:srgbClr val="FFFFFF"/>
+          </a:solidFill>
+          <a:ln/>
+          <a:effectLst>
+            <a:outerShdw sx="100000" sy="100000" kx="0" ky="0" algn="bl" rotWithShape="0" blurRad="101600" dist="38100" dir="2700000">
+              <a:srgbClr val="000000">
+                <a:alpha val="12000"/>
+              </a:srgbClr>
+            </a:outerShdw>
+          </a:effectLst>
+        </p:spPr>
+      </p:sp>
+      <p:sp>
+        <p:nvSpPr>
+          <p:cNvPr id="16" name="Text 14"/>
+          <p:cNvSpPr/>
+          <p:nvPr/>
+        </p:nvSpPr>
+        <p:spPr>
+          <a:xfrm>
+            <a:off x="6111240" y="1700784"/>
+            <a:ext cx="2529840" cy="1883664"/>
+          </a:xfrm>
+          <a:prstGeom prst="rect">
+            <a:avLst/>
+          </a:prstGeom>
+          <a:noFill/>
+          <a:ln/>
+        </p:spPr>
+        <p:txBody>
+          <a:bodyPr wrap="square" lIns="0" tIns="0" rIns="0" bIns="0" rtlCol="0" anchor="ctr"/>
+          <a:lstStyle/>
+          <a:p>
+            <a:pPr algn="ctr" indent="0" marL="0">
+              <a:buNone/>
+            </a:pPr>
+            <a:r>
+              <a:rPr lang="en-US" sz="1400" dirty="0">
+                <a:solidFill>
+                  <a:srgbClr val="1E293B"/>
+                </a:solidFill>
+                <a:latin typeface="Calibri" pitchFamily="34" charset="0"/>
+                <a:ea typeface="Calibri" pitchFamily="34" charset="-122"/>
+                <a:cs typeface="Calibri" pitchFamily="34" charset="-120"/>
+              </a:rPr>
+              <a:t>stories</a:t>
+            </a:r>
+            <a:endParaRPr lang="en-US" sz="1400" dirty="0"/>
+          </a:p>
+          <a:p>
+            <a:pPr algn="ctr" indent="0" marL="0">
+              <a:buNone/>
+            </a:pPr>
+            <a:r>
+              <a:rPr lang="en-US" sz="1400" dirty="0">
+                <a:solidFill>
+                  <a:srgbClr val="1E293B"/>
+                </a:solidFill>
+                <a:latin typeface="Calibri" pitchFamily="34" charset="0"/>
+                <a:ea typeface="Calibri" pitchFamily="34" charset="-122"/>
+                <a:cs typeface="Calibri" pitchFamily="34" charset="-120"/>
+              </a:rPr>
+              <a:t>ponies</a:t>
+            </a:r>
+            <a:endParaRPr lang="en-US" sz="1400" dirty="0"/>
+          </a:p>
+        </p:txBody>
+      </p:sp>
+    </p:spTree>
+  </p:cSld>
+  <p:clrMapOvr>
+    <a:masterClrMapping/>
+  </p:clrMapOvr>
+</p:sld>
+</file>
+
+<file path=ppt/slides/slide18.xml><?xml version="1.0" encoding="utf-8"?>
+<p:sld xmlns:a="http://schemas.openxmlformats.org/drawingml/2006/main" xmlns:r="http://schemas.openxmlformats.org/officeDocument/2006/relationships" xmlns:p="http://schemas.openxmlformats.org/presentationml/2006/main">
+  <p:cSld name="Slide 18">
     <p:bg>
       <p:bgPr>
         <a:solidFill>
@@ -4905,9 +7689,9 @@
 </p:sld>
 </file>
 
-<file path=ppt/slides/slide16.xml><?xml version="1.0" encoding="utf-8"?>
+<file path=ppt/slides/slide19.xml><?xml version="1.0" encoding="utf-8"?>
 <p:sld xmlns:a="http://schemas.openxmlformats.org/drawingml/2006/main" xmlns:r="http://schemas.openxmlformats.org/officeDocument/2006/relationships" xmlns:p="http://schemas.openxmlformats.org/presentationml/2006/main">
-  <p:cSld name="Slide 16">
+  <p:cSld name="Slide 19">
     <p:bg>
       <p:bgPr>
         <a:solidFill>
@@ -6445,7 +9229,7 @@
                 <a:ea typeface="Calibri" pitchFamily="34" charset="-122"/>
                 <a:cs typeface="Calibri" pitchFamily="34" charset="-120"/>
               </a:rPr>
-              <a:t>Good readers explain different characters' perspectives . Each character sees the same events through their own eyes, wants, and fears.</a:t>
+              <a:t>Good readers explain different characters' perspectives. Each character sees the same events through their own eyes, wants, and fears.</a:t>
             </a:r>
             <a:endParaRPr lang="en-US" sz="1500" dirty="0"/>
           </a:p>
@@ -6465,7 +9249,7 @@
     <p:bg>
       <p:bgPr>
         <a:solidFill>
-          <a:srgbClr val="F8FAFC"/>
+          <a:srgbClr val="FFFFFF"/>
         </a:solidFill>
       </p:bgPr>
     </p:bg>
@@ -6550,7 +9334,7 @@
         </p:nvSpPr>
         <p:spPr>
           <a:xfrm>
-            <a:off x="365760" y="749808"/>
+            <a:off x="365760" y="804672"/>
             <a:ext cx="8229600" cy="237744"/>
           </a:xfrm>
           <a:prstGeom prst="rect">
@@ -6575,7 +9359,7 @@
                 <a:ea typeface="Calibri" pitchFamily="34" charset="-122"/>
                 <a:cs typeface="Calibri" pitchFamily="34" charset="-120"/>
               </a:rPr>
-              <a:t>FIX THESE SENTENCES</a:t>
+              <a:t>CORRECT MODEL — STUDY WHAT IS RIGHT</a:t>
             </a:r>
             <a:endParaRPr lang="en-US" sz="1100" dirty="0"/>
           </a:p>
@@ -6589,16 +9373,16 @@
         </p:nvSpPr>
         <p:spPr>
           <a:xfrm>
-            <a:off x="365760" y="1024128"/>
-            <a:ext cx="8412480" cy="777240"/>
+            <a:off x="365760" y="1078992"/>
+            <a:ext cx="8412480" cy="822960"/>
           </a:xfrm>
           <a:prstGeom prst="roundRect">
             <a:avLst>
-              <a:gd name="adj" fmla="val 11765"/>
+              <a:gd name="adj" fmla="val 11111"/>
             </a:avLst>
           </a:prstGeom>
           <a:solidFill>
-            <a:srgbClr val="FFFFFF"/>
+            <a:srgbClr val="E5F7FC"/>
           </a:solidFill>
           <a:ln w="19050">
             <a:solidFill>
@@ -6623,8 +9407,8 @@
         </p:nvSpPr>
         <p:spPr>
           <a:xfrm>
-            <a:off x="594360" y="1152144"/>
-            <a:ext cx="7955280" cy="521208"/>
+            <a:off x="594360" y="1207008"/>
+            <a:ext cx="7955280" cy="566928"/>
           </a:xfrm>
           <a:prstGeom prst="rect">
             <a:avLst/>
@@ -6648,7 +9432,7 @@
                 <a:ea typeface="Calibri" pitchFamily="34" charset="-122"/>
                 <a:cs typeface="Calibri" pitchFamily="34" charset="-120"/>
               </a:rPr>
-              <a:t>1. miggery sow was a very small girl with very large ears who wanted to be a princess</a:t>
+              <a:t>She carried the tablecloth, the hen, and the bowl out to the waiting cart.</a:t>
             </a:r>
             <a:endParaRPr lang="en-US" sz="1700" dirty="0"/>
           </a:p>
@@ -6656,37 +9440,42 @@
       </p:sp>
       <p:sp>
         <p:nvSpPr>
-          <p:cNvPr id="7" name="Shape 5"/>
-          <p:cNvSpPr/>
-          <p:nvPr/>
-        </p:nvSpPr>
-        <p:spPr>
-          <a:xfrm>
-            <a:off x="365760" y="1874520"/>
-            <a:ext cx="8412480" cy="777240"/>
-          </a:xfrm>
-          <a:prstGeom prst="roundRect">
-            <a:avLst>
-              <a:gd name="adj" fmla="val 11765"/>
-            </a:avLst>
-          </a:prstGeom>
-          <a:solidFill>
-            <a:srgbClr val="FFFFFF"/>
-          </a:solidFill>
-          <a:ln w="19050">
-            <a:solidFill>
-              <a:srgbClr val="55C8E8"/>
-            </a:solidFill>
-            <a:prstDash val="solid"/>
-          </a:ln>
-          <a:effectLst>
-            <a:outerShdw sx="100000" sy="100000" kx="0" ky="0" algn="bl" rotWithShape="0" blurRad="101600" dist="38100" dir="2700000">
-              <a:srgbClr val="000000">
-                <a:alpha val="12000"/>
-              </a:srgbClr>
-            </a:outerShdw>
-          </a:effectLst>
-        </p:spPr>
+          <p:cNvPr id="7" name="Text 5"/>
+          <p:cNvSpPr/>
+          <p:nvPr/>
+        </p:nvSpPr>
+        <p:spPr>
+          <a:xfrm>
+            <a:off x="365760" y="2103120"/>
+            <a:ext cx="8229600" cy="237744"/>
+          </a:xfrm>
+          <a:prstGeom prst="rect">
+            <a:avLst/>
+          </a:prstGeom>
+          <a:noFill/>
+          <a:ln/>
+        </p:spPr>
+        <p:txBody>
+          <a:bodyPr wrap="square" lIns="0" tIns="0" rIns="0" bIns="0" rtlCol="0" anchor="ctr"/>
+          <a:lstStyle/>
+          <a:p>
+            <a:pPr indent="0" marL="0">
+              <a:buNone/>
+            </a:pPr>
+            <a:r>
+              <a:rPr lang="en-US" sz="1100" b="1" spc="100" kern="0" dirty="0">
+                <a:solidFill>
+                  <a:srgbClr val="55C8E8"/>
+                </a:solidFill>
+                <a:latin typeface="Calibri" pitchFamily="34" charset="0"/>
+                <a:ea typeface="Calibri" pitchFamily="34" charset="-122"/>
+                <a:cs typeface="Calibri" pitchFamily="34" charset="-120"/>
+              </a:rPr>
+              <a:t>NOTICE</a:t>
+            </a:r>
+            <a:endParaRPr lang="en-US" sz="1100" dirty="0"/>
+          </a:p>
+        </p:txBody>
       </p:sp>
       <p:sp>
         <p:nvSpPr>
@@ -6696,73 +9485,34 @@
         </p:nvSpPr>
         <p:spPr>
           <a:xfrm>
-            <a:off x="594360" y="2002536"/>
-            <a:ext cx="7955280" cy="521208"/>
-          </a:xfrm>
-          <a:prstGeom prst="rect">
-            <a:avLst/>
-          </a:prstGeom>
-          <a:noFill/>
-          <a:ln/>
-        </p:spPr>
-        <p:txBody>
-          <a:bodyPr wrap="square" lIns="0" tIns="0" rIns="0" bIns="0" rtlCol="0" anchor="ctr"/>
-          <a:lstStyle/>
-          <a:p>
-            <a:pPr indent="0" marL="0">
-              <a:buNone/>
-            </a:pPr>
-            <a:r>
-              <a:rPr lang="en-US" sz="1700" dirty="0">
-                <a:solidFill>
-                  <a:srgbClr val="1E293B"/>
-                </a:solidFill>
-                <a:latin typeface="Calibri" pitchFamily="34" charset="0"/>
-                <a:ea typeface="Calibri" pitchFamily="34" charset="-122"/>
-                <a:cs typeface="Calibri" pitchFamily="34" charset="-120"/>
-              </a:rPr>
-              <a:t>2. she had been sold by her father for a tablecloth a hen and a red bowl</a:t>
-            </a:r>
-            <a:endParaRPr lang="en-US" sz="1700" dirty="0"/>
-          </a:p>
-        </p:txBody>
-      </p:sp>
-      <p:sp>
-        <p:nvSpPr>
-          <p:cNvPr id="9" name="Text 7"/>
-          <p:cNvSpPr/>
-          <p:nvPr/>
-        </p:nvSpPr>
-        <p:spPr>
-          <a:xfrm>
-            <a:off x="365760" y="2788920"/>
-            <a:ext cx="8412480" cy="365760"/>
-          </a:xfrm>
-          <a:prstGeom prst="rect">
-            <a:avLst/>
-          </a:prstGeom>
-          <a:noFill/>
-          <a:ln/>
-        </p:spPr>
-        <p:txBody>
-          <a:bodyPr wrap="square" lIns="0" tIns="0" rIns="0" bIns="0" rtlCol="0" anchor="ctr"/>
-          <a:lstStyle/>
-          <a:p>
-            <a:pPr indent="0" marL="0">
-              <a:buNone/>
-            </a:pPr>
-            <a:r>
-              <a:rPr lang="en-US" sz="1600" b="1" dirty="0">
-                <a:solidFill>
-                  <a:srgbClr val="0E1C42"/>
-                </a:solidFill>
-                <a:latin typeface="Calibri" pitchFamily="34" charset="0"/>
-                <a:ea typeface="Calibri" pitchFamily="34" charset="-122"/>
-                <a:cs typeface="Calibri" pitchFamily="34" charset="-120"/>
-              </a:rPr>
-              <a:t>Rewrite both sentences correctly in your notebook.</a:t>
-            </a:r>
-            <a:endParaRPr lang="en-US" sz="1600" dirty="0"/>
+            <a:off x="365760" y="2359152"/>
+            <a:ext cx="8412480" cy="1097280"/>
+          </a:xfrm>
+          <a:prstGeom prst="rect">
+            <a:avLst/>
+          </a:prstGeom>
+          <a:noFill/>
+          <a:ln/>
+        </p:spPr>
+        <p:txBody>
+          <a:bodyPr wrap="square" lIns="0" tIns="0" rIns="0" bIns="0" rtlCol="0" anchor="t"/>
+          <a:lstStyle/>
+          <a:p>
+            <a:pPr indent="0" marL="0">
+              <a:buNone/>
+            </a:pPr>
+            <a:r>
+              <a:rPr lang="en-US" sz="1500" dirty="0">
+                <a:solidFill>
+                  <a:srgbClr val="1E293B"/>
+                </a:solidFill>
+                <a:latin typeface="Calibri" pitchFamily="34" charset="0"/>
+                <a:ea typeface="Calibri" pitchFamily="34" charset="-122"/>
+                <a:cs typeface="Calibri" pitchFamily="34" charset="-120"/>
+              </a:rPr>
+              <a:t>She is a subject pronoun — it does the action. Commas separate the three things in the list, and and comes before the last one. A period ends the sentence.</a:t>
+            </a:r>
+            <a:endParaRPr lang="en-US" sz="1500" dirty="0"/>
           </a:p>
         </p:txBody>
       </p:sp>
@@ -6890,7 +9640,7 @@
                 <a:ea typeface="Calibri" pitchFamily="34" charset="-122"/>
                 <a:cs typeface="Calibri" pitchFamily="34" charset="-120"/>
               </a:rPr>
-              <a:t>FIX THESE SENTENCES</a:t>
+              <a:t>NOW FIX THIS ONE</a:t>
             </a:r>
             <a:endParaRPr lang="en-US" sz="1100" dirty="0"/>
           </a:p>
@@ -6963,7 +9713,7 @@
                 <a:ea typeface="Calibri" pitchFamily="34" charset="-122"/>
                 <a:cs typeface="Calibri" pitchFamily="34" charset="-120"/>
               </a:rPr>
-              <a:t>1. miggery sow was a very small girl with very large ears who wanted to be a princess</a:t>
+              <a:t>she had been sold by her father for a tablecloth a hen and a red bowl</a:t>
             </a:r>
             <a:endParaRPr lang="en-US" sz="1700" dirty="0"/>
           </a:p>
@@ -6971,48 +9721,14 @@
       </p:sp>
       <p:sp>
         <p:nvSpPr>
-          <p:cNvPr id="7" name="Shape 5"/>
-          <p:cNvSpPr/>
-          <p:nvPr/>
-        </p:nvSpPr>
-        <p:spPr>
-          <a:xfrm>
-            <a:off x="365760" y="1874520"/>
-            <a:ext cx="8412480" cy="777240"/>
-          </a:xfrm>
-          <a:prstGeom prst="roundRect">
-            <a:avLst>
-              <a:gd name="adj" fmla="val 11765"/>
-            </a:avLst>
-          </a:prstGeom>
-          <a:solidFill>
-            <a:srgbClr val="FFFFFF"/>
-          </a:solidFill>
-          <a:ln w="19050">
-            <a:solidFill>
-              <a:srgbClr val="55C8E8"/>
-            </a:solidFill>
-            <a:prstDash val="solid"/>
-          </a:ln>
-          <a:effectLst>
-            <a:outerShdw sx="100000" sy="100000" kx="0" ky="0" algn="bl" rotWithShape="0" blurRad="101600" dist="38100" dir="2700000">
-              <a:srgbClr val="000000">
-                <a:alpha val="12000"/>
-              </a:srgbClr>
-            </a:outerShdw>
-          </a:effectLst>
-        </p:spPr>
-      </p:sp>
-      <p:sp>
-        <p:nvSpPr>
-          <p:cNvPr id="8" name="Text 6"/>
-          <p:cNvSpPr/>
-          <p:nvPr/>
-        </p:nvSpPr>
-        <p:spPr>
-          <a:xfrm>
-            <a:off x="594360" y="2002536"/>
-            <a:ext cx="7955280" cy="521208"/>
+          <p:cNvPr id="7" name="Text 5"/>
+          <p:cNvSpPr/>
+          <p:nvPr/>
+        </p:nvSpPr>
+        <p:spPr>
+          <a:xfrm>
+            <a:off x="365760" y="2788920"/>
+            <a:ext cx="8412480" cy="365760"/>
           </a:xfrm>
           <a:prstGeom prst="rect">
             <a:avLst/>
@@ -7028,169 +9744,17 @@
               <a:buNone/>
             </a:pPr>
             <a:r>
-              <a:rPr lang="en-US" sz="1700" dirty="0">
-                <a:solidFill>
-                  <a:srgbClr val="1E293B"/>
-                </a:solidFill>
-                <a:latin typeface="Calibri" pitchFamily="34" charset="0"/>
-                <a:ea typeface="Calibri" pitchFamily="34" charset="-122"/>
-                <a:cs typeface="Calibri" pitchFamily="34" charset="-120"/>
-              </a:rPr>
-              <a:t>2. she had been sold by her father for a tablecloth a hen and a red bowl</a:t>
-            </a:r>
-            <a:endParaRPr lang="en-US" sz="1700" dirty="0"/>
-          </a:p>
-        </p:txBody>
-      </p:sp>
-      <p:sp>
-        <p:nvSpPr>
-          <p:cNvPr id="9" name="Shape 7"/>
-          <p:cNvSpPr/>
-          <p:nvPr/>
-        </p:nvSpPr>
-        <p:spPr>
-          <a:xfrm>
-            <a:off x="365760" y="2743200"/>
-            <a:ext cx="8412480" cy="1417320"/>
-          </a:xfrm>
-          <a:prstGeom prst="roundRect">
-            <a:avLst>
-              <a:gd name="adj" fmla="val 6452"/>
-            </a:avLst>
-          </a:prstGeom>
-          <a:solidFill>
-            <a:srgbClr val="E8F8EF"/>
-          </a:solidFill>
-          <a:ln/>
-          <a:effectLst>
-            <a:outerShdw sx="100000" sy="100000" kx="0" ky="0" algn="bl" rotWithShape="0" blurRad="101600" dist="38100" dir="2700000">
-              <a:srgbClr val="000000">
-                <a:alpha val="12000"/>
-              </a:srgbClr>
-            </a:outerShdw>
-          </a:effectLst>
-        </p:spPr>
-      </p:sp>
-      <p:sp>
-        <p:nvSpPr>
-          <p:cNvPr id="10" name="Text 8"/>
-          <p:cNvSpPr/>
-          <p:nvPr/>
-        </p:nvSpPr>
-        <p:spPr>
-          <a:xfrm>
-            <a:off x="566928" y="2816352"/>
-            <a:ext cx="8229600" cy="237744"/>
-          </a:xfrm>
-          <a:prstGeom prst="rect">
-            <a:avLst/>
-          </a:prstGeom>
-          <a:noFill/>
-          <a:ln/>
-        </p:spPr>
-        <p:txBody>
-          <a:bodyPr wrap="square" lIns="0" tIns="0" rIns="0" bIns="0" rtlCol="0" anchor="ctr"/>
-          <a:lstStyle/>
-          <a:p>
-            <a:pPr indent="0" marL="0">
-              <a:buNone/>
-            </a:pPr>
-            <a:r>
-              <a:rPr lang="en-US" sz="1100" b="1" spc="100" kern="0" dirty="0">
-                <a:solidFill>
-                  <a:srgbClr val="34B76F"/>
-                </a:solidFill>
-                <a:latin typeface="Calibri" pitchFamily="34" charset="0"/>
-                <a:ea typeface="Calibri" pitchFamily="34" charset="-122"/>
-                <a:cs typeface="Calibri" pitchFamily="34" charset="-120"/>
-              </a:rPr>
-              <a:t>✅  CORRECTED</a:t>
-            </a:r>
-            <a:endParaRPr lang="en-US" sz="1100" dirty="0"/>
-          </a:p>
-        </p:txBody>
-      </p:sp>
-      <p:sp>
-        <p:nvSpPr>
-          <p:cNvPr id="11" name="Text 9"/>
-          <p:cNvSpPr/>
-          <p:nvPr/>
-        </p:nvSpPr>
-        <p:spPr>
-          <a:xfrm>
-            <a:off x="566928" y="3072384"/>
-            <a:ext cx="8010144" cy="685800"/>
-          </a:xfrm>
-          <a:prstGeom prst="rect">
-            <a:avLst/>
-          </a:prstGeom>
-          <a:noFill/>
-          <a:ln/>
-        </p:spPr>
-        <p:txBody>
-          <a:bodyPr wrap="square" lIns="0" tIns="0" rIns="0" bIns="0" rtlCol="0" anchor="ctr"/>
-          <a:lstStyle/>
-          <a:p>
-            <a:pPr indent="0" marL="0">
-              <a:buNone/>
-            </a:pPr>
-            <a:endParaRPr lang="en-US" sz="1400" dirty="0"/>
-          </a:p>
-          <a:p>
-            <a:pPr indent="0" marL="0">
-              <a:buNone/>
-            </a:pPr>
-            <a:r>
-              <a:rPr lang="en-US" sz="1400" i="1" dirty="0">
-                <a:solidFill>
-                  <a:srgbClr val="1E293B"/>
-                </a:solidFill>
-                <a:latin typeface="Calibri" pitchFamily="34" charset="0"/>
-                <a:ea typeface="Calibri" pitchFamily="34" charset="-122"/>
-                <a:cs typeface="Calibri" pitchFamily="34" charset="-120"/>
-              </a:rPr>
-              <a:t>1. Miggery Sow was a very small girl with very large ears who wanted to be a princess.</a:t>
-            </a:r>
-            <a:endParaRPr lang="en-US" sz="1400" dirty="0"/>
-          </a:p>
-        </p:txBody>
-      </p:sp>
-      <p:sp>
-        <p:nvSpPr>
-          <p:cNvPr id="12" name="Text 10"/>
-          <p:cNvSpPr/>
-          <p:nvPr/>
-        </p:nvSpPr>
-        <p:spPr>
-          <a:xfrm>
-            <a:off x="566928" y="3767328"/>
-            <a:ext cx="8010144" cy="320040"/>
-          </a:xfrm>
-          <a:prstGeom prst="rect">
-            <a:avLst/>
-          </a:prstGeom>
-          <a:noFill/>
-          <a:ln/>
-        </p:spPr>
-        <p:txBody>
-          <a:bodyPr wrap="square" lIns="0" tIns="0" rIns="0" bIns="0" rtlCol="0" anchor="ctr"/>
-          <a:lstStyle/>
-          <a:p>
-            <a:pPr indent="0" marL="0">
-              <a:buNone/>
-            </a:pPr>
-            <a:r>
-              <a:rPr lang="en-US" sz="1200" dirty="0">
-                <a:solidFill>
-                  <a:srgbClr val="64748B"/>
-                </a:solidFill>
-                <a:latin typeface="Calibri" pitchFamily="34" charset="0"/>
-                <a:ea typeface="Calibri" pitchFamily="34" charset="-122"/>
-                <a:cs typeface="Calibri" pitchFamily="34" charset="-120"/>
-              </a:rPr>
-              <a:t>Did you catch the proper noun (Miggery Sow), the pronoun (she), and the commas in the list?</a:t>
-            </a:r>
-            <a:endParaRPr lang="en-US" sz="1200" dirty="0"/>
+              <a:rPr lang="en-US" sz="1600" b="1" dirty="0">
+                <a:solidFill>
+                  <a:srgbClr val="0E1C42"/>
+                </a:solidFill>
+                <a:latin typeface="Calibri" pitchFamily="34" charset="0"/>
+                <a:ea typeface="Calibri" pitchFamily="34" charset="-122"/>
+                <a:cs typeface="Calibri" pitchFamily="34" charset="-120"/>
+              </a:rPr>
+              <a:t>Rewrite the sentence correctly in your notebook.</a:t>
+            </a:r>
+            <a:endParaRPr lang="en-US" sz="1600" dirty="0"/>
           </a:p>
         </p:txBody>
       </p:sp>
@@ -7208,7 +9772,7 @@
     <p:bg>
       <p:bgPr>
         <a:solidFill>
-          <a:srgbClr val="FFFFFF"/>
+          <a:srgbClr val="F8FAFC"/>
         </a:solidFill>
       </p:bgPr>
     </p:bg>
@@ -7241,7 +9805,7 @@
             <a:avLst/>
           </a:prstGeom>
           <a:solidFill>
-            <a:srgbClr val="8B6FC0"/>
+            <a:srgbClr val="55C8E8"/>
           </a:solidFill>
           <a:ln/>
         </p:spPr>
@@ -7279,7 +9843,7 @@
                 <a:ea typeface="Calibri" pitchFamily="34" charset="-122"/>
                 <a:cs typeface="Calibri" pitchFamily="34" charset="-120"/>
               </a:rPr>
-              <a:t>🌱  Morphology</a:t>
+              <a:t>✏️  Daily Oral Language</a:t>
             </a:r>
             <a:endParaRPr lang="en-US" sz="2200" dirty="0"/>
           </a:p>
@@ -7293,7 +9857,7 @@
         </p:nvSpPr>
         <p:spPr>
           <a:xfrm>
-            <a:off x="365760" y="804672"/>
+            <a:off x="365760" y="749808"/>
             <a:ext cx="8229600" cy="237744"/>
           </a:xfrm>
           <a:prstGeom prst="rect">
@@ -7312,13 +9876,13 @@
             <a:r>
               <a:rPr lang="en-US" sz="1100" b="1" spc="100" kern="0" dirty="0">
                 <a:solidFill>
-                  <a:srgbClr val="8B6FC0"/>
-                </a:solidFill>
-                <a:latin typeface="Calibri" pitchFamily="34" charset="0"/>
-                <a:ea typeface="Calibri" pitchFamily="34" charset="-122"/>
-                <a:cs typeface="Calibri" pitchFamily="34" charset="-120"/>
-              </a:rPr>
-              <a:t>DIS-</a:t>
+                  <a:srgbClr val="55C8E8"/>
+                </a:solidFill>
+                <a:latin typeface="Calibri" pitchFamily="34" charset="0"/>
+                <a:ea typeface="Calibri" pitchFamily="34" charset="-122"/>
+                <a:cs typeface="Calibri" pitchFamily="34" charset="-120"/>
+              </a:rPr>
+              <a:t>NOW FIX THIS ONE</a:t>
             </a:r>
             <a:endParaRPr lang="en-US" sz="1100" dirty="0"/>
           </a:p>
@@ -7332,18 +9896,23 @@
         </p:nvSpPr>
         <p:spPr>
           <a:xfrm>
-            <a:off x="365760" y="1097280"/>
-            <a:ext cx="8412480" cy="621792"/>
+            <a:off x="365760" y="1024128"/>
+            <a:ext cx="8412480" cy="777240"/>
           </a:xfrm>
           <a:prstGeom prst="roundRect">
             <a:avLst>
-              <a:gd name="adj" fmla="val 14706"/>
+              <a:gd name="adj" fmla="val 11765"/>
             </a:avLst>
           </a:prstGeom>
           <a:solidFill>
-            <a:srgbClr val="F0E8FF"/>
+            <a:srgbClr val="FFFFFF"/>
           </a:solidFill>
-          <a:ln/>
+          <a:ln w="19050">
+            <a:solidFill>
+              <a:srgbClr val="55C8E8"/>
+            </a:solidFill>
+            <a:prstDash val="solid"/>
+          </a:ln>
           <a:effectLst>
             <a:outerShdw sx="100000" sy="100000" kx="0" ky="0" algn="bl" rotWithShape="0" blurRad="101600" dist="38100" dir="2700000">
               <a:srgbClr val="000000">
@@ -7361,8 +9930,8 @@
         </p:nvSpPr>
         <p:spPr>
           <a:xfrm>
-            <a:off x="594360" y="1216152"/>
-            <a:ext cx="7863840" cy="384048"/>
+            <a:off x="594360" y="1152144"/>
+            <a:ext cx="7955280" cy="521208"/>
           </a:xfrm>
           <a:prstGeom prst="rect">
             <a:avLst/>
@@ -7378,17 +9947,17 @@
               <a:buNone/>
             </a:pPr>
             <a:r>
-              <a:rPr lang="en-US" sz="1500" dirty="0">
-                <a:solidFill>
-                  <a:srgbClr val="1E293B"/>
-                </a:solidFill>
-                <a:latin typeface="Calibri" pitchFamily="34" charset="0"/>
-                <a:ea typeface="Calibri" pitchFamily="34" charset="-122"/>
-                <a:cs typeface="Calibri" pitchFamily="34" charset="-120"/>
-              </a:rPr>
-              <a:t>🌱  disappear — base word: appear</a:t>
-            </a:r>
-            <a:endParaRPr lang="en-US" sz="1500" dirty="0"/>
+              <a:rPr lang="en-US" sz="1700" dirty="0">
+                <a:solidFill>
+                  <a:srgbClr val="1E293B"/>
+                </a:solidFill>
+                <a:latin typeface="Calibri" pitchFamily="34" charset="0"/>
+                <a:ea typeface="Calibri" pitchFamily="34" charset="-122"/>
+                <a:cs typeface="Calibri" pitchFamily="34" charset="-120"/>
+              </a:rPr>
+              <a:t>she had been sold by her father for a tablecloth a hen and a red bowl</a:t>
+            </a:r>
+            <a:endParaRPr lang="en-US" sz="1700" dirty="0"/>
           </a:p>
         </p:txBody>
       </p:sp>
@@ -7400,16 +9969,16 @@
         </p:nvSpPr>
         <p:spPr>
           <a:xfrm>
-            <a:off x="365760" y="1792224"/>
-            <a:ext cx="8412480" cy="621792"/>
+            <a:off x="365760" y="2743200"/>
+            <a:ext cx="8412480" cy="1417320"/>
           </a:xfrm>
           <a:prstGeom prst="roundRect">
             <a:avLst>
-              <a:gd name="adj" fmla="val 14706"/>
+              <a:gd name="adj" fmla="val 6452"/>
             </a:avLst>
           </a:prstGeom>
           <a:solidFill>
-            <a:srgbClr val="F8F4FF"/>
+            <a:srgbClr val="E8F8EF"/>
           </a:solidFill>
           <a:ln/>
           <a:effectLst>
@@ -7429,8 +9998,8 @@
         </p:nvSpPr>
         <p:spPr>
           <a:xfrm>
-            <a:off x="594360" y="1911096"/>
-            <a:ext cx="7863840" cy="384048"/>
+            <a:off x="566928" y="2816352"/>
+            <a:ext cx="8229600" cy="237744"/>
           </a:xfrm>
           <a:prstGeom prst="rect">
             <a:avLst/>
@@ -7446,59 +10015,30 @@
               <a:buNone/>
             </a:pPr>
             <a:r>
-              <a:rPr lang="en-US" sz="1500" dirty="0">
-                <a:solidFill>
-                  <a:srgbClr val="1E293B"/>
-                </a:solidFill>
-                <a:latin typeface="Calibri" pitchFamily="34" charset="0"/>
-                <a:ea typeface="Calibri" pitchFamily="34" charset="-122"/>
-                <a:cs typeface="Calibri" pitchFamily="34" charset="-120"/>
-              </a:rPr>
-              <a:t>🌱  dislike — base word: like</a:t>
-            </a:r>
-            <a:endParaRPr lang="en-US" sz="1500" dirty="0"/>
-          </a:p>
-        </p:txBody>
-      </p:sp>
-      <p:sp>
-        <p:nvSpPr>
-          <p:cNvPr id="9" name="Shape 7"/>
-          <p:cNvSpPr/>
-          <p:nvPr/>
-        </p:nvSpPr>
-        <p:spPr>
-          <a:xfrm>
-            <a:off x="365760" y="2487168"/>
-            <a:ext cx="8412480" cy="621792"/>
-          </a:xfrm>
-          <a:prstGeom prst="roundRect">
-            <a:avLst>
-              <a:gd name="adj" fmla="val 14706"/>
-            </a:avLst>
-          </a:prstGeom>
-          <a:solidFill>
-            <a:srgbClr val="F0E8FF"/>
-          </a:solidFill>
-          <a:ln/>
-          <a:effectLst>
-            <a:outerShdw sx="100000" sy="100000" kx="0" ky="0" algn="bl" rotWithShape="0" blurRad="101600" dist="38100" dir="2700000">
-              <a:srgbClr val="000000">
-                <a:alpha val="12000"/>
-              </a:srgbClr>
-            </a:outerShdw>
-          </a:effectLst>
-        </p:spPr>
-      </p:sp>
-      <p:sp>
-        <p:nvSpPr>
-          <p:cNvPr id="10" name="Text 8"/>
-          <p:cNvSpPr/>
-          <p:nvPr/>
-        </p:nvSpPr>
-        <p:spPr>
-          <a:xfrm>
-            <a:off x="594360" y="2606040"/>
-            <a:ext cx="7863840" cy="384048"/>
+              <a:rPr lang="en-US" sz="1100" b="1" spc="100" kern="0" dirty="0">
+                <a:solidFill>
+                  <a:srgbClr val="34B76F"/>
+                </a:solidFill>
+                <a:latin typeface="Calibri" pitchFamily="34" charset="0"/>
+                <a:ea typeface="Calibri" pitchFamily="34" charset="-122"/>
+                <a:cs typeface="Calibri" pitchFamily="34" charset="-120"/>
+              </a:rPr>
+              <a:t>✅  CORRECTED</a:t>
+            </a:r>
+            <a:endParaRPr lang="en-US" sz="1100" dirty="0"/>
+          </a:p>
+        </p:txBody>
+      </p:sp>
+      <p:sp>
+        <p:nvSpPr>
+          <p:cNvPr id="9" name="Text 7"/>
+          <p:cNvSpPr/>
+          <p:nvPr/>
+        </p:nvSpPr>
+        <p:spPr>
+          <a:xfrm>
+            <a:off x="566928" y="3072384"/>
+            <a:ext cx="8010144" cy="685800"/>
           </a:xfrm>
           <a:prstGeom prst="rect">
             <a:avLst/>
@@ -7514,85 +10054,23 @@
               <a:buNone/>
             </a:pPr>
             <a:r>
-              <a:rPr lang="en-US" sz="1500" dirty="0">
-                <a:solidFill>
-                  <a:srgbClr val="1E293B"/>
-                </a:solidFill>
-                <a:latin typeface="Calibri" pitchFamily="34" charset="0"/>
-                <a:ea typeface="Calibri" pitchFamily="34" charset="-122"/>
-                <a:cs typeface="Calibri" pitchFamily="34" charset="-120"/>
-              </a:rPr>
-              <a:t>🌱  disagree — base word: agree</a:t>
-            </a:r>
-            <a:endParaRPr lang="en-US" sz="1500" dirty="0"/>
-          </a:p>
-        </p:txBody>
-      </p:sp>
-      <p:sp>
-        <p:nvSpPr>
-          <p:cNvPr id="11" name="Shape 9"/>
-          <p:cNvSpPr/>
-          <p:nvPr/>
-        </p:nvSpPr>
-        <p:spPr>
-          <a:xfrm>
-            <a:off x="365760" y="3182112"/>
-            <a:ext cx="8412480" cy="621792"/>
-          </a:xfrm>
-          <a:prstGeom prst="roundRect">
-            <a:avLst>
-              <a:gd name="adj" fmla="val 14706"/>
-            </a:avLst>
-          </a:prstGeom>
-          <a:solidFill>
-            <a:srgbClr val="F8F4FF"/>
-          </a:solidFill>
-          <a:ln/>
-          <a:effectLst>
-            <a:outerShdw sx="100000" sy="100000" kx="0" ky="0" algn="bl" rotWithShape="0" blurRad="101600" dist="38100" dir="2700000">
-              <a:srgbClr val="000000">
-                <a:alpha val="12000"/>
-              </a:srgbClr>
-            </a:outerShdw>
-          </a:effectLst>
-        </p:spPr>
-      </p:sp>
-      <p:sp>
-        <p:nvSpPr>
-          <p:cNvPr id="12" name="Text 10"/>
-          <p:cNvSpPr/>
-          <p:nvPr/>
-        </p:nvSpPr>
-        <p:spPr>
-          <a:xfrm>
-            <a:off x="594360" y="3300984"/>
-            <a:ext cx="7863840" cy="384048"/>
-          </a:xfrm>
-          <a:prstGeom prst="rect">
-            <a:avLst/>
-          </a:prstGeom>
-          <a:noFill/>
-          <a:ln/>
-        </p:spPr>
-        <p:txBody>
-          <a:bodyPr wrap="square" lIns="0" tIns="0" rIns="0" bIns="0" rtlCol="0" anchor="ctr"/>
-          <a:lstStyle/>
-          <a:p>
-            <a:pPr indent="0" marL="0">
-              <a:buNone/>
-            </a:pPr>
-            <a:r>
-              <a:rPr lang="en-US" sz="1500" dirty="0">
-                <a:solidFill>
-                  <a:srgbClr val="1E293B"/>
-                </a:solidFill>
-                <a:latin typeface="Calibri" pitchFamily="34" charset="0"/>
-                <a:ea typeface="Calibri" pitchFamily="34" charset="-122"/>
-                <a:cs typeface="Calibri" pitchFamily="34" charset="-120"/>
-              </a:rPr>
-              <a:t>🌱  disobey — base word: obey</a:t>
-            </a:r>
-            <a:endParaRPr lang="en-US" sz="1500" dirty="0"/>
+              <a:rPr lang="en-US" sz="1400" i="1" dirty="0">
+                <a:solidFill>
+                  <a:srgbClr val="1E293B"/>
+                </a:solidFill>
+                <a:latin typeface="Calibri" pitchFamily="34" charset="0"/>
+                <a:ea typeface="Calibri" pitchFamily="34" charset="-122"/>
+                <a:cs typeface="Calibri" pitchFamily="34" charset="-120"/>
+              </a:rPr>
+              <a:t>She had been sold by her father for a tablecloth, a hen, and a red bowl.</a:t>
+            </a:r>
+            <a:endParaRPr lang="en-US" sz="1400" dirty="0"/>
+          </a:p>
+          <a:p>
+            <a:pPr indent="0" marL="0">
+              <a:buNone/>
+            </a:pPr>
+            <a:endParaRPr lang="en-US" sz="1400" dirty="0"/>
           </a:p>
         </p:txBody>
       </p:sp>
